--- a/_implementation-notes/evening-series/FotH Evening Session 16 Slides DRAFT v1.pptx
+++ b/_implementation-notes/evening-series/FotH Evening Session 16 Slides DRAFT v1.pptx
@@ -10,6 +10,7 @@
   <p:sldIdLst>
     <p:sldId id="256" r:id="rId2"/>
     <p:sldId id="306" r:id="rId199"/>
+    <p:sldId id="540" r:id="rId21"/>
     <p:sldId id="307" r:id="rId200"/>
     <p:sldId id="460" r:id="rId201"/>
     <p:sldId id="461" r:id="rId202"/>
@@ -17,7 +18,8 @@
     <p:sldId id="463" r:id="rId204"/>
     <p:sldId id="464" r:id="rId205"/>
     <p:sldId id="465" r:id="rId206"/>
-    <p:sldId id="539" r:id="rId207"/>
+    <p:sldId id="541" r:id="rId22"/>
+    <p:sldId id="542" r:id="rId23"/>
     <p:sldId id="466" r:id="rId208"/>
     <p:sldId id="467" r:id="rId209"/>
   </p:sldIdLst>
@@ -749,6 +751,214 @@
 </p:notes>
 </file>
 
+<file path=ppt/notesSlides/notesSlide13.xml><?xml version="1.0" encoding="utf-8"?>
+<p:notes xmlns:a="http://schemas.openxmlformats.org/drawingml/2006/main" xmlns:p="http://schemas.openxmlformats.org/presentationml/2006/main" xmlns:r="http://schemas.openxmlformats.org/officeDocument/2006/relationships">
+  <p:cSld>
+    <p:spTree>
+      <p:nvGrpSpPr>
+        <p:cNvPr id="1" name=""/>
+        <p:cNvGrpSpPr/>
+        <p:nvPr/>
+      </p:nvGrpSpPr>
+      <p:grpSpPr>
+        <a:xfrm>
+          <a:off x="0" y="0"/>
+          <a:ext cx="0" cy="0"/>
+          <a:chOff x="0" y="0"/>
+          <a:chExt cx="0" cy="0"/>
+        </a:xfrm>
+      </p:grpSpPr>
+      <p:sp>
+        <p:nvSpPr>
+          <p:cNvPr id="2" name="Notes Placeholder 1"/>
+          <p:cNvSpPr>
+            <a:spLocks noGrp="1"/>
+          </p:cNvSpPr>
+          <p:nvPr>
+            <p:ph type="body" idx="1"/>
+          </p:nvPr>
+        </p:nvSpPr>
+        <p:spPr/>
+        <p:txBody>
+          <a:bodyPr/>
+          <a:lstStyle/>
+          <a:p>
+            <a:r>
+              <a:t>S16 · WELCOME · LEAD: CONTAINER HOLDER · GROUNDING — every session opens on this map</a:t>
+            </a:r>
+          </a:p>
+          <a:p>
+            <a:r>
+              <a:t>BEATS:</a:t>
+            </a:r>
+          </a:p>
+          <a:p>
+            <a:r>
+              <a:t>1. Locate tonight on the map, plainly: Session 16 stands in the second box — Connect with Others, as family. Each connection makes the next one real (Matt. 22:37–40).</a:t>
+            </a:r>
+          </a:p>
+          <a:p>
+            <a:r>
+              <a:t>2. The four boxes are one journey — each connection makes the next one real — rooted in the two great commandments: love God, love neighbor (Matt 22:37–40).</a:t>
+            </a:r>
+          </a:p>
+          <a:p>
+            <a:r>
+              <a:t>3. This is also the 'where we are on the map' minute the welcome owes any newcomer.</a:t>
+            </a:r>
+          </a:p>
+          <a:p>
+            <a:r>
+              <a:t>CUES: Two minutes at most; then tonight's road.</a:t>
+            </a:r>
+          </a:p>
+        </p:txBody>
+      </p:sp>
+    </p:spTree>
+  </p:cSld>
+  <p:clrMapOvr>
+    <a:masterClrMapping/>
+  </p:clrMapOvr>
+</p:notes>
+</file>
+
+<file path=ppt/notesSlides/notesSlide14.xml><?xml version="1.0" encoding="utf-8"?>
+<p:notes xmlns:a="http://schemas.openxmlformats.org/drawingml/2006/main" xmlns:p="http://schemas.openxmlformats.org/presentationml/2006/main" xmlns:r="http://schemas.openxmlformats.org/officeDocument/2006/relationships">
+  <p:cSld>
+    <p:spTree>
+      <p:nvGrpSpPr>
+        <p:cNvPr id="1" name=""/>
+        <p:cNvGrpSpPr/>
+        <p:nvPr/>
+      </p:nvGrpSpPr>
+      <p:grpSpPr>
+        <a:xfrm>
+          <a:off x="0" y="0"/>
+          <a:ext cx="0" cy="0"/>
+          <a:chOff x="0" y="0"/>
+          <a:chExt cx="0" cy="0"/>
+        </a:xfrm>
+      </p:grpSpPr>
+      <p:sp>
+        <p:nvSpPr>
+          <p:cNvPr id="2" name="Notes Placeholder 1"/>
+          <p:cNvSpPr>
+            <a:spLocks noGrp="1"/>
+          </p:cNvSpPr>
+          <p:nvPr>
+            <p:ph type="body" idx="1"/>
+          </p:nvPr>
+        </p:nvSpPr>
+        <p:spPr/>
+        <p:txBody>
+          <a:bodyPr/>
+          <a:lstStyle/>
+          <a:p>
+            <a:r>
+              <a:t>S16 · COMMISSIONING · LEAD: CONTENT PRESENTER</a:t>
+            </a:r>
+          </a:p>
+          <a:p>
+            <a:r>
+              <a:t>BEATS:</a:t>
+            </a:r>
+          </a:p>
+          <a:p>
+            <a:r>
+              <a:t>1. The sheet on the screen is the sheet in their hands — walk it, don't read it.</a:t>
+            </a:r>
+          </a:p>
+          <a:p>
+            <a:r>
+              <a:t>2. The standing rhythm first: the morning question, the evening journal line — one box per day on the week-grids.</a:t>
+            </a:r>
+          </a:p>
+          <a:p>
+            <a:r>
+              <a:t>3. A missed box is never a failure — it is an invitation to return.</a:t>
+            </a:r>
+          </a:p>
+          <a:p>
+            <a:r>
+              <a:t>CUES: The four parts are the next slide.</a:t>
+            </a:r>
+          </a:p>
+        </p:txBody>
+      </p:sp>
+    </p:spTree>
+  </p:cSld>
+  <p:clrMapOvr>
+    <a:masterClrMapping/>
+  </p:clrMapOvr>
+</p:notes>
+</file>
+
+<file path=ppt/notesSlides/notesSlide15.xml><?xml version="1.0" encoding="utf-8"?>
+<p:notes xmlns:a="http://schemas.openxmlformats.org/drawingml/2006/main" xmlns:p="http://schemas.openxmlformats.org/presentationml/2006/main" xmlns:r="http://schemas.openxmlformats.org/officeDocument/2006/relationships">
+  <p:cSld>
+    <p:spTree>
+      <p:nvGrpSpPr>
+        <p:cNvPr id="1" name=""/>
+        <p:cNvGrpSpPr/>
+        <p:nvPr/>
+      </p:nvGrpSpPr>
+      <p:grpSpPr>
+        <a:xfrm>
+          <a:off x="0" y="0"/>
+          <a:ext cx="0" cy="0"/>
+          <a:chOff x="0" y="0"/>
+          <a:chExt cx="0" cy="0"/>
+        </a:xfrm>
+      </p:grpSpPr>
+      <p:sp>
+        <p:nvSpPr>
+          <p:cNvPr id="2" name="Notes Placeholder 1"/>
+          <p:cNvSpPr>
+            <a:spLocks noGrp="1"/>
+          </p:cNvSpPr>
+          <p:nvPr>
+            <p:ph type="body" idx="1"/>
+          </p:nvPr>
+        </p:nvSpPr>
+        <p:spPr/>
+        <p:txBody>
+          <a:bodyPr/>
+          <a:lstStyle/>
+          <a:p>
+            <a:r>
+              <a:t>S16 · COMMISSIONING · LEAD: CONTENT PRESENTER</a:t>
+            </a:r>
+          </a:p>
+          <a:p>
+            <a:r>
+              <a:t>BEATS:</a:t>
+            </a:r>
+          </a:p>
+          <a:p>
+            <a:r>
+              <a:t>1. The four parts, in order: the homework practice, week one; the end-of-week-one check-in; the homework practice, week two; one sentence of preparation.</a:t>
+            </a:r>
+          </a:p>
+          <a:p>
+            <a:r>
+              <a:t>2. Check-in partners are named aloud before leaving this slide — the sheet has the line to write the name.</a:t>
+            </a:r>
+          </a:p>
+          <a:p>
+            <a:r>
+              <a:t>GUARD: The sheet-walk, not a re-teach.</a:t>
+            </a:r>
+          </a:p>
+        </p:txBody>
+      </p:sp>
+    </p:spTree>
+  </p:cSld>
+  <p:clrMapOvr>
+    <a:masterClrMapping/>
+  </p:clrMapOvr>
+</p:notes>
+</file>
+
 <file path=ppt/notesSlides/notesSlide196.xml><?xml version="1.0" encoding="utf-8"?>
 <p:notes xmlns:a="http://schemas.openxmlformats.org/drawingml/2006/main" xmlns:r="http://schemas.openxmlformats.org/officeDocument/2006/relationships" xmlns:p="http://schemas.openxmlformats.org/presentationml/2006/main">
   <p:cSld>
@@ -894,20 +1104,22 @@
           <a:lstStyle/>
           <a:p>
             <a:r>
-              <a:rPr lang="en-US" sz="1200"/>
               <a:t>S16 · 7:00–7:08 · LEAD: CONTAINER HOLDER · STANDING CIRCLE</a:t>
             </a:r>
           </a:p>
           <a:p>
             <a:r>
-              <a:rPr lang="en-US" sz="1200"/>
               <a:t>BEATS: 1. Blessing first. 2. Container, briefly — Safe, Present, Clear, Intentional; it holds at a dinner table too. Phones silenced and away. 3. One word for how you actually are, around the circle; receive without commentary.</a:t>
             </a:r>
           </a:p>
           <a:p>
             <a:r>
-              <a:rPr lang="en-US" sz="1200"/>
               <a:t>GUARD: Keep the open genuinely short — the room is smelling the food. A long preamble teaches the room the team cannot help itself.</a:t>
+            </a:r>
+          </a:p>
+          <a:p>
+            <a:r>
+              <a:t>PAIR LEAD: name the leading pair in the welcome — two leaders hold tonight, and the room will see the evening handed back and forth between them; that is the design. The pair practices the session together beforehand.</a:t>
             </a:r>
           </a:p>
         </p:txBody>
@@ -1203,59 +1415,6 @@
             <a:r>
               <a:rPr lang="en-US" sz="1200"/>
               <a:t>GUARD: 'Sorry to end a fun night with paperwork' undoes the instrument — frame it as steering, never homework.</a:t>
-            </a:r>
-          </a:p>
-        </p:txBody>
-      </p:sp>
-    </p:spTree>
-  </p:cSld>
-  <p:clrMapOvr>
-    <a:masterClrMapping/>
-  </p:clrMapOvr>
-</p:notes>
-</file>
-
-<file path=ppt/notesSlides/notesSlide204.xml><?xml version="1.0" encoding="utf-8"?>
-<p:notes xmlns:a="http://schemas.openxmlformats.org/drawingml/2006/main" xmlns:r="http://schemas.openxmlformats.org/officeDocument/2006/relationships" xmlns:p="http://schemas.openxmlformats.org/presentationml/2006/main">
-  <p:cSld>
-    <p:spTree>
-      <p:nvGrpSpPr>
-        <p:cNvPr id="1" name=""/>
-        <p:cNvGrpSpPr/>
-        <p:nvPr/>
-      </p:nvGrpSpPr>
-      <p:grpSpPr>
-        <a:xfrm>
-          <a:off x="0" y="0"/>
-          <a:ext cx="0" cy="0"/>
-          <a:chOff x="0" y="0"/>
-          <a:chExt cx="0" cy="0"/>
-        </a:xfrm>
-      </p:grpSpPr>
-      <p:sp>
-        <p:nvSpPr>
-          <p:cNvPr id="2" name="Notes Placeholder 1"/>
-          <p:cNvSpPr>
-            <a:spLocks noGrp="1"/>
-          </p:cNvSpPr>
-          <p:nvPr>
-            <p:ph type="body" idx="1"/>
-          </p:nvPr>
-        </p:nvSpPr>
-        <p:spPr/>
-        <p:txBody>
-          <a:bodyPr/>
-          <a:lstStyle/>
-          <a:p>
-            <a:r>
-              <a:rPr lang="en-US" sz="1200"/>
-              <a:t>S16 · 8:17–8:20 · LEAD: CONTENT PRESENTER · WHOLE ROOM</a:t>
-            </a:r>
-          </a:p>
-          <a:p>
-            <a:r>
-              <a:rPr lang="en-US" sz="1200"/>
-              <a:t>BEATS: 1. One daily row: your Rhythm Card dailies as built — the morning question and evening note live on the card now. 2. One-time boxes: the Pulse, five minutes, back in the bin when we gather; optional — one Family Conversation Card at home, ten minutes. 3. A missed box is never failure — an invitation to return.</a:t>
             </a:r>
           </a:p>
         </p:txBody>
@@ -4579,7 +4738,1338 @@
 </p:sld>
 </file>
 
-<file path=ppt/slides/slide198.xml><?xml version="1.0" encoding="utf-8"?>
+<file path=ppt/slides/slide11.xml><?xml version="1.0" encoding="utf-8"?>
+<p:sld xmlns:a="http://schemas.openxmlformats.org/drawingml/2006/main" xmlns:r="http://schemas.openxmlformats.org/officeDocument/2006/relationships" xmlns:p="http://schemas.openxmlformats.org/presentationml/2006/main">
+  <p:cSld>
+    <p:spTree>
+      <p:nvGrpSpPr>
+        <p:cNvPr id="1" name=""/>
+        <p:cNvGrpSpPr/>
+        <p:nvPr/>
+      </p:nvGrpSpPr>
+      <p:grpSpPr>
+        <a:xfrm>
+          <a:off x="0" y="0"/>
+          <a:ext cx="0" cy="0"/>
+          <a:chOff x="0" y="0"/>
+          <a:chExt cx="0" cy="0"/>
+        </a:xfrm>
+      </p:grpSpPr>
+      <p:sp>
+        <p:nvSpPr>
+          <p:cNvPr id="2" name="Rectangle 1"/>
+          <p:cNvSpPr/>
+          <p:nvPr/>
+        </p:nvSpPr>
+        <p:spPr>
+          <a:xfrm>
+            <a:off x="0" y="0"/>
+            <a:ext cx="12191695" cy="6858000"/>
+          </a:xfrm>
+          <a:prstGeom prst="rect">
+            <a:avLst/>
+          </a:prstGeom>
+          <a:solidFill>
+            <a:srgbClr val="FFFFFF"/>
+          </a:solidFill>
+          <a:ln>
+            <a:noFill/>
+          </a:ln>
+        </p:spPr>
+        <p:txBody>
+          <a:bodyPr/>
+          <a:lstStyle/>
+          <a:p>
+            <a:endParaRPr/>
+          </a:p>
+        </p:txBody>
+      </p:sp>
+      <p:sp>
+        <p:nvSpPr>
+          <p:cNvPr id="3" name="TextBox 2"/>
+          <p:cNvSpPr txBox="1"/>
+          <p:nvPr/>
+        </p:nvSpPr>
+        <p:spPr>
+          <a:xfrm>
+            <a:off x="822960" y="502920"/>
+            <a:ext cx="10515600" cy="822960"/>
+          </a:xfrm>
+          <a:prstGeom prst="rect">
+            <a:avLst/>
+          </a:prstGeom>
+          <a:noFill/>
+        </p:spPr>
+        <p:txBody>
+          <a:bodyPr wrap="square">
+            <a:spAutoFit/>
+          </a:bodyPr>
+          <a:lstStyle/>
+          <a:p>
+            <a:pPr algn="l">
+              <a:spcAft>
+                <a:spcPts val="600"/>
+              </a:spcAft>
+            </a:pPr>
+            <a:r>
+              <a:rPr sz="2800" b="1" i="0">
+                <a:solidFill>
+                  <a:srgbClr val="2C5F2D"/>
+                </a:solidFill>
+                <a:latin typeface="Cambria"/>
+              </a:rPr>
+              <a:t>The Leader Feedback Round</a:t>
+            </a:r>
+          </a:p>
+        </p:txBody>
+      </p:sp>
+      <p:sp>
+        <p:nvSpPr>
+          <p:cNvPr id="4" name="TextBox 4"/>
+          <p:cNvSpPr txBox="1"/>
+          <p:nvPr/>
+        </p:nvSpPr>
+        <p:spPr>
+          <a:xfrm>
+            <a:off x="822960" y="1554480"/>
+            <a:ext cx="6675120" cy="4892040"/>
+          </a:xfrm>
+          <a:prstGeom prst="rect">
+            <a:avLst/>
+          </a:prstGeom>
+          <a:noFill/>
+        </p:spPr>
+        <p:txBody>
+          <a:bodyPr wrap="square" lIns="91440" tIns="91440" rIns="91440" bIns="91440"/>
+          <a:lstStyle/>
+          <a:p>
+            <a:pPr marL="274320" indent="-274320">
+              <a:spcAft>
+                <a:spcPts val="900"/>
+              </a:spcAft>
+            </a:pPr>
+            <a:r>
+              <a:rPr sz="2800" b="1" i="0">
+                <a:solidFill>
+                  <a:srgbClr val="97BC62"/>
+                </a:solidFill>
+                <a:latin typeface="Calibri"/>
+              </a:rPr>
+              <a:t>•  </a:t>
+            </a:r>
+            <a:r>
+              <a:rPr sz="2800" b="0" i="0">
+                <a:solidFill>
+                  <a:srgbClr val="222B22"/>
+                </a:solidFill>
+                <a:latin typeface="Calibri"/>
+              </a:rPr>
+              <a:t>Two rounds, same as every session — the container holder first, then the content presenter: three things each</a:t>
+            </a:r>
+          </a:p>
+          <a:p>
+            <a:pPr marL="685800" indent="-274320">
+              <a:spcAft>
+                <a:spcPts val="700"/>
+              </a:spcAft>
+            </a:pPr>
+            <a:r>
+              <a:rPr sz="2000" b="1" i="0">
+                <a:solidFill>
+                  <a:srgbClr val="97BC62"/>
+                </a:solidFill>
+                <a:latin typeface="Calibri"/>
+              </a:rPr>
+              <a:t>–  </a:t>
+            </a:r>
+            <a:r>
+              <a:rPr sz="2000" b="0" i="1">
+                <a:solidFill>
+                  <a:srgbClr val="222B22"/>
+                </a:solidFill>
+                <a:latin typeface="Calibri"/>
+              </a:rPr>
+              <a:t>“What I think went well tonight: ______”</a:t>
+            </a:r>
+          </a:p>
+          <a:p>
+            <a:pPr marL="685800" indent="-274320">
+              <a:spcAft>
+                <a:spcPts val="700"/>
+              </a:spcAft>
+            </a:pPr>
+            <a:r>
+              <a:rPr sz="2000" b="1" i="0">
+                <a:solidFill>
+                  <a:srgbClr val="97BC62"/>
+                </a:solidFill>
+                <a:latin typeface="Calibri"/>
+              </a:rPr>
+              <a:t>–  </a:t>
+            </a:r>
+            <a:r>
+              <a:rPr sz="2000" b="0" i="1">
+                <a:solidFill>
+                  <a:srgbClr val="222B22"/>
+                </a:solidFill>
+                <a:latin typeface="Calibri"/>
+              </a:rPr>
+              <a:t>“What I’d do differently next time: ______”</a:t>
+            </a:r>
+          </a:p>
+          <a:p>
+            <a:pPr marL="685800" indent="-274320">
+              <a:spcAft>
+                <a:spcPts val="700"/>
+              </a:spcAft>
+            </a:pPr>
+            <a:r>
+              <a:rPr sz="2000" b="1" i="0">
+                <a:solidFill>
+                  <a:srgbClr val="97BC62"/>
+                </a:solidFill>
+                <a:latin typeface="Calibri"/>
+              </a:rPr>
+              <a:t>–  </a:t>
+            </a:r>
+            <a:r>
+              <a:rPr sz="2000" b="0" i="1">
+                <a:solidFill>
+                  <a:srgbClr val="222B22"/>
+                </a:solidFill>
+                <a:latin typeface="Calibri"/>
+              </a:rPr>
+              <a:t>“If I were to teach tonight’s process to someone, I would tell them: ______”</a:t>
+            </a:r>
+          </a:p>
+          <a:p>
+            <a:pPr marL="274320" indent="-274320">
+              <a:spcAft>
+                <a:spcPts val="900"/>
+              </a:spcAft>
+            </a:pPr>
+            <a:r>
+              <a:rPr sz="2800" b="1" i="0">
+                <a:solidFill>
+                  <a:srgbClr val="97BC62"/>
+                </a:solidFill>
+                <a:latin typeface="Calibri"/>
+              </a:rPr>
+              <a:t>•  </a:t>
+            </a:r>
+            <a:r>
+              <a:rPr sz="2800" b="0" i="0">
+                <a:solidFill>
+                  <a:srgbClr val="222B22"/>
+                </a:solidFill>
+                <a:latin typeface="Calibri"/>
+              </a:rPr>
+              <a:t>Then the room — the same two questions about tonight</a:t>
+            </a:r>
+          </a:p>
+          <a:p>
+            <a:pPr marL="274320" indent="-274320">
+              <a:spcAft>
+                <a:spcPts val="900"/>
+              </a:spcAft>
+            </a:pPr>
+            <a:r>
+              <a:rPr sz="2800" b="1" i="0">
+                <a:solidFill>
+                  <a:srgbClr val="97BC62"/>
+                </a:solidFill>
+                <a:latin typeface="Calibri"/>
+              </a:rPr>
+              <a:t>•  </a:t>
+            </a:r>
+            <a:r>
+              <a:rPr sz="2800" b="0" i="0">
+                <a:solidFill>
+                  <a:srgbClr val="222B22"/>
+                </a:solidFill>
+                <a:latin typeface="Calibri"/>
+              </a:rPr>
+              <a:t>The leaders receive without defending — “thank you” is the whole response</a:t>
+            </a:r>
+          </a:p>
+        </p:txBody>
+      </p:sp>
+      <p:sp>
+        <p:nvSpPr>
+          <p:cNvPr id="90" name="SlideNum"/>
+          <p:cNvSpPr txBox="1"/>
+          <p:nvPr/>
+        </p:nvSpPr>
+        <p:spPr>
+          <a:xfrm>
+            <a:off x="11384280" y="6446520"/>
+            <a:ext cx="640080" cy="292608"/>
+          </a:xfrm>
+          <a:prstGeom prst="rect">
+            <a:avLst/>
+          </a:prstGeom>
+          <a:noFill/>
+        </p:spPr>
+        <p:txBody>
+          <a:bodyPr wrap="none" lIns="0" tIns="0" rIns="45720" bIns="0" anchor="ctr"/>
+          <a:lstStyle/>
+          <a:p>
+            <a:pPr algn="r"/>
+            <a:r>
+              <a:t>207</a:t>
+            </a:r>
+            <a:endParaRPr sz="1000" b="1">
+              <a:solidFill>
+                <a:srgbClr val="7A8A6E"/>
+              </a:solidFill>
+              <a:latin typeface="Calibri"/>
+            </a:endParaRPr>
+          </a:p>
+        </p:txBody>
+      </p:sp>
+      <p:pic>
+        <p:nvPicPr>
+          <p:cNvPr id="33" name="Picture 33" descr="compass on the trail - the weekly bearing check"/>
+          <p:cNvPicPr>
+            <a:picLocks noChangeAspect="1"/>
+          </p:cNvPicPr>
+          <p:nvPr/>
+        </p:nvPicPr>
+        <p:blipFill>
+          <a:blip r:embed="rId3"/>
+          <a:stretch>
+            <a:fillRect/>
+          </a:stretch>
+        </p:blipFill>
+        <p:spPr>
+          <a:xfrm>
+            <a:off x="8106160" y="1463040"/>
+            <a:ext cx="3259831" cy="4892040"/>
+          </a:xfrm>
+          <a:prstGeom prst="rect">
+            <a:avLst/>
+          </a:prstGeom>
+          <a:ln w="76200">
+            <a:solidFill>
+              <a:srgbClr val="FFFFFF"/>
+            </a:solidFill>
+          </a:ln>
+          <a:effectLst>
+            <a:outerShdw blurRad="63500" dist="25400" dir="5400000" rotWithShape="0">
+              <a:srgbClr val="000000">
+                <a:alpha val="35000"/>
+              </a:srgbClr>
+            </a:outerShdw>
+          </a:effectLst>
+        </p:spPr>
+      </p:pic>
+    </p:spTree>
+  </p:cSld>
+  <p:clrMapOvr>
+    <a:masterClrMapping/>
+  </p:clrMapOvr>
+</p:sld>
+</file>
+
+<file path=ppt/slides/slide12.xml><?xml version="1.0" encoding="utf-8"?>
+<p:sld xmlns:a="http://schemas.openxmlformats.org/drawingml/2006/main" xmlns:r="http://schemas.openxmlformats.org/officeDocument/2006/relationships" xmlns:p="http://schemas.openxmlformats.org/presentationml/2006/main">
+  <p:cSld>
+    <p:spTree>
+      <p:nvGrpSpPr>
+        <p:cNvPr id="1" name=""/>
+        <p:cNvGrpSpPr/>
+        <p:nvPr/>
+      </p:nvGrpSpPr>
+      <p:grpSpPr>
+        <a:xfrm>
+          <a:off x="0" y="0"/>
+          <a:ext cx="0" cy="0"/>
+          <a:chOff x="0" y="0"/>
+          <a:chExt cx="0" cy="0"/>
+        </a:xfrm>
+      </p:grpSpPr>
+      <p:sp>
+        <p:nvSpPr>
+          <p:cNvPr id="2" name="Rectangle 1"/>
+          <p:cNvSpPr/>
+          <p:nvPr/>
+        </p:nvSpPr>
+        <p:spPr>
+          <a:xfrm>
+            <a:off x="0" y="0"/>
+            <a:ext cx="12191695" cy="6858000"/>
+          </a:xfrm>
+          <a:prstGeom prst="rect">
+            <a:avLst/>
+          </a:prstGeom>
+          <a:solidFill>
+            <a:srgbClr val="FFFFFF"/>
+          </a:solidFill>
+          <a:ln>
+            <a:noFill/>
+          </a:ln>
+        </p:spPr>
+        <p:txBody>
+          <a:bodyPr/>
+          <a:lstStyle/>
+          <a:p>
+            <a:endParaRPr/>
+          </a:p>
+        </p:txBody>
+      </p:sp>
+      <p:sp>
+        <p:nvSpPr>
+          <p:cNvPr id="3" name="TextBox 2"/>
+          <p:cNvSpPr txBox="1"/>
+          <p:nvPr/>
+        </p:nvSpPr>
+        <p:spPr>
+          <a:xfrm>
+            <a:off x="822960" y="502920"/>
+            <a:ext cx="10515600" cy="822960"/>
+          </a:xfrm>
+          <a:prstGeom prst="rect">
+            <a:avLst/>
+          </a:prstGeom>
+          <a:noFill/>
+        </p:spPr>
+        <p:txBody>
+          <a:bodyPr wrap="square">
+            <a:spAutoFit/>
+          </a:bodyPr>
+          <a:lstStyle/>
+          <a:p>
+            <a:pPr algn="l">
+              <a:spcAft>
+                <a:spcPts val="600"/>
+              </a:spcAft>
+            </a:pPr>
+            <a:r>
+              <a:rPr sz="2800" b="1" i="0">
+                <a:solidFill>
+                  <a:srgbClr val="2C5F2D"/>
+                </a:solidFill>
+                <a:latin typeface="Cambria"/>
+              </a:rPr>
+              <a:t>Closing the Container + Aaronic Blessing</a:t>
+            </a:r>
+          </a:p>
+        </p:txBody>
+      </p:sp>
+      <p:sp>
+        <p:nvSpPr>
+          <p:cNvPr id="4" name="TextBox 4"/>
+          <p:cNvSpPr txBox="1"/>
+          <p:nvPr/>
+        </p:nvSpPr>
+        <p:spPr>
+          <a:xfrm>
+            <a:off x="822960" y="1600200"/>
+            <a:ext cx="5669280" cy="4572000"/>
+          </a:xfrm>
+          <a:prstGeom prst="rect">
+            <a:avLst/>
+          </a:prstGeom>
+          <a:noFill/>
+        </p:spPr>
+        <p:txBody>
+          <a:bodyPr wrap="square" lIns="91440" tIns="91440" rIns="91440" bIns="91440"/>
+          <a:lstStyle/>
+          <a:p>
+            <a:pPr marL="274320" indent="-274320">
+              <a:spcAft>
+                <a:spcPts val="900"/>
+              </a:spcAft>
+            </a:pPr>
+            <a:r>
+              <a:rPr sz="2200" b="1" i="0">
+                <a:solidFill>
+                  <a:srgbClr val="97BC62"/>
+                </a:solidFill>
+                <a:latin typeface="Calibri"/>
+              </a:rPr>
+              <a:t>•  </a:t>
+            </a:r>
+            <a:r>
+              <a:rPr sz="2200" b="0" i="0">
+                <a:solidFill>
+                  <a:srgbClr val="222B22"/>
+                </a:solidFill>
+                <a:latin typeface="Calibri"/>
+              </a:rPr>
+              <a:t>We close the way we opened — the container, six steps:</a:t>
+            </a:r>
+          </a:p>
+          <a:p>
+            <a:pPr marL="685800" indent="-274320">
+              <a:spcAft>
+                <a:spcPts val="700"/>
+              </a:spcAft>
+            </a:pPr>
+            <a:r>
+              <a:rPr sz="2000" b="1" i="0">
+                <a:solidFill>
+                  <a:srgbClr val="97BC62"/>
+                </a:solidFill>
+                <a:latin typeface="Calibri"/>
+              </a:rPr>
+              <a:t>1   </a:t>
+            </a:r>
+            <a:r>
+              <a:rPr sz="2000" b="0" i="0">
+                <a:solidFill>
+                  <a:srgbClr val="222B22"/>
+                </a:solidFill>
+                <a:latin typeface="Calibri"/>
+              </a:rPr>
+              <a:t>Stand again — same circle, same posture as the open</a:t>
+            </a:r>
+          </a:p>
+          <a:p>
+            <a:pPr marL="685800" indent="-274320">
+              <a:spcAft>
+                <a:spcPts val="700"/>
+              </a:spcAft>
+            </a:pPr>
+            <a:r>
+              <a:rPr sz="2000" b="1" i="0">
+                <a:solidFill>
+                  <a:srgbClr val="97BC62"/>
+                </a:solidFill>
+                <a:latin typeface="Calibri"/>
+              </a:rPr>
+              <a:t>2   </a:t>
+            </a:r>
+            <a:r>
+              <a:rPr sz="2000" b="0" i="0">
+                <a:solidFill>
+                  <a:srgbClr val="222B22"/>
+                </a:solidFill>
+                <a:latin typeface="Calibri"/>
+              </a:rPr>
+              <a:t>One-word landing — compare it to your opening word</a:t>
+            </a:r>
+          </a:p>
+          <a:p>
+            <a:pPr marL="685800" indent="-274320">
+              <a:spcAft>
+                <a:spcPts val="700"/>
+              </a:spcAft>
+            </a:pPr>
+            <a:r>
+              <a:rPr sz="2000" b="1" i="0">
+                <a:solidFill>
+                  <a:srgbClr val="97BC62"/>
+                </a:solidFill>
+                <a:latin typeface="Calibri"/>
+              </a:rPr>
+              <a:t>3   </a:t>
+            </a:r>
+            <a:r>
+              <a:rPr sz="2000" b="0" i="0">
+                <a:solidFill>
+                  <a:srgbClr val="222B22"/>
+                </a:solidFill>
+                <a:latin typeface="Calibri"/>
+              </a:rPr>
+              <a:t>The one thing you are taking from tonight</a:t>
+            </a:r>
+          </a:p>
+          <a:p>
+            <a:pPr marL="685800" indent="-274320">
+              <a:spcAft>
+                <a:spcPts val="700"/>
+              </a:spcAft>
+            </a:pPr>
+            <a:r>
+              <a:rPr sz="2000" b="1" i="0">
+                <a:solidFill>
+                  <a:srgbClr val="97BC62"/>
+                </a:solidFill>
+                <a:latin typeface="Calibri"/>
+              </a:rPr>
+              <a:t>4   </a:t>
+            </a:r>
+            <a:r>
+              <a:rPr sz="2000" b="0" i="0">
+                <a:solidFill>
+                  <a:srgbClr val="222B22"/>
+                </a:solidFill>
+                <a:latin typeface="Calibri"/>
+              </a:rPr>
+              <a:t>The one practice — committed aloud, or modified to one you will actually keep</a:t>
+            </a:r>
+          </a:p>
+          <a:p>
+            <a:pPr marL="685800" indent="-274320">
+              <a:spcAft>
+                <a:spcPts val="700"/>
+              </a:spcAft>
+            </a:pPr>
+            <a:r>
+              <a:rPr sz="2000" b="1" i="0">
+                <a:solidFill>
+                  <a:srgbClr val="97BC62"/>
+                </a:solidFill>
+                <a:latin typeface="Calibri"/>
+              </a:rPr>
+              <a:t>5   </a:t>
+            </a:r>
+            <a:r>
+              <a:rPr sz="2000" b="0" i="0">
+                <a:solidFill>
+                  <a:srgbClr val="222B22"/>
+                </a:solidFill>
+                <a:latin typeface="Calibri"/>
+              </a:rPr>
+              <a:t>Blessings — specific, witnessed, short</a:t>
+            </a:r>
+          </a:p>
+          <a:p>
+            <a:pPr marL="685800" indent="-274320">
+              <a:spcAft>
+                <a:spcPts val="700"/>
+              </a:spcAft>
+            </a:pPr>
+            <a:r>
+              <a:rPr sz="2000" b="1" i="0">
+                <a:solidFill>
+                  <a:srgbClr val="97BC62"/>
+                </a:solidFill>
+                <a:latin typeface="Calibri"/>
+              </a:rPr>
+              <a:t>6   </a:t>
+            </a:r>
+            <a:r>
+              <a:rPr sz="2000" b="0" i="0">
+                <a:solidFill>
+                  <a:srgbClr val="222B22"/>
+                </a:solidFill>
+                <a:latin typeface="Calibri"/>
+              </a:rPr>
+              <a:t>Closing prayer — and the Aaronic blessing, spoken over each other, face to face</a:t>
+            </a:r>
+          </a:p>
+        </p:txBody>
+      </p:sp>
+      <p:sp>
+        <p:nvSpPr>
+          <p:cNvPr id="6" name="TextBox 6"/>
+          <p:cNvSpPr txBox="1"/>
+          <p:nvPr/>
+        </p:nvSpPr>
+        <p:spPr>
+          <a:xfrm>
+            <a:off x="6766560" y="1737360"/>
+            <a:ext cx="4663440" cy="2926080"/>
+          </a:xfrm>
+          <a:prstGeom prst="rect">
+            <a:avLst/>
+          </a:prstGeom>
+          <a:solidFill>
+            <a:srgbClr val="F1F6EC"/>
+          </a:solidFill>
+        </p:spPr>
+        <p:txBody>
+          <a:bodyPr wrap="square" lIns="91440" tIns="91440" rIns="91440" bIns="91440" anchor="ctr"/>
+          <a:lstStyle/>
+          <a:p>
+            <a:pPr>
+              <a:spcAft>
+                <a:spcPts val="900"/>
+              </a:spcAft>
+            </a:pPr>
+            <a:r>
+              <a:rPr sz="1200" b="1" i="0">
+                <a:solidFill>
+                  <a:srgbClr val="97BC62"/>
+                </a:solidFill>
+                <a:latin typeface="Calibri"/>
+              </a:rPr>
+              <a:t>THE AARONIC BLESSING — NUMBERS 6:24–26</a:t>
+            </a:r>
+          </a:p>
+          <a:p>
+            <a:pPr>
+              <a:spcAft>
+                <a:spcPts val="600"/>
+              </a:spcAft>
+            </a:pPr>
+            <a:r>
+              <a:rPr sz="2400" b="0" i="1">
+                <a:solidFill>
+                  <a:srgbClr val="222B22"/>
+                </a:solidFill>
+                <a:latin typeface="Cambria"/>
+              </a:rPr>
+              <a:t>“The Lord bless you and keep you;</a:t>
+            </a:r>
+          </a:p>
+          <a:p>
+            <a:pPr>
+              <a:spcAft>
+                <a:spcPts val="600"/>
+              </a:spcAft>
+            </a:pPr>
+            <a:r>
+              <a:rPr sz="2400" b="0" i="1">
+                <a:solidFill>
+                  <a:srgbClr val="222B22"/>
+                </a:solidFill>
+                <a:latin typeface="Cambria"/>
+              </a:rPr>
+              <a:t>the Lord make his face to shine upon you, and be gracious to you;</a:t>
+            </a:r>
+          </a:p>
+          <a:p>
+            <a:pPr>
+              <a:spcAft>
+                <a:spcPts val="600"/>
+              </a:spcAft>
+            </a:pPr>
+            <a:r>
+              <a:rPr sz="2400" b="0" i="1">
+                <a:solidFill>
+                  <a:srgbClr val="222B22"/>
+                </a:solidFill>
+                <a:latin typeface="Cambria"/>
+              </a:rPr>
+              <a:t>the Lord lift up his countenance upon you, and give you peace.”</a:t>
+            </a:r>
+          </a:p>
+        </p:txBody>
+      </p:sp>
+      <p:sp>
+        <p:nvSpPr>
+          <p:cNvPr id="90" name="SlideNum"/>
+          <p:cNvSpPr txBox="1"/>
+          <p:nvPr/>
+        </p:nvSpPr>
+        <p:spPr>
+          <a:xfrm>
+            <a:off x="11384280" y="6446520"/>
+            <a:ext cx="640080" cy="292608"/>
+          </a:xfrm>
+          <a:prstGeom prst="rect">
+            <a:avLst/>
+          </a:prstGeom>
+          <a:noFill/>
+        </p:spPr>
+        <p:txBody>
+          <a:bodyPr wrap="none" lIns="0" tIns="0" rIns="45720" bIns="0" anchor="ctr"/>
+          <a:lstStyle/>
+          <a:p>
+            <a:pPr algn="r"/>
+            <a:r>
+              <a:t>208</a:t>
+            </a:r>
+            <a:endParaRPr sz="1000" b="1">
+              <a:solidFill>
+                <a:srgbClr val="7A8A6E"/>
+              </a:solidFill>
+              <a:latin typeface="Calibri"/>
+            </a:endParaRPr>
+          </a:p>
+        </p:txBody>
+      </p:sp>
+    </p:spTree>
+  </p:cSld>
+  <p:clrMapOvr>
+    <a:masterClrMapping/>
+  </p:clrMapOvr>
+</p:sld>
+</file>
+
+<file path=ppt/slides/slide13.xml><?xml version="1.0" encoding="utf-8"?>
+<p:sld xmlns:a="http://schemas.openxmlformats.org/drawingml/2006/main" xmlns:p="http://schemas.openxmlformats.org/presentationml/2006/main" xmlns:r="http://schemas.openxmlformats.org/officeDocument/2006/relationships">
+  <p:cSld>
+    <p:spTree>
+      <p:nvGrpSpPr>
+        <p:cNvPr id="1" name=""/>
+        <p:cNvGrpSpPr/>
+        <p:nvPr/>
+      </p:nvGrpSpPr>
+      <p:grpSpPr/>
+      <p:sp>
+        <p:nvSpPr>
+          <p:cNvPr id="2" name="Rectangle 1"/>
+          <p:cNvSpPr/>
+          <p:nvPr/>
+        </p:nvSpPr>
+        <p:spPr>
+          <a:xfrm>
+            <a:off x="0" y="0"/>
+            <a:ext cx="12192000" cy="6858000"/>
+          </a:xfrm>
+          <a:prstGeom prst="rect">
+            <a:avLst/>
+          </a:prstGeom>
+          <a:solidFill>
+            <a:srgbClr val="FFFFFF"/>
+          </a:solidFill>
+          <a:ln>
+            <a:noFill/>
+          </a:ln>
+          <a:effectLst/>
+        </p:spPr>
+        <p:style>
+          <a:lnRef idx="1">
+            <a:schemeClr val="accent1"/>
+          </a:lnRef>
+          <a:fillRef idx="3">
+            <a:schemeClr val="accent1"/>
+          </a:fillRef>
+          <a:effectRef idx="2">
+            <a:schemeClr val="accent1"/>
+          </a:effectRef>
+          <a:fontRef idx="minor">
+            <a:schemeClr val="lt1"/>
+          </a:fontRef>
+        </p:style>
+        <p:txBody>
+          <a:bodyPr rtlCol="0" anchor="ctr"/>
+          <a:lstStyle/>
+          <a:p>
+            <a:pPr algn="ctr"/>
+          </a:p>
+        </p:txBody>
+      </p:sp>
+      <p:sp>
+        <p:nvSpPr>
+          <p:cNvPr id="3" name="TextBox 2"/>
+          <p:cNvSpPr txBox="1"/>
+          <p:nvPr/>
+        </p:nvSpPr>
+        <p:spPr>
+          <a:xfrm>
+            <a:off x="822960" y="502920"/>
+            <a:ext cx="10515600" cy="822960"/>
+          </a:xfrm>
+          <a:prstGeom prst="rect">
+            <a:avLst/>
+          </a:prstGeom>
+          <a:noFill/>
+        </p:spPr>
+        <p:txBody>
+          <a:bodyPr wrap="square">
+            <a:spAutoFit/>
+          </a:bodyPr>
+          <a:lstStyle/>
+          <a:p>
+            <a:r>
+              <a:rPr sz="2800" b="1">
+                <a:solidFill>
+                  <a:srgbClr val="2C5F2D"/>
+                </a:solidFill>
+                <a:latin typeface="Cambria"/>
+              </a:rPr>
+              <a:t>Where We Are — the Four Connects</a:t>
+            </a:r>
+          </a:p>
+        </p:txBody>
+      </p:sp>
+      <p:pic>
+        <p:nvPicPr>
+          <p:cNvPr id="4" name="Picture 3" descr="four-connects.png"/>
+          <p:cNvPicPr>
+            <a:picLocks noChangeAspect="1"/>
+          </p:cNvPicPr>
+          <p:nvPr/>
+        </p:nvPicPr>
+        <p:blipFill>
+          <a:blip r:embed="rId2"/>
+          <a:stretch>
+            <a:fillRect/>
+          </a:stretch>
+        </p:blipFill>
+        <p:spPr>
+          <a:xfrm>
+            <a:off x="932688" y="1645920"/>
+            <a:ext cx="10332720" cy="3708663"/>
+          </a:xfrm>
+          <a:prstGeom prst="rect">
+            <a:avLst/>
+          </a:prstGeom>
+        </p:spPr>
+      </p:pic>
+      <p:sp>
+        <p:nvSpPr>
+          <p:cNvPr id="5" name="TextBox 4"/>
+          <p:cNvSpPr txBox="1"/>
+          <p:nvPr/>
+        </p:nvSpPr>
+        <p:spPr>
+          <a:xfrm>
+            <a:off x="822960" y="5623560"/>
+            <a:ext cx="10515600" cy="914400"/>
+          </a:xfrm>
+          <a:prstGeom prst="rect">
+            <a:avLst/>
+          </a:prstGeom>
+          <a:noFill/>
+        </p:spPr>
+        <p:txBody>
+          <a:bodyPr wrap="square">
+            <a:spAutoFit/>
+          </a:bodyPr>
+          <a:lstStyle/>
+          <a:p>
+            <a:r>
+              <a:rPr sz="1800" b="0">
+                <a:solidFill>
+                  <a:srgbClr val="222B22"/>
+                </a:solidFill>
+                <a:latin typeface="Calibri"/>
+              </a:rPr>
+              <a:t>Session 16 stands in the second box — </a:t>
+            </a:r>
+            <a:r>
+              <a:rPr sz="1800" b="1">
+                <a:solidFill>
+                  <a:srgbClr val="2C5F2D"/>
+                </a:solidFill>
+                <a:latin typeface="Calibri"/>
+              </a:rPr>
+              <a:t>Connect with Others</a:t>
+            </a:r>
+            <a:r>
+              <a:rPr sz="1800" b="0">
+                <a:solidFill>
+                  <a:srgbClr val="222B22"/>
+                </a:solidFill>
+                <a:latin typeface="Calibri"/>
+              </a:rPr>
+              <a:t>, as family. Each connection makes the next one real (Matt. 22:37–40).</a:t>
+            </a:r>
+          </a:p>
+        </p:txBody>
+      </p:sp>
+      <p:sp>
+        <p:nvSpPr>
+          <p:cNvPr id="90" name="SlideNum"/>
+          <p:cNvSpPr txBox="1"/>
+          <p:nvPr/>
+        </p:nvSpPr>
+        <p:spPr>
+          <a:xfrm>
+            <a:off x="11384280" y="6446520"/>
+            <a:ext cx="640080" cy="292608"/>
+          </a:xfrm>
+          <a:prstGeom prst="rect">
+            <a:avLst/>
+          </a:prstGeom>
+          <a:noFill/>
+        </p:spPr>
+        <p:txBody>
+          <a:bodyPr wrap="none" lIns="0" tIns="0" rIns="45720" bIns="0" anchor="ctr"/>
+          <a:lstStyle/>
+          <a:p>
+            <a:pPr algn="r"/>
+            <a:r>
+              <a:t>198a</a:t>
+            </a:r>
+            <a:endParaRPr sz="1000" b="1">
+              <a:solidFill>
+                <a:srgbClr val="7A8A6E"/>
+              </a:solidFill>
+              <a:latin typeface="Calibri"/>
+            </a:endParaRPr>
+          </a:p>
+        </p:txBody>
+      </p:sp>
+    </p:spTree>
+  </p:cSld>
+  <p:clrMapOvr>
+    <a:masterClrMapping/>
+  </p:clrMapOvr>
+</p:sld>
+</file>
+
+<file path=ppt/slides/slide14.xml><?xml version="1.0" encoding="utf-8"?>
+<p:sld xmlns:a="http://schemas.openxmlformats.org/drawingml/2006/main" xmlns:p="http://schemas.openxmlformats.org/presentationml/2006/main" xmlns:r="http://schemas.openxmlformats.org/officeDocument/2006/relationships">
+  <p:cSld>
+    <p:spTree>
+      <p:nvGrpSpPr>
+        <p:cNvPr id="1" name=""/>
+        <p:cNvGrpSpPr/>
+        <p:nvPr/>
+      </p:nvGrpSpPr>
+      <p:grpSpPr/>
+      <p:sp>
+        <p:nvSpPr>
+          <p:cNvPr id="2" name="Rectangle 1"/>
+          <p:cNvSpPr/>
+          <p:nvPr/>
+        </p:nvSpPr>
+        <p:spPr>
+          <a:xfrm>
+            <a:off x="0" y="0"/>
+            <a:ext cx="12192000" cy="6858000"/>
+          </a:xfrm>
+          <a:prstGeom prst="rect">
+            <a:avLst/>
+          </a:prstGeom>
+          <a:solidFill>
+            <a:srgbClr val="FFFFFF"/>
+          </a:solidFill>
+          <a:ln>
+            <a:noFill/>
+          </a:ln>
+          <a:effectLst/>
+        </p:spPr>
+        <p:style>
+          <a:lnRef idx="1">
+            <a:schemeClr val="accent1"/>
+          </a:lnRef>
+          <a:fillRef idx="3">
+            <a:schemeClr val="accent1"/>
+          </a:fillRef>
+          <a:effectRef idx="2">
+            <a:schemeClr val="accent1"/>
+          </a:effectRef>
+          <a:fontRef idx="minor">
+            <a:schemeClr val="lt1"/>
+          </a:fontRef>
+        </p:style>
+        <p:txBody>
+          <a:bodyPr rtlCol="0" anchor="ctr"/>
+          <a:lstStyle/>
+          <a:p>
+            <a:pPr algn="ctr"/>
+          </a:p>
+        </p:txBody>
+      </p:sp>
+      <p:sp>
+        <p:nvSpPr>
+          <p:cNvPr id="3" name="TextBox 2"/>
+          <p:cNvSpPr txBox="1"/>
+          <p:nvPr/>
+        </p:nvSpPr>
+        <p:spPr>
+          <a:xfrm>
+            <a:off x="822960" y="502920"/>
+            <a:ext cx="10515600" cy="822960"/>
+          </a:xfrm>
+          <a:prstGeom prst="rect">
+            <a:avLst/>
+          </a:prstGeom>
+          <a:noFill/>
+        </p:spPr>
+        <p:txBody>
+          <a:bodyPr wrap="square">
+            <a:spAutoFit/>
+          </a:bodyPr>
+          <a:lstStyle/>
+          <a:p>
+            <a:r>
+              <a:rPr sz="2800" b="1">
+                <a:solidFill>
+                  <a:srgbClr val="2C5F2D"/>
+                </a:solidFill>
+                <a:latin typeface="Cambria"/>
+              </a:rPr>
+              <a:t>The Take-Home Sheet — the Daily Rhythm</a:t>
+            </a:r>
+          </a:p>
+        </p:txBody>
+      </p:sp>
+      <p:pic>
+        <p:nvPicPr>
+          <p:cNvPr id="4" name="Picture 3" descr="s16_part1.png"/>
+          <p:cNvPicPr>
+            <a:picLocks noChangeAspect="1"/>
+          </p:cNvPicPr>
+          <p:nvPr/>
+        </p:nvPicPr>
+        <p:blipFill>
+          <a:blip r:embed="rId2"/>
+          <a:stretch>
+            <a:fillRect/>
+          </a:stretch>
+        </p:blipFill>
+        <p:spPr>
+          <a:xfrm>
+            <a:off x="1798167" y="1463040"/>
+            <a:ext cx="8595360" cy="4457308"/>
+          </a:xfrm>
+          <a:prstGeom prst="rect">
+            <a:avLst/>
+          </a:prstGeom>
+          <a:ln w="12700">
+            <a:solidFill>
+              <a:srgbClr val="C8C8C8"/>
+            </a:solidFill>
+          </a:ln>
+        </p:spPr>
+      </p:pic>
+      <p:sp>
+        <p:nvSpPr>
+          <p:cNvPr id="5" name="TextBox 4"/>
+          <p:cNvSpPr txBox="1"/>
+          <p:nvPr/>
+        </p:nvSpPr>
+        <p:spPr>
+          <a:xfrm>
+            <a:off x="822960" y="6355080"/>
+            <a:ext cx="10515600" cy="411480"/>
+          </a:xfrm>
+          <a:prstGeom prst="rect">
+            <a:avLst/>
+          </a:prstGeom>
+          <a:noFill/>
+        </p:spPr>
+        <p:txBody>
+          <a:bodyPr wrap="square">
+            <a:spAutoFit/>
+          </a:bodyPr>
+          <a:lstStyle/>
+          <a:p>
+            <a:r>
+              <a:rPr sz="1400" i="1">
+                <a:solidFill>
+                  <a:srgbClr val="595959"/>
+                </a:solidFill>
+                <a:latin typeface="Calibri"/>
+              </a:rPr>
+              <a:t>Handed out now — this is the sheet in your hands.</a:t>
+            </a:r>
+          </a:p>
+        </p:txBody>
+      </p:sp>
+      <p:sp>
+        <p:nvSpPr>
+          <p:cNvPr id="90" name="SlideNum"/>
+          <p:cNvSpPr txBox="1"/>
+          <p:nvPr/>
+        </p:nvSpPr>
+        <p:spPr>
+          <a:xfrm>
+            <a:off x="11384280" y="6446520"/>
+            <a:ext cx="640080" cy="292608"/>
+          </a:xfrm>
+          <a:prstGeom prst="rect">
+            <a:avLst/>
+          </a:prstGeom>
+          <a:noFill/>
+        </p:spPr>
+        <p:txBody>
+          <a:bodyPr wrap="none" lIns="0" tIns="0" rIns="45720" bIns="0" anchor="ctr"/>
+          <a:lstStyle/>
+          <a:p>
+            <a:pPr algn="r"/>
+            <a:r>
+              <a:t>206</a:t>
+            </a:r>
+            <a:endParaRPr sz="1000" b="1">
+              <a:solidFill>
+                <a:srgbClr val="7A8A6E"/>
+              </a:solidFill>
+              <a:latin typeface="Calibri"/>
+            </a:endParaRPr>
+          </a:p>
+        </p:txBody>
+      </p:sp>
+    </p:spTree>
+  </p:cSld>
+  <p:clrMapOvr>
+    <a:masterClrMapping/>
+  </p:clrMapOvr>
+</p:sld>
+</file>
+
+<file path=ppt/slides/slide15.xml><?xml version="1.0" encoding="utf-8"?>
+<p:sld xmlns:a="http://schemas.openxmlformats.org/drawingml/2006/main" xmlns:p="http://schemas.openxmlformats.org/presentationml/2006/main" xmlns:r="http://schemas.openxmlformats.org/officeDocument/2006/relationships">
+  <p:cSld>
+    <p:spTree>
+      <p:nvGrpSpPr>
+        <p:cNvPr id="1" name=""/>
+        <p:cNvGrpSpPr/>
+        <p:nvPr/>
+      </p:nvGrpSpPr>
+      <p:grpSpPr/>
+      <p:sp>
+        <p:nvSpPr>
+          <p:cNvPr id="2" name="Rectangle 1"/>
+          <p:cNvSpPr/>
+          <p:nvPr/>
+        </p:nvSpPr>
+        <p:spPr>
+          <a:xfrm>
+            <a:off x="0" y="0"/>
+            <a:ext cx="12192000" cy="6858000"/>
+          </a:xfrm>
+          <a:prstGeom prst="rect">
+            <a:avLst/>
+          </a:prstGeom>
+          <a:solidFill>
+            <a:srgbClr val="FFFFFF"/>
+          </a:solidFill>
+          <a:ln>
+            <a:noFill/>
+          </a:ln>
+          <a:effectLst/>
+        </p:spPr>
+        <p:style>
+          <a:lnRef idx="1">
+            <a:schemeClr val="accent1"/>
+          </a:lnRef>
+          <a:fillRef idx="3">
+            <a:schemeClr val="accent1"/>
+          </a:fillRef>
+          <a:effectRef idx="2">
+            <a:schemeClr val="accent1"/>
+          </a:effectRef>
+          <a:fontRef idx="minor">
+            <a:schemeClr val="lt1"/>
+          </a:fontRef>
+        </p:style>
+        <p:txBody>
+          <a:bodyPr rtlCol="0" anchor="ctr"/>
+          <a:lstStyle/>
+          <a:p>
+            <a:pPr algn="ctr"/>
+          </a:p>
+        </p:txBody>
+      </p:sp>
+      <p:sp>
+        <p:nvSpPr>
+          <p:cNvPr id="3" name="TextBox 2"/>
+          <p:cNvSpPr txBox="1"/>
+          <p:nvPr/>
+        </p:nvSpPr>
+        <p:spPr>
+          <a:xfrm>
+            <a:off x="822960" y="502920"/>
+            <a:ext cx="10515600" cy="822960"/>
+          </a:xfrm>
+          <a:prstGeom prst="rect">
+            <a:avLst/>
+          </a:prstGeom>
+          <a:noFill/>
+        </p:spPr>
+        <p:txBody>
+          <a:bodyPr wrap="square">
+            <a:spAutoFit/>
+          </a:bodyPr>
+          <a:lstStyle/>
+          <a:p>
+            <a:r>
+              <a:rPr sz="2800" b="1">
+                <a:solidFill>
+                  <a:srgbClr val="2C5F2D"/>
+                </a:solidFill>
+                <a:latin typeface="Cambria"/>
+              </a:rPr>
+              <a:t>The Take-Home Sheet — the Four Parts</a:t>
+            </a:r>
+          </a:p>
+        </p:txBody>
+      </p:sp>
+      <p:pic>
+        <p:nvPicPr>
+          <p:cNvPr id="4" name="Picture 3" descr="s16_part2.png"/>
+          <p:cNvPicPr>
+            <a:picLocks noChangeAspect="1"/>
+          </p:cNvPicPr>
+          <p:nvPr/>
+        </p:nvPicPr>
+        <p:blipFill>
+          <a:blip r:embed="rId2"/>
+          <a:stretch>
+            <a:fillRect/>
+          </a:stretch>
+        </p:blipFill>
+        <p:spPr>
+          <a:xfrm>
+            <a:off x="2262810" y="1463040"/>
+            <a:ext cx="7666074" cy="4709160"/>
+          </a:xfrm>
+          <a:prstGeom prst="rect">
+            <a:avLst/>
+          </a:prstGeom>
+          <a:ln w="12700">
+            <a:solidFill>
+              <a:srgbClr val="C8C8C8"/>
+            </a:solidFill>
+          </a:ln>
+        </p:spPr>
+      </p:pic>
+      <p:sp>
+        <p:nvSpPr>
+          <p:cNvPr id="5" name="TextBox 4"/>
+          <p:cNvSpPr txBox="1"/>
+          <p:nvPr/>
+        </p:nvSpPr>
+        <p:spPr>
+          <a:xfrm>
+            <a:off x="822960" y="6355080"/>
+            <a:ext cx="10515600" cy="411480"/>
+          </a:xfrm>
+          <a:prstGeom prst="rect">
+            <a:avLst/>
+          </a:prstGeom>
+          <a:noFill/>
+        </p:spPr>
+        <p:txBody>
+          <a:bodyPr wrap="square">
+            <a:spAutoFit/>
+          </a:bodyPr>
+          <a:lstStyle/>
+          <a:p>
+            <a:r>
+              <a:rPr sz="1400" i="1">
+                <a:solidFill>
+                  <a:srgbClr val="595959"/>
+                </a:solidFill>
+                <a:latin typeface="Calibri"/>
+              </a:rPr>
+              <a:t>One practice at a time — and a partner expecting you at the end of week one.</a:t>
+            </a:r>
+          </a:p>
+        </p:txBody>
+      </p:sp>
+      <p:sp>
+        <p:nvSpPr>
+          <p:cNvPr id="90" name="SlideNum"/>
+          <p:cNvSpPr txBox="1"/>
+          <p:nvPr/>
+        </p:nvSpPr>
+        <p:spPr>
+          <a:xfrm>
+            <a:off x="11384280" y="6446520"/>
+            <a:ext cx="640080" cy="292608"/>
+          </a:xfrm>
+          <a:prstGeom prst="rect">
+            <a:avLst/>
+          </a:prstGeom>
+          <a:noFill/>
+        </p:spPr>
+        <p:txBody>
+          <a:bodyPr wrap="none" lIns="0" tIns="0" rIns="45720" bIns="0" anchor="ctr"/>
+          <a:lstStyle/>
+          <a:p>
+            <a:pPr algn="r"/>
+            <a:r>
+              <a:t>206a</a:t>
+            </a:r>
+            <a:endParaRPr sz="1000" b="1">
+              <a:solidFill>
+                <a:srgbClr val="7A8A6E"/>
+              </a:solidFill>
+              <a:latin typeface="Calibri"/>
+            </a:endParaRPr>
+          </a:p>
+        </p:txBody>
+      </p:sp>
+    </p:spTree>
+  </p:cSld>
+  <p:clrMapOvr>
+    <a:masterClrMapping/>
+  </p:clrMapOvr>
+</p:sld>
+</file>
+
+<file path=ppt/slides/slide2.xml><?xml version="1.0" encoding="utf-8"?>
 <p:sld xmlns:a="http://schemas.openxmlformats.org/drawingml/2006/main" xmlns:r="http://schemas.openxmlformats.org/officeDocument/2006/relationships" xmlns:p="http://schemas.openxmlformats.org/presentationml/2006/main">
   <p:cSld>
     <p:spTree>
@@ -4828,7 +6318,7 @@
 </p:sld>
 </file>
 
-<file path=ppt/slides/slide199.xml><?xml version="1.0" encoding="utf-8"?>
+<file path=ppt/slides/slide3.xml><?xml version="1.0" encoding="utf-8"?>
 <p:sld xmlns:a="http://schemas.openxmlformats.org/drawingml/2006/main" xmlns:r="http://schemas.openxmlformats.org/officeDocument/2006/relationships" xmlns:p="http://schemas.openxmlformats.org/presentationml/2006/main">
   <p:cSld>
     <p:spTree>
@@ -5229,7 +6719,7 @@
 </p:sld>
 </file>
 
-<file path=ppt/slides/slide200.xml><?xml version="1.0" encoding="utf-8"?>
+<file path=ppt/slides/slide4.xml><?xml version="1.0" encoding="utf-8"?>
 <p:sld xmlns:a="http://schemas.openxmlformats.org/drawingml/2006/main" xmlns:r="http://schemas.openxmlformats.org/officeDocument/2006/relationships" xmlns:p="http://schemas.openxmlformats.org/presentationml/2006/main">
   <p:cSld>
     <p:spTree>
@@ -5576,7 +7066,7 @@
 </p:sld>
 </file>
 
-<file path=ppt/slides/slide201.xml><?xml version="1.0" encoding="utf-8"?>
+<file path=ppt/slides/slide5.xml><?xml version="1.0" encoding="utf-8"?>
 <p:sld xmlns:a="http://schemas.openxmlformats.org/drawingml/2006/main" xmlns:r="http://schemas.openxmlformats.org/officeDocument/2006/relationships" xmlns:p="http://schemas.openxmlformats.org/presentationml/2006/main">
   <p:cSld>
     <p:spTree>
@@ -5848,7 +7338,7 @@
 </p:sld>
 </file>
 
-<file path=ppt/slides/slide202.xml><?xml version="1.0" encoding="utf-8"?>
+<file path=ppt/slides/slide6.xml><?xml version="1.0" encoding="utf-8"?>
 <p:sld xmlns:a="http://schemas.openxmlformats.org/drawingml/2006/main" xmlns:r="http://schemas.openxmlformats.org/officeDocument/2006/relationships" xmlns:p="http://schemas.openxmlformats.org/presentationml/2006/main">
   <p:cSld>
     <p:spTree>
@@ -6175,7 +7665,7 @@
 </p:sld>
 </file>
 
-<file path=ppt/slides/slide203.xml><?xml version="1.0" encoding="utf-8"?>
+<file path=ppt/slides/slide7.xml><?xml version="1.0" encoding="utf-8"?>
 <p:sld xmlns:a="http://schemas.openxmlformats.org/drawingml/2006/main" xmlns:r="http://schemas.openxmlformats.org/officeDocument/2006/relationships" xmlns:p="http://schemas.openxmlformats.org/presentationml/2006/main">
   <p:cSld>
     <p:spTree>
@@ -6422,7 +7912,7 @@
 </p:sld>
 </file>
 
-<file path=ppt/slides/slide204.xml><?xml version="1.0" encoding="utf-8"?>
+<file path=ppt/slides/slide8.xml><?xml version="1.0" encoding="utf-8"?>
 <p:sld xmlns:a="http://schemas.openxmlformats.org/drawingml/2006/main" xmlns:r="http://schemas.openxmlformats.org/officeDocument/2006/relationships" xmlns:p="http://schemas.openxmlformats.org/presentationml/2006/main">
   <p:cSld>
     <p:spTree>
@@ -6719,7 +8209,7 @@
 </p:sld>
 </file>
 
-<file path=ppt/slides/slide205.xml><?xml version="1.0" encoding="utf-8"?>
+<file path=ppt/slides/slide9.xml><?xml version="1.0" encoding="utf-8"?>
 <p:sld xmlns:a="http://schemas.openxmlformats.org/drawingml/2006/main" xmlns:r="http://schemas.openxmlformats.org/officeDocument/2006/relationships" xmlns:p="http://schemas.openxmlformats.org/presentationml/2006/main">
   <p:cSld>
     <p:spTree>
@@ -6998,943 +8488,6 @@
             <a:pPr algn="r"/>
             <a:r>
               <a:t>205</a:t>
-            </a:r>
-            <a:endParaRPr sz="1000" b="1">
-              <a:solidFill>
-                <a:srgbClr val="7A8A6E"/>
-              </a:solidFill>
-              <a:latin typeface="Calibri"/>
-            </a:endParaRPr>
-          </a:p>
-        </p:txBody>
-      </p:sp>
-    </p:spTree>
-  </p:cSld>
-  <p:clrMapOvr>
-    <a:masterClrMapping/>
-  </p:clrMapOvr>
-</p:sld>
-</file>
-
-<file path=ppt/slides/slide206.xml><?xml version="1.0" encoding="utf-8"?>
-<p:sld xmlns:a="http://schemas.openxmlformats.org/drawingml/2006/main" xmlns:r="http://schemas.openxmlformats.org/officeDocument/2006/relationships" xmlns:p="http://schemas.openxmlformats.org/presentationml/2006/main">
-  <p:cSld>
-    <p:spTree>
-      <p:nvGrpSpPr>
-        <p:cNvPr id="1" name=""/>
-        <p:cNvGrpSpPr/>
-        <p:nvPr/>
-      </p:nvGrpSpPr>
-      <p:grpSpPr>
-        <a:xfrm>
-          <a:off x="0" y="0"/>
-          <a:ext cx="0" cy="0"/>
-          <a:chOff x="0" y="0"/>
-          <a:chExt cx="0" cy="0"/>
-        </a:xfrm>
-      </p:grpSpPr>
-      <p:sp>
-        <p:nvSpPr>
-          <p:cNvPr id="2" name="Rectangle 1"/>
-          <p:cNvSpPr/>
-          <p:nvPr/>
-        </p:nvSpPr>
-        <p:spPr>
-          <a:xfrm>
-            <a:off x="0" y="0"/>
-            <a:ext cx="12191695" cy="6858000"/>
-          </a:xfrm>
-          <a:prstGeom prst="rect">
-            <a:avLst/>
-          </a:prstGeom>
-          <a:solidFill>
-            <a:srgbClr val="FFFFFF"/>
-          </a:solidFill>
-          <a:ln>
-            <a:noFill/>
-          </a:ln>
-        </p:spPr>
-        <p:txBody>
-          <a:bodyPr/>
-          <a:lstStyle/>
-          <a:p>
-            <a:endParaRPr/>
-          </a:p>
-        </p:txBody>
-      </p:sp>
-      <p:sp>
-        <p:nvSpPr>
-          <p:cNvPr id="3" name="TextBox 2"/>
-          <p:cNvSpPr txBox="1"/>
-          <p:nvPr/>
-        </p:nvSpPr>
-        <p:spPr>
-          <a:xfrm>
-            <a:off x="822960" y="502920"/>
-            <a:ext cx="10515600" cy="822960"/>
-          </a:xfrm>
-          <a:prstGeom prst="rect">
-            <a:avLst/>
-          </a:prstGeom>
-          <a:noFill/>
-        </p:spPr>
-        <p:txBody>
-          <a:bodyPr wrap="square">
-            <a:spAutoFit/>
-          </a:bodyPr>
-          <a:lstStyle/>
-          <a:p>
-            <a:pPr algn="l">
-              <a:spcAft>
-                <a:spcPts val="600"/>
-              </a:spcAft>
-            </a:pPr>
-            <a:r>
-              <a:rPr sz="2800" b="1" i="0">
-                <a:solidFill>
-                  <a:srgbClr val="2C5F2D"/>
-                </a:solidFill>
-                <a:latin typeface="Cambria"/>
-              </a:rPr>
-              <a:t>Your Take-Home Card — This Session’s Practice</a:t>
-            </a:r>
-          </a:p>
-        </p:txBody>
-      </p:sp>
-      <p:sp>
-        <p:nvSpPr>
-          <p:cNvPr id="90" name="SlideNum"/>
-          <p:cNvSpPr txBox="1"/>
-          <p:nvPr/>
-        </p:nvSpPr>
-        <p:spPr>
-          <a:xfrm>
-            <a:off x="11384280" y="6446520"/>
-            <a:ext cx="640080" cy="292608"/>
-          </a:xfrm>
-          <a:prstGeom prst="rect">
-            <a:avLst/>
-          </a:prstGeom>
-          <a:noFill/>
-        </p:spPr>
-        <p:txBody>
-          <a:bodyPr wrap="none" lIns="0" tIns="0" rIns="45720" bIns="0" anchor="ctr"/>
-          <a:lstStyle/>
-          <a:p>
-            <a:pPr algn="r"/>
-            <a:r>
-              <a:t>206</a:t>
-            </a:r>
-            <a:endParaRPr sz="1000" b="1">
-              <a:solidFill>
-                <a:srgbClr val="7A8A6E"/>
-              </a:solidFill>
-              <a:latin typeface="Calibri"/>
-            </a:endParaRPr>
-          </a:p>
-        </p:txBody>
-      </p:sp>
-      <p:pic>
-        <p:nvPicPr>
-          <p:cNvPr id="270" name="CardImage" descr="the Week 16 check-off card, as handed out"/>
-          <p:cNvPicPr>
-            <a:picLocks noChangeAspect="1"/>
-          </p:cNvPicPr>
-          <p:nvPr/>
-        </p:nvPicPr>
-        <p:blipFill>
-          <a:blip r:embed="rId3"/>
-          <a:stretch>
-            <a:fillRect/>
-          </a:stretch>
-        </p:blipFill>
-        <p:spPr>
-          <a:xfrm>
-            <a:off x="1158087" y="1554480"/>
-            <a:ext cx="9875520" cy="4190598"/>
-          </a:xfrm>
-          <a:prstGeom prst="rect">
-            <a:avLst/>
-          </a:prstGeom>
-          <a:ln w="76200">
-            <a:solidFill>
-              <a:srgbClr val="FFFFFF"/>
-            </a:solidFill>
-          </a:ln>
-          <a:effectLst>
-            <a:outerShdw blurRad="63500" dist="25400" dir="5400000" rotWithShape="0">
-              <a:srgbClr val="000000">
-                <a:alpha val="35000"/>
-              </a:srgbClr>
-            </a:outerShdw>
-          </a:effectLst>
-        </p:spPr>
-      </p:pic>
-      <p:sp>
-        <p:nvSpPr>
-          <p:cNvPr id="271" name="Caption"/>
-          <p:cNvSpPr txBox="1"/>
-          <p:nvPr/>
-        </p:nvSpPr>
-        <p:spPr>
-          <a:xfrm>
-            <a:off x="822960" y="5927958"/>
-            <a:ext cx="10515600" cy="457200"/>
-          </a:xfrm>
-          <a:prstGeom prst="rect">
-            <a:avLst/>
-          </a:prstGeom>
-          <a:noFill/>
-        </p:spPr>
-        <p:txBody>
-          <a:bodyPr wrap="square"/>
-          <a:lstStyle/>
-          <a:p>
-            <a:pPr algn="ctr"/>
-            <a:r>
-              <a:rPr sz="1800" b="0" i="1">
-                <a:solidFill>
-                  <a:srgbClr val="222B22"/>
-                </a:solidFill>
-                <a:latin typeface="Calibri"/>
-              </a:rPr>
-              <a:t>Handed out now — fridge, mirror, journal pocket.</a:t>
-            </a:r>
-          </a:p>
-        </p:txBody>
-      </p:sp>
-    </p:spTree>
-  </p:cSld>
-  <p:clrMapOvr>
-    <a:masterClrMapping/>
-  </p:clrMapOvr>
-</p:sld>
-</file>
-
-<file path=ppt/slides/slide207.xml><?xml version="1.0" encoding="utf-8"?>
-<p:sld xmlns:a="http://schemas.openxmlformats.org/drawingml/2006/main" xmlns:r="http://schemas.openxmlformats.org/officeDocument/2006/relationships" xmlns:p="http://schemas.openxmlformats.org/presentationml/2006/main">
-  <p:cSld>
-    <p:spTree>
-      <p:nvGrpSpPr>
-        <p:cNvPr id="1" name=""/>
-        <p:cNvGrpSpPr/>
-        <p:nvPr/>
-      </p:nvGrpSpPr>
-      <p:grpSpPr>
-        <a:xfrm>
-          <a:off x="0" y="0"/>
-          <a:ext cx="0" cy="0"/>
-          <a:chOff x="0" y="0"/>
-          <a:chExt cx="0" cy="0"/>
-        </a:xfrm>
-      </p:grpSpPr>
-      <p:sp>
-        <p:nvSpPr>
-          <p:cNvPr id="2" name="Rectangle 1"/>
-          <p:cNvSpPr/>
-          <p:nvPr/>
-        </p:nvSpPr>
-        <p:spPr>
-          <a:xfrm>
-            <a:off x="0" y="0"/>
-            <a:ext cx="12191695" cy="6858000"/>
-          </a:xfrm>
-          <a:prstGeom prst="rect">
-            <a:avLst/>
-          </a:prstGeom>
-          <a:solidFill>
-            <a:srgbClr val="FFFFFF"/>
-          </a:solidFill>
-          <a:ln>
-            <a:noFill/>
-          </a:ln>
-        </p:spPr>
-        <p:txBody>
-          <a:bodyPr/>
-          <a:lstStyle/>
-          <a:p>
-            <a:endParaRPr/>
-          </a:p>
-        </p:txBody>
-      </p:sp>
-      <p:sp>
-        <p:nvSpPr>
-          <p:cNvPr id="3" name="TextBox 2"/>
-          <p:cNvSpPr txBox="1"/>
-          <p:nvPr/>
-        </p:nvSpPr>
-        <p:spPr>
-          <a:xfrm>
-            <a:off x="822960" y="502920"/>
-            <a:ext cx="10515600" cy="822960"/>
-          </a:xfrm>
-          <a:prstGeom prst="rect">
-            <a:avLst/>
-          </a:prstGeom>
-          <a:noFill/>
-        </p:spPr>
-        <p:txBody>
-          <a:bodyPr wrap="square">
-            <a:spAutoFit/>
-          </a:bodyPr>
-          <a:lstStyle/>
-          <a:p>
-            <a:pPr algn="l">
-              <a:spcAft>
-                <a:spcPts val="600"/>
-              </a:spcAft>
-            </a:pPr>
-            <a:r>
-              <a:rPr sz="2800" b="1" i="0">
-                <a:solidFill>
-                  <a:srgbClr val="2C5F2D"/>
-                </a:solidFill>
-                <a:latin typeface="Cambria"/>
-              </a:rPr>
-              <a:t>The Leader Feedback Round</a:t>
-            </a:r>
-          </a:p>
-        </p:txBody>
-      </p:sp>
-      <p:sp>
-        <p:nvSpPr>
-          <p:cNvPr id="4" name="TextBox 4"/>
-          <p:cNvSpPr txBox="1"/>
-          <p:nvPr/>
-        </p:nvSpPr>
-        <p:spPr>
-          <a:xfrm>
-            <a:off x="822960" y="1554480"/>
-            <a:ext cx="6675120" cy="4892040"/>
-          </a:xfrm>
-          <a:prstGeom prst="rect">
-            <a:avLst/>
-          </a:prstGeom>
-          <a:noFill/>
-        </p:spPr>
-        <p:txBody>
-          <a:bodyPr wrap="square" lIns="91440" tIns="91440" rIns="91440" bIns="91440"/>
-          <a:lstStyle/>
-          <a:p>
-            <a:pPr marL="274320" indent="-274320">
-              <a:spcAft>
-                <a:spcPts val="900"/>
-              </a:spcAft>
-            </a:pPr>
-            <a:r>
-              <a:rPr sz="2800" b="1" i="0">
-                <a:solidFill>
-                  <a:srgbClr val="97BC62"/>
-                </a:solidFill>
-                <a:latin typeface="Calibri"/>
-              </a:rPr>
-              <a:t>•  </a:t>
-            </a:r>
-            <a:r>
-              <a:rPr sz="2800" b="0" i="0">
-                <a:solidFill>
-                  <a:srgbClr val="222B22"/>
-                </a:solidFill>
-                <a:latin typeface="Calibri"/>
-              </a:rPr>
-              <a:t>Two rounds, same as every session — the container holder first, then the content presenter: three things each</a:t>
-            </a:r>
-          </a:p>
-          <a:p>
-            <a:pPr marL="685800" indent="-274320">
-              <a:spcAft>
-                <a:spcPts val="700"/>
-              </a:spcAft>
-            </a:pPr>
-            <a:r>
-              <a:rPr sz="2000" b="1" i="0">
-                <a:solidFill>
-                  <a:srgbClr val="97BC62"/>
-                </a:solidFill>
-                <a:latin typeface="Calibri"/>
-              </a:rPr>
-              <a:t>–  </a:t>
-            </a:r>
-            <a:r>
-              <a:rPr sz="2000" b="0" i="1">
-                <a:solidFill>
-                  <a:srgbClr val="222B22"/>
-                </a:solidFill>
-                <a:latin typeface="Calibri"/>
-              </a:rPr>
-              <a:t>“What I think went well tonight: ______”</a:t>
-            </a:r>
-          </a:p>
-          <a:p>
-            <a:pPr marL="685800" indent="-274320">
-              <a:spcAft>
-                <a:spcPts val="700"/>
-              </a:spcAft>
-            </a:pPr>
-            <a:r>
-              <a:rPr sz="2000" b="1" i="0">
-                <a:solidFill>
-                  <a:srgbClr val="97BC62"/>
-                </a:solidFill>
-                <a:latin typeface="Calibri"/>
-              </a:rPr>
-              <a:t>–  </a:t>
-            </a:r>
-            <a:r>
-              <a:rPr sz="2000" b="0" i="1">
-                <a:solidFill>
-                  <a:srgbClr val="222B22"/>
-                </a:solidFill>
-                <a:latin typeface="Calibri"/>
-              </a:rPr>
-              <a:t>“What I’d do differently next time: ______”</a:t>
-            </a:r>
-          </a:p>
-          <a:p>
-            <a:pPr marL="685800" indent="-274320">
-              <a:spcAft>
-                <a:spcPts val="700"/>
-              </a:spcAft>
-            </a:pPr>
-            <a:r>
-              <a:rPr sz="2000" b="1" i="0">
-                <a:solidFill>
-                  <a:srgbClr val="97BC62"/>
-                </a:solidFill>
-                <a:latin typeface="Calibri"/>
-              </a:rPr>
-              <a:t>–  </a:t>
-            </a:r>
-            <a:r>
-              <a:rPr sz="2000" b="0" i="1">
-                <a:solidFill>
-                  <a:srgbClr val="222B22"/>
-                </a:solidFill>
-                <a:latin typeface="Calibri"/>
-              </a:rPr>
-              <a:t>“If I were to teach tonight’s process to someone, I would tell them: ______”</a:t>
-            </a:r>
-          </a:p>
-          <a:p>
-            <a:pPr marL="274320" indent="-274320">
-              <a:spcAft>
-                <a:spcPts val="900"/>
-              </a:spcAft>
-            </a:pPr>
-            <a:r>
-              <a:rPr sz="2800" b="1" i="0">
-                <a:solidFill>
-                  <a:srgbClr val="97BC62"/>
-                </a:solidFill>
-                <a:latin typeface="Calibri"/>
-              </a:rPr>
-              <a:t>•  </a:t>
-            </a:r>
-            <a:r>
-              <a:rPr sz="2800" b="0" i="0">
-                <a:solidFill>
-                  <a:srgbClr val="222B22"/>
-                </a:solidFill>
-                <a:latin typeface="Calibri"/>
-              </a:rPr>
-              <a:t>Then the room — the same two questions about tonight</a:t>
-            </a:r>
-          </a:p>
-          <a:p>
-            <a:pPr marL="274320" indent="-274320">
-              <a:spcAft>
-                <a:spcPts val="900"/>
-              </a:spcAft>
-            </a:pPr>
-            <a:r>
-              <a:rPr sz="2800" b="1" i="0">
-                <a:solidFill>
-                  <a:srgbClr val="97BC62"/>
-                </a:solidFill>
-                <a:latin typeface="Calibri"/>
-              </a:rPr>
-              <a:t>•  </a:t>
-            </a:r>
-            <a:r>
-              <a:rPr sz="2800" b="0" i="0">
-                <a:solidFill>
-                  <a:srgbClr val="222B22"/>
-                </a:solidFill>
-                <a:latin typeface="Calibri"/>
-              </a:rPr>
-              <a:t>The leaders receive without defending — “thank you” is the whole response</a:t>
-            </a:r>
-          </a:p>
-        </p:txBody>
-      </p:sp>
-      <p:sp>
-        <p:nvSpPr>
-          <p:cNvPr id="90" name="SlideNum"/>
-          <p:cNvSpPr txBox="1"/>
-          <p:nvPr/>
-        </p:nvSpPr>
-        <p:spPr>
-          <a:xfrm>
-            <a:off x="11384280" y="6446520"/>
-            <a:ext cx="640080" cy="292608"/>
-          </a:xfrm>
-          <a:prstGeom prst="rect">
-            <a:avLst/>
-          </a:prstGeom>
-          <a:noFill/>
-        </p:spPr>
-        <p:txBody>
-          <a:bodyPr wrap="none" lIns="0" tIns="0" rIns="45720" bIns="0" anchor="ctr"/>
-          <a:lstStyle/>
-          <a:p>
-            <a:pPr algn="r"/>
-            <a:r>
-              <a:t>207</a:t>
-            </a:r>
-            <a:endParaRPr sz="1000" b="1">
-              <a:solidFill>
-                <a:srgbClr val="7A8A6E"/>
-              </a:solidFill>
-              <a:latin typeface="Calibri"/>
-            </a:endParaRPr>
-          </a:p>
-        </p:txBody>
-      </p:sp>
-      <p:pic>
-        <p:nvPicPr>
-          <p:cNvPr id="33" name="Picture 33" descr="compass on the trail - the weekly bearing check"/>
-          <p:cNvPicPr>
-            <a:picLocks noChangeAspect="1"/>
-          </p:cNvPicPr>
-          <p:nvPr/>
-        </p:nvPicPr>
-        <p:blipFill>
-          <a:blip r:embed="rId3"/>
-          <a:stretch>
-            <a:fillRect/>
-          </a:stretch>
-        </p:blipFill>
-        <p:spPr>
-          <a:xfrm>
-            <a:off x="8106160" y="1463040"/>
-            <a:ext cx="3259831" cy="4892040"/>
-          </a:xfrm>
-          <a:prstGeom prst="rect">
-            <a:avLst/>
-          </a:prstGeom>
-          <a:ln w="76200">
-            <a:solidFill>
-              <a:srgbClr val="FFFFFF"/>
-            </a:solidFill>
-          </a:ln>
-          <a:effectLst>
-            <a:outerShdw blurRad="63500" dist="25400" dir="5400000" rotWithShape="0">
-              <a:srgbClr val="000000">
-                <a:alpha val="35000"/>
-              </a:srgbClr>
-            </a:outerShdw>
-          </a:effectLst>
-        </p:spPr>
-      </p:pic>
-    </p:spTree>
-  </p:cSld>
-  <p:clrMapOvr>
-    <a:masterClrMapping/>
-  </p:clrMapOvr>
-</p:sld>
-</file>
-
-<file path=ppt/slides/slide208.xml><?xml version="1.0" encoding="utf-8"?>
-<p:sld xmlns:a="http://schemas.openxmlformats.org/drawingml/2006/main" xmlns:r="http://schemas.openxmlformats.org/officeDocument/2006/relationships" xmlns:p="http://schemas.openxmlformats.org/presentationml/2006/main">
-  <p:cSld>
-    <p:spTree>
-      <p:nvGrpSpPr>
-        <p:cNvPr id="1" name=""/>
-        <p:cNvGrpSpPr/>
-        <p:nvPr/>
-      </p:nvGrpSpPr>
-      <p:grpSpPr>
-        <a:xfrm>
-          <a:off x="0" y="0"/>
-          <a:ext cx="0" cy="0"/>
-          <a:chOff x="0" y="0"/>
-          <a:chExt cx="0" cy="0"/>
-        </a:xfrm>
-      </p:grpSpPr>
-      <p:sp>
-        <p:nvSpPr>
-          <p:cNvPr id="2" name="Rectangle 1"/>
-          <p:cNvSpPr/>
-          <p:nvPr/>
-        </p:nvSpPr>
-        <p:spPr>
-          <a:xfrm>
-            <a:off x="0" y="0"/>
-            <a:ext cx="12191695" cy="6858000"/>
-          </a:xfrm>
-          <a:prstGeom prst="rect">
-            <a:avLst/>
-          </a:prstGeom>
-          <a:solidFill>
-            <a:srgbClr val="FFFFFF"/>
-          </a:solidFill>
-          <a:ln>
-            <a:noFill/>
-          </a:ln>
-        </p:spPr>
-        <p:txBody>
-          <a:bodyPr/>
-          <a:lstStyle/>
-          <a:p>
-            <a:endParaRPr/>
-          </a:p>
-        </p:txBody>
-      </p:sp>
-      <p:sp>
-        <p:nvSpPr>
-          <p:cNvPr id="3" name="TextBox 2"/>
-          <p:cNvSpPr txBox="1"/>
-          <p:nvPr/>
-        </p:nvSpPr>
-        <p:spPr>
-          <a:xfrm>
-            <a:off x="822960" y="502920"/>
-            <a:ext cx="10515600" cy="822960"/>
-          </a:xfrm>
-          <a:prstGeom prst="rect">
-            <a:avLst/>
-          </a:prstGeom>
-          <a:noFill/>
-        </p:spPr>
-        <p:txBody>
-          <a:bodyPr wrap="square">
-            <a:spAutoFit/>
-          </a:bodyPr>
-          <a:lstStyle/>
-          <a:p>
-            <a:pPr algn="l">
-              <a:spcAft>
-                <a:spcPts val="600"/>
-              </a:spcAft>
-            </a:pPr>
-            <a:r>
-              <a:rPr sz="2800" b="1" i="0">
-                <a:solidFill>
-                  <a:srgbClr val="2C5F2D"/>
-                </a:solidFill>
-                <a:latin typeface="Cambria"/>
-              </a:rPr>
-              <a:t>Closing the Container + Aaronic Blessing</a:t>
-            </a:r>
-          </a:p>
-        </p:txBody>
-      </p:sp>
-      <p:sp>
-        <p:nvSpPr>
-          <p:cNvPr id="4" name="TextBox 4"/>
-          <p:cNvSpPr txBox="1"/>
-          <p:nvPr/>
-        </p:nvSpPr>
-        <p:spPr>
-          <a:xfrm>
-            <a:off x="822960" y="1600200"/>
-            <a:ext cx="5669280" cy="4572000"/>
-          </a:xfrm>
-          <a:prstGeom prst="rect">
-            <a:avLst/>
-          </a:prstGeom>
-          <a:noFill/>
-        </p:spPr>
-        <p:txBody>
-          <a:bodyPr wrap="square" lIns="91440" tIns="91440" rIns="91440" bIns="91440"/>
-          <a:lstStyle/>
-          <a:p>
-            <a:pPr marL="274320" indent="-274320">
-              <a:spcAft>
-                <a:spcPts val="900"/>
-              </a:spcAft>
-            </a:pPr>
-            <a:r>
-              <a:rPr sz="2200" b="1" i="0">
-                <a:solidFill>
-                  <a:srgbClr val="97BC62"/>
-                </a:solidFill>
-                <a:latin typeface="Calibri"/>
-              </a:rPr>
-              <a:t>•  </a:t>
-            </a:r>
-            <a:r>
-              <a:rPr sz="2200" b="0" i="0">
-                <a:solidFill>
-                  <a:srgbClr val="222B22"/>
-                </a:solidFill>
-                <a:latin typeface="Calibri"/>
-              </a:rPr>
-              <a:t>We close the way we opened — the container, six steps:</a:t>
-            </a:r>
-          </a:p>
-          <a:p>
-            <a:pPr marL="685800" indent="-274320">
-              <a:spcAft>
-                <a:spcPts val="700"/>
-              </a:spcAft>
-            </a:pPr>
-            <a:r>
-              <a:rPr sz="2000" b="1" i="0">
-                <a:solidFill>
-                  <a:srgbClr val="97BC62"/>
-                </a:solidFill>
-                <a:latin typeface="Calibri"/>
-              </a:rPr>
-              <a:t>1   </a:t>
-            </a:r>
-            <a:r>
-              <a:rPr sz="2000" b="0" i="0">
-                <a:solidFill>
-                  <a:srgbClr val="222B22"/>
-                </a:solidFill>
-                <a:latin typeface="Calibri"/>
-              </a:rPr>
-              <a:t>Stand again — same circle, same posture as the open</a:t>
-            </a:r>
-          </a:p>
-          <a:p>
-            <a:pPr marL="685800" indent="-274320">
-              <a:spcAft>
-                <a:spcPts val="700"/>
-              </a:spcAft>
-            </a:pPr>
-            <a:r>
-              <a:rPr sz="2000" b="1" i="0">
-                <a:solidFill>
-                  <a:srgbClr val="97BC62"/>
-                </a:solidFill>
-                <a:latin typeface="Calibri"/>
-              </a:rPr>
-              <a:t>2   </a:t>
-            </a:r>
-            <a:r>
-              <a:rPr sz="2000" b="0" i="0">
-                <a:solidFill>
-                  <a:srgbClr val="222B22"/>
-                </a:solidFill>
-                <a:latin typeface="Calibri"/>
-              </a:rPr>
-              <a:t>One-word landing — compare it to your opening word</a:t>
-            </a:r>
-          </a:p>
-          <a:p>
-            <a:pPr marL="685800" indent="-274320">
-              <a:spcAft>
-                <a:spcPts val="700"/>
-              </a:spcAft>
-            </a:pPr>
-            <a:r>
-              <a:rPr sz="2000" b="1" i="0">
-                <a:solidFill>
-                  <a:srgbClr val="97BC62"/>
-                </a:solidFill>
-                <a:latin typeface="Calibri"/>
-              </a:rPr>
-              <a:t>3   </a:t>
-            </a:r>
-            <a:r>
-              <a:rPr sz="2000" b="0" i="0">
-                <a:solidFill>
-                  <a:srgbClr val="222B22"/>
-                </a:solidFill>
-                <a:latin typeface="Calibri"/>
-              </a:rPr>
-              <a:t>The one thing you are taking from tonight</a:t>
-            </a:r>
-          </a:p>
-          <a:p>
-            <a:pPr marL="685800" indent="-274320">
-              <a:spcAft>
-                <a:spcPts val="700"/>
-              </a:spcAft>
-            </a:pPr>
-            <a:r>
-              <a:rPr sz="2000" b="1" i="0">
-                <a:solidFill>
-                  <a:srgbClr val="97BC62"/>
-                </a:solidFill>
-                <a:latin typeface="Calibri"/>
-              </a:rPr>
-              <a:t>4   </a:t>
-            </a:r>
-            <a:r>
-              <a:rPr sz="2000" b="0" i="0">
-                <a:solidFill>
-                  <a:srgbClr val="222B22"/>
-                </a:solidFill>
-                <a:latin typeface="Calibri"/>
-              </a:rPr>
-              <a:t>The one practice — committed aloud, or modified to one you will actually keep</a:t>
-            </a:r>
-          </a:p>
-          <a:p>
-            <a:pPr marL="685800" indent="-274320">
-              <a:spcAft>
-                <a:spcPts val="700"/>
-              </a:spcAft>
-            </a:pPr>
-            <a:r>
-              <a:rPr sz="2000" b="1" i="0">
-                <a:solidFill>
-                  <a:srgbClr val="97BC62"/>
-                </a:solidFill>
-                <a:latin typeface="Calibri"/>
-              </a:rPr>
-              <a:t>5   </a:t>
-            </a:r>
-            <a:r>
-              <a:rPr sz="2000" b="0" i="0">
-                <a:solidFill>
-                  <a:srgbClr val="222B22"/>
-                </a:solidFill>
-                <a:latin typeface="Calibri"/>
-              </a:rPr>
-              <a:t>Blessings — specific, witnessed, short</a:t>
-            </a:r>
-          </a:p>
-          <a:p>
-            <a:pPr marL="685800" indent="-274320">
-              <a:spcAft>
-                <a:spcPts val="700"/>
-              </a:spcAft>
-            </a:pPr>
-            <a:r>
-              <a:rPr sz="2000" b="1" i="0">
-                <a:solidFill>
-                  <a:srgbClr val="97BC62"/>
-                </a:solidFill>
-                <a:latin typeface="Calibri"/>
-              </a:rPr>
-              <a:t>6   </a:t>
-            </a:r>
-            <a:r>
-              <a:rPr sz="2000" b="0" i="0">
-                <a:solidFill>
-                  <a:srgbClr val="222B22"/>
-                </a:solidFill>
-                <a:latin typeface="Calibri"/>
-              </a:rPr>
-              <a:t>Closing prayer — and the Aaronic blessing, spoken over each other, face to face</a:t>
-            </a:r>
-          </a:p>
-        </p:txBody>
-      </p:sp>
-      <p:sp>
-        <p:nvSpPr>
-          <p:cNvPr id="6" name="TextBox 6"/>
-          <p:cNvSpPr txBox="1"/>
-          <p:nvPr/>
-        </p:nvSpPr>
-        <p:spPr>
-          <a:xfrm>
-            <a:off x="6766560" y="1737360"/>
-            <a:ext cx="4663440" cy="2926080"/>
-          </a:xfrm>
-          <a:prstGeom prst="rect">
-            <a:avLst/>
-          </a:prstGeom>
-          <a:solidFill>
-            <a:srgbClr val="F1F6EC"/>
-          </a:solidFill>
-        </p:spPr>
-        <p:txBody>
-          <a:bodyPr wrap="square" lIns="91440" tIns="91440" rIns="91440" bIns="91440" anchor="ctr"/>
-          <a:lstStyle/>
-          <a:p>
-            <a:pPr>
-              <a:spcAft>
-                <a:spcPts val="900"/>
-              </a:spcAft>
-            </a:pPr>
-            <a:r>
-              <a:rPr sz="1200" b="1" i="0">
-                <a:solidFill>
-                  <a:srgbClr val="97BC62"/>
-                </a:solidFill>
-                <a:latin typeface="Calibri"/>
-              </a:rPr>
-              <a:t>THE AARONIC BLESSING — NUMBERS 6:24–26</a:t>
-            </a:r>
-          </a:p>
-          <a:p>
-            <a:pPr>
-              <a:spcAft>
-                <a:spcPts val="600"/>
-              </a:spcAft>
-            </a:pPr>
-            <a:r>
-              <a:rPr sz="2400" b="0" i="1">
-                <a:solidFill>
-                  <a:srgbClr val="222B22"/>
-                </a:solidFill>
-                <a:latin typeface="Cambria"/>
-              </a:rPr>
-              <a:t>“The Lord bless you and keep you;</a:t>
-            </a:r>
-          </a:p>
-          <a:p>
-            <a:pPr>
-              <a:spcAft>
-                <a:spcPts val="600"/>
-              </a:spcAft>
-            </a:pPr>
-            <a:r>
-              <a:rPr sz="2400" b="0" i="1">
-                <a:solidFill>
-                  <a:srgbClr val="222B22"/>
-                </a:solidFill>
-                <a:latin typeface="Cambria"/>
-              </a:rPr>
-              <a:t>the Lord make his face to shine upon you, and be gracious to you;</a:t>
-            </a:r>
-          </a:p>
-          <a:p>
-            <a:pPr>
-              <a:spcAft>
-                <a:spcPts val="600"/>
-              </a:spcAft>
-            </a:pPr>
-            <a:r>
-              <a:rPr sz="2400" b="0" i="1">
-                <a:solidFill>
-                  <a:srgbClr val="222B22"/>
-                </a:solidFill>
-                <a:latin typeface="Cambria"/>
-              </a:rPr>
-              <a:t>the Lord lift up his countenance upon you, and give you peace.”</a:t>
-            </a:r>
-          </a:p>
-        </p:txBody>
-      </p:sp>
-      <p:sp>
-        <p:nvSpPr>
-          <p:cNvPr id="90" name="SlideNum"/>
-          <p:cNvSpPr txBox="1"/>
-          <p:nvPr/>
-        </p:nvSpPr>
-        <p:spPr>
-          <a:xfrm>
-            <a:off x="11384280" y="6446520"/>
-            <a:ext cx="640080" cy="292608"/>
-          </a:xfrm>
-          <a:prstGeom prst="rect">
-            <a:avLst/>
-          </a:prstGeom>
-          <a:noFill/>
-        </p:spPr>
-        <p:txBody>
-          <a:bodyPr wrap="none" lIns="0" tIns="0" rIns="45720" bIns="0" anchor="ctr"/>
-          <a:lstStyle/>
-          <a:p>
-            <a:pPr algn="r"/>
-            <a:r>
-              <a:t>208</a:t>
             </a:r>
             <a:endParaRPr sz="1000" b="1">
               <a:solidFill>

--- a/_implementation-notes/evening-series/FotH Evening Session 16 Slides DRAFT v1.pptx
+++ b/_implementation-notes/evening-series/FotH Evening Session 16 Slides DRAFT v1.pptx
@@ -4738,7 +4738,688 @@
 </p:sld>
 </file>
 
+<file path=ppt/slides/slide10.xml><?xml version="1.0" encoding="utf-8"?>
+<p:sld xmlns:a="http://schemas.openxmlformats.org/drawingml/2006/main" xmlns:r="http://schemas.openxmlformats.org/officeDocument/2006/relationships" xmlns:p="http://schemas.openxmlformats.org/presentationml/2006/main">
+  <p:cSld>
+    <p:spTree>
+      <p:nvGrpSpPr>
+        <p:cNvPr id="1" name=""/>
+        <p:cNvGrpSpPr/>
+        <p:nvPr/>
+      </p:nvGrpSpPr>
+      <p:grpSpPr>
+        <a:xfrm>
+          <a:off x="0" y="0"/>
+          <a:ext cx="0" cy="0"/>
+          <a:chOff x="0" y="0"/>
+          <a:chExt cx="0" cy="0"/>
+        </a:xfrm>
+      </p:grpSpPr>
+      <p:sp>
+        <p:nvSpPr>
+          <p:cNvPr id="2" name="Rectangle 1"/>
+          <p:cNvSpPr/>
+          <p:nvPr/>
+        </p:nvSpPr>
+        <p:spPr>
+          <a:xfrm>
+            <a:off x="0" y="0"/>
+            <a:ext cx="12191695" cy="6858000"/>
+          </a:xfrm>
+          <a:prstGeom prst="rect">
+            <a:avLst/>
+          </a:prstGeom>
+          <a:solidFill>
+            <a:srgbClr val="FFFFFF"/>
+          </a:solidFill>
+          <a:ln>
+            <a:noFill/>
+          </a:ln>
+        </p:spPr>
+        <p:txBody>
+          <a:bodyPr/>
+          <a:lstStyle/>
+          <a:p>
+            <a:endParaRPr/>
+          </a:p>
+        </p:txBody>
+      </p:sp>
+      <p:sp>
+        <p:nvSpPr>
+          <p:cNvPr id="3" name="TextBox 2"/>
+          <p:cNvSpPr txBox="1"/>
+          <p:nvPr/>
+        </p:nvSpPr>
+        <p:spPr>
+          <a:xfrm>
+            <a:off x="822960" y="502920"/>
+            <a:ext cx="10515600" cy="822960"/>
+          </a:xfrm>
+          <a:prstGeom prst="rect">
+            <a:avLst/>
+          </a:prstGeom>
+          <a:noFill/>
+        </p:spPr>
+        <p:txBody>
+          <a:bodyPr wrap="square">
+            <a:spAutoFit/>
+          </a:bodyPr>
+          <a:lstStyle/>
+          <a:p>
+            <a:pPr algn="l">
+              <a:spcAft>
+                <a:spcPts val="600"/>
+              </a:spcAft>
+            </a:pPr>
+            <a:r>
+              <a:rPr sz="2800" b="1" i="0">
+                <a:solidFill>
+                  <a:srgbClr val="2C5F2D"/>
+                </a:solidFill>
+                <a:latin typeface="Cambria"/>
+              </a:rPr>
+              <a:t>Pulse 3 Framed and Sent Home</a:t>
+            </a:r>
+          </a:p>
+        </p:txBody>
+      </p:sp>
+      <p:sp>
+        <p:nvSpPr>
+          <p:cNvPr id="4" name="TextBox 4"/>
+          <p:cNvSpPr txBox="1"/>
+          <p:nvPr/>
+        </p:nvSpPr>
+        <p:spPr>
+          <a:xfrm>
+            <a:off x="822960" y="1554480"/>
+            <a:ext cx="10515600" cy="4892040"/>
+          </a:xfrm>
+          <a:prstGeom prst="rect">
+            <a:avLst/>
+          </a:prstGeom>
+          <a:noFill/>
+        </p:spPr>
+        <p:txBody>
+          <a:bodyPr wrap="square" lIns="91440" tIns="91440" rIns="91440" bIns="91440"/>
+          <a:lstStyle/>
+          <a:p>
+            <a:pPr marL="274320" indent="-274320">
+              <a:spcAft>
+                <a:spcPts val="750"/>
+              </a:spcAft>
+            </a:pPr>
+            <a:r>
+              <a:rPr sz="2200" b="1" i="0">
+                <a:solidFill>
+                  <a:srgbClr val="97BC62"/>
+                </a:solidFill>
+                <a:latin typeface="Calibri"/>
+              </a:rPr>
+              <a:t>•  </a:t>
+            </a:r>
+            <a:r>
+              <a:rPr sz="2200" b="0" i="0">
+                <a:solidFill>
+                  <a:srgbClr val="222B22"/>
+                </a:solidFill>
+                <a:latin typeface="Calibri"/>
+              </a:rPr>
+              <a:t>The Quarterly Pulse, third one this year — one page, three questions, about five minutes, at home</a:t>
+            </a:r>
+          </a:p>
+          <a:p>
+            <a:pPr marL="342900" indent="-342900">
+              <a:spcAft>
+                <a:spcPts val="750"/>
+              </a:spcAft>
+            </a:pPr>
+            <a:r>
+              <a:rPr sz="2200" b="1" i="0">
+                <a:solidFill>
+                  <a:srgbClr val="97BC62"/>
+                </a:solidFill>
+                <a:latin typeface="Calibri"/>
+              </a:rPr>
+              <a:t>1   </a:t>
+            </a:r>
+            <a:r>
+              <a:rPr sz="2200" b="0" i="0">
+                <a:solidFill>
+                  <a:srgbClr val="222B22"/>
+                </a:solidFill>
+                <a:latin typeface="Calibri"/>
+              </a:rPr>
+              <a:t>Presence — how present have I actually been in these sessions this quarter? Not attendance, presence (1–10, and one sentence why)</a:t>
+            </a:r>
+          </a:p>
+          <a:p>
+            <a:pPr marL="342900" indent="-342900">
+              <a:spcAft>
+                <a:spcPts val="750"/>
+              </a:spcAft>
+            </a:pPr>
+            <a:r>
+              <a:rPr sz="2200" b="1" i="0">
+                <a:solidFill>
+                  <a:srgbClr val="97BC62"/>
+                </a:solidFill>
+                <a:latin typeface="Calibri"/>
+              </a:rPr>
+              <a:t>2   </a:t>
+            </a:r>
+            <a:r>
+              <a:rPr sz="2200" b="0" i="0">
+                <a:solidFill>
+                  <a:srgbClr val="222B22"/>
+                </a:solidFill>
+                <a:latin typeface="Calibri"/>
+              </a:rPr>
+              <a:t>Surprise — one thing that has surprised me this quarter — about myself, about God, or about someone in this room</a:t>
+            </a:r>
+          </a:p>
+          <a:p>
+            <a:pPr marL="342900" indent="-342900">
+              <a:spcAft>
+                <a:spcPts val="750"/>
+              </a:spcAft>
+            </a:pPr>
+            <a:r>
+              <a:rPr sz="2200" b="1" i="0">
+                <a:solidFill>
+                  <a:srgbClr val="97BC62"/>
+                </a:solidFill>
+                <a:latin typeface="Calibri"/>
+              </a:rPr>
+              <a:t>3   </a:t>
+            </a:r>
+            <a:r>
+              <a:rPr sz="2200" b="0" i="0">
+                <a:solidFill>
+                  <a:srgbClr val="222B22"/>
+                </a:solidFill>
+                <a:latin typeface="Calibri"/>
+              </a:rPr>
+              <a:t>Steering — one specific way I want to engage differently in the final quarter</a:t>
+            </a:r>
+          </a:p>
+          <a:p>
+            <a:pPr marL="274320" indent="-274320">
+              <a:spcAft>
+                <a:spcPts val="750"/>
+              </a:spcAft>
+            </a:pPr>
+            <a:r>
+              <a:rPr sz="2200" b="1" i="0">
+                <a:solidFill>
+                  <a:srgbClr val="97BC62"/>
+                </a:solidFill>
+                <a:latin typeface="Calibri"/>
+              </a:rPr>
+              <a:t>•  </a:t>
+            </a:r>
+            <a:r>
+              <a:rPr sz="2200" b="0" i="0">
+                <a:solidFill>
+                  <a:srgbClr val="222B22"/>
+                </a:solidFill>
+                <a:latin typeface="Calibri"/>
+              </a:rPr>
+              <a:t>“This room steers by these pages” — the final quarter, the consolidation weeks and the two commissionings, is shaped by what you write</a:t>
+            </a:r>
+          </a:p>
+          <a:p>
+            <a:pPr marL="274320" indent="-274320">
+              <a:spcAft>
+                <a:spcPts val="750"/>
+              </a:spcAft>
+            </a:pPr>
+            <a:r>
+              <a:rPr sz="2200" b="1" i="0">
+                <a:solidFill>
+                  <a:srgbClr val="97BC62"/>
+                </a:solidFill>
+                <a:latin typeface="Calibri"/>
+              </a:rPr>
+              <a:t>•  </a:t>
+            </a:r>
+            <a:r>
+              <a:rPr sz="2200" b="0" i="0">
+                <a:solidFill>
+                  <a:srgbClr val="222B22"/>
+                </a:solidFill>
+                <a:latin typeface="Calibri"/>
+              </a:rPr>
+              <a:t>Back next Wednesday, in the bin at the door — signed or unsigned, your choice; nobody watches the bin</a:t>
+            </a:r>
+          </a:p>
+        </p:txBody>
+      </p:sp>
+      <p:sp>
+        <p:nvSpPr>
+          <p:cNvPr id="90" name="SlideNum"/>
+          <p:cNvSpPr txBox="1"/>
+          <p:nvPr/>
+        </p:nvSpPr>
+        <p:spPr>
+          <a:xfrm>
+            <a:off x="11384280" y="6446520"/>
+            <a:ext cx="640080" cy="292608"/>
+          </a:xfrm>
+          <a:prstGeom prst="rect">
+            <a:avLst/>
+          </a:prstGeom>
+          <a:noFill/>
+        </p:spPr>
+        <p:txBody>
+          <a:bodyPr wrap="none" lIns="0" tIns="0" rIns="45720" bIns="0" anchor="ctr"/>
+          <a:lstStyle/>
+          <a:p>
+            <a:pPr algn="r"/>
+            <a:r>
+              <a:t>205</a:t>
+            </a:r>
+            <a:endParaRPr sz="1000" b="1">
+              <a:solidFill>
+                <a:srgbClr val="7A8A6E"/>
+              </a:solidFill>
+              <a:latin typeface="Calibri"/>
+            </a:endParaRPr>
+          </a:p>
+        </p:txBody>
+      </p:sp>
+    </p:spTree>
+  </p:cSld>
+  <p:clrMapOvr>
+    <a:masterClrMapping/>
+  </p:clrMapOvr>
+</p:sld>
+</file>
+
 <file path=ppt/slides/slide11.xml><?xml version="1.0" encoding="utf-8"?>
+<p:sld xmlns:a="http://schemas.openxmlformats.org/drawingml/2006/main" xmlns:p="http://schemas.openxmlformats.org/presentationml/2006/main" xmlns:r="http://schemas.openxmlformats.org/officeDocument/2006/relationships">
+  <p:cSld>
+    <p:spTree>
+      <p:nvGrpSpPr>
+        <p:cNvPr id="1" name=""/>
+        <p:cNvGrpSpPr/>
+        <p:nvPr/>
+      </p:nvGrpSpPr>
+      <p:grpSpPr/>
+      <p:sp>
+        <p:nvSpPr>
+          <p:cNvPr id="2" name="Rectangle 1"/>
+          <p:cNvSpPr/>
+          <p:nvPr/>
+        </p:nvSpPr>
+        <p:spPr>
+          <a:xfrm>
+            <a:off x="0" y="0"/>
+            <a:ext cx="12192000" cy="6858000"/>
+          </a:xfrm>
+          <a:prstGeom prst="rect">
+            <a:avLst/>
+          </a:prstGeom>
+          <a:solidFill>
+            <a:srgbClr val="FFFFFF"/>
+          </a:solidFill>
+          <a:ln>
+            <a:noFill/>
+          </a:ln>
+          <a:effectLst/>
+        </p:spPr>
+        <p:style>
+          <a:lnRef idx="1">
+            <a:schemeClr val="accent1"/>
+          </a:lnRef>
+          <a:fillRef idx="3">
+            <a:schemeClr val="accent1"/>
+          </a:fillRef>
+          <a:effectRef idx="2">
+            <a:schemeClr val="accent1"/>
+          </a:effectRef>
+          <a:fontRef idx="minor">
+            <a:schemeClr val="lt1"/>
+          </a:fontRef>
+        </p:style>
+        <p:txBody>
+          <a:bodyPr rtlCol="0" anchor="ctr"/>
+          <a:lstStyle/>
+          <a:p>
+            <a:pPr algn="ctr"/>
+          </a:p>
+        </p:txBody>
+      </p:sp>
+      <p:sp>
+        <p:nvSpPr>
+          <p:cNvPr id="3" name="TextBox 2"/>
+          <p:cNvSpPr txBox="1"/>
+          <p:nvPr/>
+        </p:nvSpPr>
+        <p:spPr>
+          <a:xfrm>
+            <a:off x="822960" y="502920"/>
+            <a:ext cx="10515600" cy="822960"/>
+          </a:xfrm>
+          <a:prstGeom prst="rect">
+            <a:avLst/>
+          </a:prstGeom>
+          <a:noFill/>
+        </p:spPr>
+        <p:txBody>
+          <a:bodyPr wrap="square">
+            <a:spAutoFit/>
+          </a:bodyPr>
+          <a:lstStyle/>
+          <a:p>
+            <a:r>
+              <a:rPr sz="2800" b="1">
+                <a:solidFill>
+                  <a:srgbClr val="2C5F2D"/>
+                </a:solidFill>
+                <a:latin typeface="Cambria"/>
+              </a:rPr>
+              <a:t>The Take-Home Sheet — the Daily Rhythm</a:t>
+            </a:r>
+          </a:p>
+        </p:txBody>
+      </p:sp>
+      <p:pic>
+        <p:nvPicPr>
+          <p:cNvPr id="4" name="Picture 3" descr="s16_part1.png"/>
+          <p:cNvPicPr>
+            <a:picLocks noChangeAspect="1"/>
+          </p:cNvPicPr>
+          <p:nvPr/>
+        </p:nvPicPr>
+        <p:blipFill>
+          <a:blip r:embed="rId2"/>
+          <a:stretch>
+            <a:fillRect/>
+          </a:stretch>
+        </p:blipFill>
+        <p:spPr>
+          <a:xfrm>
+            <a:off x="1798167" y="1463040"/>
+            <a:ext cx="8595360" cy="4457308"/>
+          </a:xfrm>
+          <a:prstGeom prst="rect">
+            <a:avLst/>
+          </a:prstGeom>
+          <a:ln w="12700">
+            <a:solidFill>
+              <a:srgbClr val="C8C8C8"/>
+            </a:solidFill>
+          </a:ln>
+        </p:spPr>
+      </p:pic>
+      <p:sp>
+        <p:nvSpPr>
+          <p:cNvPr id="5" name="TextBox 4"/>
+          <p:cNvSpPr txBox="1"/>
+          <p:nvPr/>
+        </p:nvSpPr>
+        <p:spPr>
+          <a:xfrm>
+            <a:off x="822960" y="6355080"/>
+            <a:ext cx="10515600" cy="411480"/>
+          </a:xfrm>
+          <a:prstGeom prst="rect">
+            <a:avLst/>
+          </a:prstGeom>
+          <a:noFill/>
+        </p:spPr>
+        <p:txBody>
+          <a:bodyPr wrap="square">
+            <a:spAutoFit/>
+          </a:bodyPr>
+          <a:lstStyle/>
+          <a:p>
+            <a:r>
+              <a:rPr sz="1400" i="1">
+                <a:solidFill>
+                  <a:srgbClr val="595959"/>
+                </a:solidFill>
+                <a:latin typeface="Calibri"/>
+              </a:rPr>
+              <a:t>Handed out now — this is the sheet in your hands.</a:t>
+            </a:r>
+          </a:p>
+        </p:txBody>
+      </p:sp>
+      <p:sp>
+        <p:nvSpPr>
+          <p:cNvPr id="90" name="SlideNum"/>
+          <p:cNvSpPr txBox="1"/>
+          <p:nvPr/>
+        </p:nvSpPr>
+        <p:spPr>
+          <a:xfrm>
+            <a:off x="11384280" y="6446520"/>
+            <a:ext cx="640080" cy="292608"/>
+          </a:xfrm>
+          <a:prstGeom prst="rect">
+            <a:avLst/>
+          </a:prstGeom>
+          <a:noFill/>
+        </p:spPr>
+        <p:txBody>
+          <a:bodyPr wrap="none" lIns="0" tIns="0" rIns="45720" bIns="0" anchor="ctr"/>
+          <a:lstStyle/>
+          <a:p>
+            <a:pPr algn="r"/>
+            <a:r>
+              <a:t>206</a:t>
+            </a:r>
+            <a:endParaRPr sz="1000" b="1">
+              <a:solidFill>
+                <a:srgbClr val="7A8A6E"/>
+              </a:solidFill>
+              <a:latin typeface="Calibri"/>
+            </a:endParaRPr>
+          </a:p>
+        </p:txBody>
+      </p:sp>
+    </p:spTree>
+  </p:cSld>
+  <p:clrMapOvr>
+    <a:masterClrMapping/>
+  </p:clrMapOvr>
+</p:sld>
+</file>
+
+<file path=ppt/slides/slide12.xml><?xml version="1.0" encoding="utf-8"?>
+<p:sld xmlns:a="http://schemas.openxmlformats.org/drawingml/2006/main" xmlns:p="http://schemas.openxmlformats.org/presentationml/2006/main" xmlns:r="http://schemas.openxmlformats.org/officeDocument/2006/relationships">
+  <p:cSld>
+    <p:spTree>
+      <p:nvGrpSpPr>
+        <p:cNvPr id="1" name=""/>
+        <p:cNvGrpSpPr/>
+        <p:nvPr/>
+      </p:nvGrpSpPr>
+      <p:grpSpPr/>
+      <p:sp>
+        <p:nvSpPr>
+          <p:cNvPr id="2" name="Rectangle 1"/>
+          <p:cNvSpPr/>
+          <p:nvPr/>
+        </p:nvSpPr>
+        <p:spPr>
+          <a:xfrm>
+            <a:off x="0" y="0"/>
+            <a:ext cx="12192000" cy="6858000"/>
+          </a:xfrm>
+          <a:prstGeom prst="rect">
+            <a:avLst/>
+          </a:prstGeom>
+          <a:solidFill>
+            <a:srgbClr val="FFFFFF"/>
+          </a:solidFill>
+          <a:ln>
+            <a:noFill/>
+          </a:ln>
+          <a:effectLst/>
+        </p:spPr>
+        <p:style>
+          <a:lnRef idx="1">
+            <a:schemeClr val="accent1"/>
+          </a:lnRef>
+          <a:fillRef idx="3">
+            <a:schemeClr val="accent1"/>
+          </a:fillRef>
+          <a:effectRef idx="2">
+            <a:schemeClr val="accent1"/>
+          </a:effectRef>
+          <a:fontRef idx="minor">
+            <a:schemeClr val="lt1"/>
+          </a:fontRef>
+        </p:style>
+        <p:txBody>
+          <a:bodyPr rtlCol="0" anchor="ctr"/>
+          <a:lstStyle/>
+          <a:p>
+            <a:pPr algn="ctr"/>
+          </a:p>
+        </p:txBody>
+      </p:sp>
+      <p:sp>
+        <p:nvSpPr>
+          <p:cNvPr id="3" name="TextBox 2"/>
+          <p:cNvSpPr txBox="1"/>
+          <p:nvPr/>
+        </p:nvSpPr>
+        <p:spPr>
+          <a:xfrm>
+            <a:off x="822960" y="502920"/>
+            <a:ext cx="10515600" cy="822960"/>
+          </a:xfrm>
+          <a:prstGeom prst="rect">
+            <a:avLst/>
+          </a:prstGeom>
+          <a:noFill/>
+        </p:spPr>
+        <p:txBody>
+          <a:bodyPr wrap="square">
+            <a:spAutoFit/>
+          </a:bodyPr>
+          <a:lstStyle/>
+          <a:p>
+            <a:r>
+              <a:rPr sz="2800" b="1">
+                <a:solidFill>
+                  <a:srgbClr val="2C5F2D"/>
+                </a:solidFill>
+                <a:latin typeface="Cambria"/>
+              </a:rPr>
+              <a:t>The Take-Home Sheet — the Four Parts</a:t>
+            </a:r>
+          </a:p>
+        </p:txBody>
+      </p:sp>
+      <p:pic>
+        <p:nvPicPr>
+          <p:cNvPr id="4" name="Picture 3" descr="s16_part2.png"/>
+          <p:cNvPicPr>
+            <a:picLocks noChangeAspect="1"/>
+          </p:cNvPicPr>
+          <p:nvPr/>
+        </p:nvPicPr>
+        <p:blipFill>
+          <a:blip r:embed="rId2"/>
+          <a:stretch>
+            <a:fillRect/>
+          </a:stretch>
+        </p:blipFill>
+        <p:spPr>
+          <a:xfrm>
+            <a:off x="2262810" y="1463040"/>
+            <a:ext cx="7666074" cy="4709160"/>
+          </a:xfrm>
+          <a:prstGeom prst="rect">
+            <a:avLst/>
+          </a:prstGeom>
+          <a:ln w="12700">
+            <a:solidFill>
+              <a:srgbClr val="C8C8C8"/>
+            </a:solidFill>
+          </a:ln>
+        </p:spPr>
+      </p:pic>
+      <p:sp>
+        <p:nvSpPr>
+          <p:cNvPr id="5" name="TextBox 4"/>
+          <p:cNvSpPr txBox="1"/>
+          <p:nvPr/>
+        </p:nvSpPr>
+        <p:spPr>
+          <a:xfrm>
+            <a:off x="822960" y="6355080"/>
+            <a:ext cx="10515600" cy="411480"/>
+          </a:xfrm>
+          <a:prstGeom prst="rect">
+            <a:avLst/>
+          </a:prstGeom>
+          <a:noFill/>
+        </p:spPr>
+        <p:txBody>
+          <a:bodyPr wrap="square">
+            <a:spAutoFit/>
+          </a:bodyPr>
+          <a:lstStyle/>
+          <a:p>
+            <a:r>
+              <a:rPr sz="1400" i="1">
+                <a:solidFill>
+                  <a:srgbClr val="595959"/>
+                </a:solidFill>
+                <a:latin typeface="Calibri"/>
+              </a:rPr>
+              <a:t>One practice at a time — and a partner expecting you at the end of week one.</a:t>
+            </a:r>
+          </a:p>
+        </p:txBody>
+      </p:sp>
+      <p:sp>
+        <p:nvSpPr>
+          <p:cNvPr id="90" name="SlideNum"/>
+          <p:cNvSpPr txBox="1"/>
+          <p:nvPr/>
+        </p:nvSpPr>
+        <p:spPr>
+          <a:xfrm>
+            <a:off x="11384280" y="6446520"/>
+            <a:ext cx="640080" cy="292608"/>
+          </a:xfrm>
+          <a:prstGeom prst="rect">
+            <a:avLst/>
+          </a:prstGeom>
+          <a:noFill/>
+        </p:spPr>
+        <p:txBody>
+          <a:bodyPr wrap="none" lIns="0" tIns="0" rIns="45720" bIns="0" anchor="ctr"/>
+          <a:lstStyle/>
+          <a:p>
+            <a:pPr algn="r"/>
+            <a:r>
+              <a:t>206a</a:t>
+            </a:r>
+            <a:endParaRPr sz="1000" b="1">
+              <a:solidFill>
+                <a:srgbClr val="7A8A6E"/>
+              </a:solidFill>
+              <a:latin typeface="Calibri"/>
+            </a:endParaRPr>
+          </a:p>
+        </p:txBody>
+      </p:sp>
+    </p:spTree>
+  </p:cSld>
+  <p:clrMapOvr>
+    <a:masterClrMapping/>
+  </p:clrMapOvr>
+</p:sld>
+</file>
+
+<file path=ppt/slides/slide13.xml><?xml version="1.0" encoding="utf-8"?>
 <p:sld xmlns:a="http://schemas.openxmlformats.org/drawingml/2006/main" xmlns:r="http://schemas.openxmlformats.org/officeDocument/2006/relationships" xmlns:p="http://schemas.openxmlformats.org/presentationml/2006/main">
   <p:cSld>
     <p:spTree>
@@ -5071,7 +5752,7 @@
 </p:sld>
 </file>
 
-<file path=ppt/slides/slide12.xml><?xml version="1.0" encoding="utf-8"?>
+<file path=ppt/slides/slide14.xml><?xml version="1.0" encoding="utf-8"?>
 <p:sld xmlns:a="http://schemas.openxmlformats.org/drawingml/2006/main" xmlns:r="http://schemas.openxmlformats.org/officeDocument/2006/relationships" xmlns:p="http://schemas.openxmlformats.org/presentationml/2006/main">
   <p:cSld>
     <p:spTree>
@@ -5462,595 +6143,6 @@
             <a:pPr algn="r"/>
             <a:r>
               <a:t>208</a:t>
-            </a:r>
-            <a:endParaRPr sz="1000" b="1">
-              <a:solidFill>
-                <a:srgbClr val="7A8A6E"/>
-              </a:solidFill>
-              <a:latin typeface="Calibri"/>
-            </a:endParaRPr>
-          </a:p>
-        </p:txBody>
-      </p:sp>
-    </p:spTree>
-  </p:cSld>
-  <p:clrMapOvr>
-    <a:masterClrMapping/>
-  </p:clrMapOvr>
-</p:sld>
-</file>
-
-<file path=ppt/slides/slide13.xml><?xml version="1.0" encoding="utf-8"?>
-<p:sld xmlns:a="http://schemas.openxmlformats.org/drawingml/2006/main" xmlns:p="http://schemas.openxmlformats.org/presentationml/2006/main" xmlns:r="http://schemas.openxmlformats.org/officeDocument/2006/relationships">
-  <p:cSld>
-    <p:spTree>
-      <p:nvGrpSpPr>
-        <p:cNvPr id="1" name=""/>
-        <p:cNvGrpSpPr/>
-        <p:nvPr/>
-      </p:nvGrpSpPr>
-      <p:grpSpPr/>
-      <p:sp>
-        <p:nvSpPr>
-          <p:cNvPr id="2" name="Rectangle 1"/>
-          <p:cNvSpPr/>
-          <p:nvPr/>
-        </p:nvSpPr>
-        <p:spPr>
-          <a:xfrm>
-            <a:off x="0" y="0"/>
-            <a:ext cx="12192000" cy="6858000"/>
-          </a:xfrm>
-          <a:prstGeom prst="rect">
-            <a:avLst/>
-          </a:prstGeom>
-          <a:solidFill>
-            <a:srgbClr val="FFFFFF"/>
-          </a:solidFill>
-          <a:ln>
-            <a:noFill/>
-          </a:ln>
-          <a:effectLst/>
-        </p:spPr>
-        <p:style>
-          <a:lnRef idx="1">
-            <a:schemeClr val="accent1"/>
-          </a:lnRef>
-          <a:fillRef idx="3">
-            <a:schemeClr val="accent1"/>
-          </a:fillRef>
-          <a:effectRef idx="2">
-            <a:schemeClr val="accent1"/>
-          </a:effectRef>
-          <a:fontRef idx="minor">
-            <a:schemeClr val="lt1"/>
-          </a:fontRef>
-        </p:style>
-        <p:txBody>
-          <a:bodyPr rtlCol="0" anchor="ctr"/>
-          <a:lstStyle/>
-          <a:p>
-            <a:pPr algn="ctr"/>
-          </a:p>
-        </p:txBody>
-      </p:sp>
-      <p:sp>
-        <p:nvSpPr>
-          <p:cNvPr id="3" name="TextBox 2"/>
-          <p:cNvSpPr txBox="1"/>
-          <p:nvPr/>
-        </p:nvSpPr>
-        <p:spPr>
-          <a:xfrm>
-            <a:off x="822960" y="502920"/>
-            <a:ext cx="10515600" cy="822960"/>
-          </a:xfrm>
-          <a:prstGeom prst="rect">
-            <a:avLst/>
-          </a:prstGeom>
-          <a:noFill/>
-        </p:spPr>
-        <p:txBody>
-          <a:bodyPr wrap="square">
-            <a:spAutoFit/>
-          </a:bodyPr>
-          <a:lstStyle/>
-          <a:p>
-            <a:r>
-              <a:rPr sz="2800" b="1">
-                <a:solidFill>
-                  <a:srgbClr val="2C5F2D"/>
-                </a:solidFill>
-                <a:latin typeface="Cambria"/>
-              </a:rPr>
-              <a:t>Where We Are — the Four Connects</a:t>
-            </a:r>
-          </a:p>
-        </p:txBody>
-      </p:sp>
-      <p:pic>
-        <p:nvPicPr>
-          <p:cNvPr id="4" name="Picture 3" descr="four-connects.png"/>
-          <p:cNvPicPr>
-            <a:picLocks noChangeAspect="1"/>
-          </p:cNvPicPr>
-          <p:nvPr/>
-        </p:nvPicPr>
-        <p:blipFill>
-          <a:blip r:embed="rId2"/>
-          <a:stretch>
-            <a:fillRect/>
-          </a:stretch>
-        </p:blipFill>
-        <p:spPr>
-          <a:xfrm>
-            <a:off x="932688" y="1645920"/>
-            <a:ext cx="10332720" cy="3708663"/>
-          </a:xfrm>
-          <a:prstGeom prst="rect">
-            <a:avLst/>
-          </a:prstGeom>
-        </p:spPr>
-      </p:pic>
-      <p:sp>
-        <p:nvSpPr>
-          <p:cNvPr id="5" name="TextBox 4"/>
-          <p:cNvSpPr txBox="1"/>
-          <p:nvPr/>
-        </p:nvSpPr>
-        <p:spPr>
-          <a:xfrm>
-            <a:off x="822960" y="5623560"/>
-            <a:ext cx="10515600" cy="914400"/>
-          </a:xfrm>
-          <a:prstGeom prst="rect">
-            <a:avLst/>
-          </a:prstGeom>
-          <a:noFill/>
-        </p:spPr>
-        <p:txBody>
-          <a:bodyPr wrap="square">
-            <a:spAutoFit/>
-          </a:bodyPr>
-          <a:lstStyle/>
-          <a:p>
-            <a:r>
-              <a:rPr sz="1800" b="0">
-                <a:solidFill>
-                  <a:srgbClr val="222B22"/>
-                </a:solidFill>
-                <a:latin typeface="Calibri"/>
-              </a:rPr>
-              <a:t>Session 16 stands in the second box — </a:t>
-            </a:r>
-            <a:r>
-              <a:rPr sz="1800" b="1">
-                <a:solidFill>
-                  <a:srgbClr val="2C5F2D"/>
-                </a:solidFill>
-                <a:latin typeface="Calibri"/>
-              </a:rPr>
-              <a:t>Connect with Others</a:t>
-            </a:r>
-            <a:r>
-              <a:rPr sz="1800" b="0">
-                <a:solidFill>
-                  <a:srgbClr val="222B22"/>
-                </a:solidFill>
-                <a:latin typeface="Calibri"/>
-              </a:rPr>
-              <a:t>, as family. Each connection makes the next one real (Matt. 22:37–40).</a:t>
-            </a:r>
-          </a:p>
-        </p:txBody>
-      </p:sp>
-      <p:sp>
-        <p:nvSpPr>
-          <p:cNvPr id="90" name="SlideNum"/>
-          <p:cNvSpPr txBox="1"/>
-          <p:nvPr/>
-        </p:nvSpPr>
-        <p:spPr>
-          <a:xfrm>
-            <a:off x="11384280" y="6446520"/>
-            <a:ext cx="640080" cy="292608"/>
-          </a:xfrm>
-          <a:prstGeom prst="rect">
-            <a:avLst/>
-          </a:prstGeom>
-          <a:noFill/>
-        </p:spPr>
-        <p:txBody>
-          <a:bodyPr wrap="none" lIns="0" tIns="0" rIns="45720" bIns="0" anchor="ctr"/>
-          <a:lstStyle/>
-          <a:p>
-            <a:pPr algn="r"/>
-            <a:r>
-              <a:t>198a</a:t>
-            </a:r>
-            <a:endParaRPr sz="1000" b="1">
-              <a:solidFill>
-                <a:srgbClr val="7A8A6E"/>
-              </a:solidFill>
-              <a:latin typeface="Calibri"/>
-            </a:endParaRPr>
-          </a:p>
-        </p:txBody>
-      </p:sp>
-    </p:spTree>
-  </p:cSld>
-  <p:clrMapOvr>
-    <a:masterClrMapping/>
-  </p:clrMapOvr>
-</p:sld>
-</file>
-
-<file path=ppt/slides/slide14.xml><?xml version="1.0" encoding="utf-8"?>
-<p:sld xmlns:a="http://schemas.openxmlformats.org/drawingml/2006/main" xmlns:p="http://schemas.openxmlformats.org/presentationml/2006/main" xmlns:r="http://schemas.openxmlformats.org/officeDocument/2006/relationships">
-  <p:cSld>
-    <p:spTree>
-      <p:nvGrpSpPr>
-        <p:cNvPr id="1" name=""/>
-        <p:cNvGrpSpPr/>
-        <p:nvPr/>
-      </p:nvGrpSpPr>
-      <p:grpSpPr/>
-      <p:sp>
-        <p:nvSpPr>
-          <p:cNvPr id="2" name="Rectangle 1"/>
-          <p:cNvSpPr/>
-          <p:nvPr/>
-        </p:nvSpPr>
-        <p:spPr>
-          <a:xfrm>
-            <a:off x="0" y="0"/>
-            <a:ext cx="12192000" cy="6858000"/>
-          </a:xfrm>
-          <a:prstGeom prst="rect">
-            <a:avLst/>
-          </a:prstGeom>
-          <a:solidFill>
-            <a:srgbClr val="FFFFFF"/>
-          </a:solidFill>
-          <a:ln>
-            <a:noFill/>
-          </a:ln>
-          <a:effectLst/>
-        </p:spPr>
-        <p:style>
-          <a:lnRef idx="1">
-            <a:schemeClr val="accent1"/>
-          </a:lnRef>
-          <a:fillRef idx="3">
-            <a:schemeClr val="accent1"/>
-          </a:fillRef>
-          <a:effectRef idx="2">
-            <a:schemeClr val="accent1"/>
-          </a:effectRef>
-          <a:fontRef idx="minor">
-            <a:schemeClr val="lt1"/>
-          </a:fontRef>
-        </p:style>
-        <p:txBody>
-          <a:bodyPr rtlCol="0" anchor="ctr"/>
-          <a:lstStyle/>
-          <a:p>
-            <a:pPr algn="ctr"/>
-          </a:p>
-        </p:txBody>
-      </p:sp>
-      <p:sp>
-        <p:nvSpPr>
-          <p:cNvPr id="3" name="TextBox 2"/>
-          <p:cNvSpPr txBox="1"/>
-          <p:nvPr/>
-        </p:nvSpPr>
-        <p:spPr>
-          <a:xfrm>
-            <a:off x="822960" y="502920"/>
-            <a:ext cx="10515600" cy="822960"/>
-          </a:xfrm>
-          <a:prstGeom prst="rect">
-            <a:avLst/>
-          </a:prstGeom>
-          <a:noFill/>
-        </p:spPr>
-        <p:txBody>
-          <a:bodyPr wrap="square">
-            <a:spAutoFit/>
-          </a:bodyPr>
-          <a:lstStyle/>
-          <a:p>
-            <a:r>
-              <a:rPr sz="2800" b="1">
-                <a:solidFill>
-                  <a:srgbClr val="2C5F2D"/>
-                </a:solidFill>
-                <a:latin typeface="Cambria"/>
-              </a:rPr>
-              <a:t>The Take-Home Sheet — the Daily Rhythm</a:t>
-            </a:r>
-          </a:p>
-        </p:txBody>
-      </p:sp>
-      <p:pic>
-        <p:nvPicPr>
-          <p:cNvPr id="4" name="Picture 3" descr="s16_part1.png"/>
-          <p:cNvPicPr>
-            <a:picLocks noChangeAspect="1"/>
-          </p:cNvPicPr>
-          <p:nvPr/>
-        </p:nvPicPr>
-        <p:blipFill>
-          <a:blip r:embed="rId2"/>
-          <a:stretch>
-            <a:fillRect/>
-          </a:stretch>
-        </p:blipFill>
-        <p:spPr>
-          <a:xfrm>
-            <a:off x="1798167" y="1463040"/>
-            <a:ext cx="8595360" cy="4457308"/>
-          </a:xfrm>
-          <a:prstGeom prst="rect">
-            <a:avLst/>
-          </a:prstGeom>
-          <a:ln w="12700">
-            <a:solidFill>
-              <a:srgbClr val="C8C8C8"/>
-            </a:solidFill>
-          </a:ln>
-        </p:spPr>
-      </p:pic>
-      <p:sp>
-        <p:nvSpPr>
-          <p:cNvPr id="5" name="TextBox 4"/>
-          <p:cNvSpPr txBox="1"/>
-          <p:nvPr/>
-        </p:nvSpPr>
-        <p:spPr>
-          <a:xfrm>
-            <a:off x="822960" y="6355080"/>
-            <a:ext cx="10515600" cy="411480"/>
-          </a:xfrm>
-          <a:prstGeom prst="rect">
-            <a:avLst/>
-          </a:prstGeom>
-          <a:noFill/>
-        </p:spPr>
-        <p:txBody>
-          <a:bodyPr wrap="square">
-            <a:spAutoFit/>
-          </a:bodyPr>
-          <a:lstStyle/>
-          <a:p>
-            <a:r>
-              <a:rPr sz="1400" i="1">
-                <a:solidFill>
-                  <a:srgbClr val="595959"/>
-                </a:solidFill>
-                <a:latin typeface="Calibri"/>
-              </a:rPr>
-              <a:t>Handed out now — this is the sheet in your hands.</a:t>
-            </a:r>
-          </a:p>
-        </p:txBody>
-      </p:sp>
-      <p:sp>
-        <p:nvSpPr>
-          <p:cNvPr id="90" name="SlideNum"/>
-          <p:cNvSpPr txBox="1"/>
-          <p:nvPr/>
-        </p:nvSpPr>
-        <p:spPr>
-          <a:xfrm>
-            <a:off x="11384280" y="6446520"/>
-            <a:ext cx="640080" cy="292608"/>
-          </a:xfrm>
-          <a:prstGeom prst="rect">
-            <a:avLst/>
-          </a:prstGeom>
-          <a:noFill/>
-        </p:spPr>
-        <p:txBody>
-          <a:bodyPr wrap="none" lIns="0" tIns="0" rIns="45720" bIns="0" anchor="ctr"/>
-          <a:lstStyle/>
-          <a:p>
-            <a:pPr algn="r"/>
-            <a:r>
-              <a:t>206</a:t>
-            </a:r>
-            <a:endParaRPr sz="1000" b="1">
-              <a:solidFill>
-                <a:srgbClr val="7A8A6E"/>
-              </a:solidFill>
-              <a:latin typeface="Calibri"/>
-            </a:endParaRPr>
-          </a:p>
-        </p:txBody>
-      </p:sp>
-    </p:spTree>
-  </p:cSld>
-  <p:clrMapOvr>
-    <a:masterClrMapping/>
-  </p:clrMapOvr>
-</p:sld>
-</file>
-
-<file path=ppt/slides/slide15.xml><?xml version="1.0" encoding="utf-8"?>
-<p:sld xmlns:a="http://schemas.openxmlformats.org/drawingml/2006/main" xmlns:p="http://schemas.openxmlformats.org/presentationml/2006/main" xmlns:r="http://schemas.openxmlformats.org/officeDocument/2006/relationships">
-  <p:cSld>
-    <p:spTree>
-      <p:nvGrpSpPr>
-        <p:cNvPr id="1" name=""/>
-        <p:cNvGrpSpPr/>
-        <p:nvPr/>
-      </p:nvGrpSpPr>
-      <p:grpSpPr/>
-      <p:sp>
-        <p:nvSpPr>
-          <p:cNvPr id="2" name="Rectangle 1"/>
-          <p:cNvSpPr/>
-          <p:nvPr/>
-        </p:nvSpPr>
-        <p:spPr>
-          <a:xfrm>
-            <a:off x="0" y="0"/>
-            <a:ext cx="12192000" cy="6858000"/>
-          </a:xfrm>
-          <a:prstGeom prst="rect">
-            <a:avLst/>
-          </a:prstGeom>
-          <a:solidFill>
-            <a:srgbClr val="FFFFFF"/>
-          </a:solidFill>
-          <a:ln>
-            <a:noFill/>
-          </a:ln>
-          <a:effectLst/>
-        </p:spPr>
-        <p:style>
-          <a:lnRef idx="1">
-            <a:schemeClr val="accent1"/>
-          </a:lnRef>
-          <a:fillRef idx="3">
-            <a:schemeClr val="accent1"/>
-          </a:fillRef>
-          <a:effectRef idx="2">
-            <a:schemeClr val="accent1"/>
-          </a:effectRef>
-          <a:fontRef idx="minor">
-            <a:schemeClr val="lt1"/>
-          </a:fontRef>
-        </p:style>
-        <p:txBody>
-          <a:bodyPr rtlCol="0" anchor="ctr"/>
-          <a:lstStyle/>
-          <a:p>
-            <a:pPr algn="ctr"/>
-          </a:p>
-        </p:txBody>
-      </p:sp>
-      <p:sp>
-        <p:nvSpPr>
-          <p:cNvPr id="3" name="TextBox 2"/>
-          <p:cNvSpPr txBox="1"/>
-          <p:nvPr/>
-        </p:nvSpPr>
-        <p:spPr>
-          <a:xfrm>
-            <a:off x="822960" y="502920"/>
-            <a:ext cx="10515600" cy="822960"/>
-          </a:xfrm>
-          <a:prstGeom prst="rect">
-            <a:avLst/>
-          </a:prstGeom>
-          <a:noFill/>
-        </p:spPr>
-        <p:txBody>
-          <a:bodyPr wrap="square">
-            <a:spAutoFit/>
-          </a:bodyPr>
-          <a:lstStyle/>
-          <a:p>
-            <a:r>
-              <a:rPr sz="2800" b="1">
-                <a:solidFill>
-                  <a:srgbClr val="2C5F2D"/>
-                </a:solidFill>
-                <a:latin typeface="Cambria"/>
-              </a:rPr>
-              <a:t>The Take-Home Sheet — the Four Parts</a:t>
-            </a:r>
-          </a:p>
-        </p:txBody>
-      </p:sp>
-      <p:pic>
-        <p:nvPicPr>
-          <p:cNvPr id="4" name="Picture 3" descr="s16_part2.png"/>
-          <p:cNvPicPr>
-            <a:picLocks noChangeAspect="1"/>
-          </p:cNvPicPr>
-          <p:nvPr/>
-        </p:nvPicPr>
-        <p:blipFill>
-          <a:blip r:embed="rId2"/>
-          <a:stretch>
-            <a:fillRect/>
-          </a:stretch>
-        </p:blipFill>
-        <p:spPr>
-          <a:xfrm>
-            <a:off x="2262810" y="1463040"/>
-            <a:ext cx="7666074" cy="4709160"/>
-          </a:xfrm>
-          <a:prstGeom prst="rect">
-            <a:avLst/>
-          </a:prstGeom>
-          <a:ln w="12700">
-            <a:solidFill>
-              <a:srgbClr val="C8C8C8"/>
-            </a:solidFill>
-          </a:ln>
-        </p:spPr>
-      </p:pic>
-      <p:sp>
-        <p:nvSpPr>
-          <p:cNvPr id="5" name="TextBox 4"/>
-          <p:cNvSpPr txBox="1"/>
-          <p:nvPr/>
-        </p:nvSpPr>
-        <p:spPr>
-          <a:xfrm>
-            <a:off x="822960" y="6355080"/>
-            <a:ext cx="10515600" cy="411480"/>
-          </a:xfrm>
-          <a:prstGeom prst="rect">
-            <a:avLst/>
-          </a:prstGeom>
-          <a:noFill/>
-        </p:spPr>
-        <p:txBody>
-          <a:bodyPr wrap="square">
-            <a:spAutoFit/>
-          </a:bodyPr>
-          <a:lstStyle/>
-          <a:p>
-            <a:r>
-              <a:rPr sz="1400" i="1">
-                <a:solidFill>
-                  <a:srgbClr val="595959"/>
-                </a:solidFill>
-                <a:latin typeface="Calibri"/>
-              </a:rPr>
-              <a:t>One practice at a time — and a partner expecting you at the end of week one.</a:t>
-            </a:r>
-          </a:p>
-        </p:txBody>
-      </p:sp>
-      <p:sp>
-        <p:nvSpPr>
-          <p:cNvPr id="90" name="SlideNum"/>
-          <p:cNvSpPr txBox="1"/>
-          <p:nvPr/>
-        </p:nvSpPr>
-        <p:spPr>
-          <a:xfrm>
-            <a:off x="11384280" y="6446520"/>
-            <a:ext cx="640080" cy="292608"/>
-          </a:xfrm>
-          <a:prstGeom prst="rect">
-            <a:avLst/>
-          </a:prstGeom>
-          <a:noFill/>
-        </p:spPr>
-        <p:txBody>
-          <a:bodyPr wrap="none" lIns="0" tIns="0" rIns="45720" bIns="0" anchor="ctr"/>
-          <a:lstStyle/>
-          <a:p>
-            <a:pPr algn="r"/>
-            <a:r>
-              <a:t>206a</a:t>
             </a:r>
             <a:endParaRPr sz="1000" b="1">
               <a:solidFill>
@@ -6319,6 +6411,211 @@
 </file>
 
 <file path=ppt/slides/slide3.xml><?xml version="1.0" encoding="utf-8"?>
+<p:sld xmlns:a="http://schemas.openxmlformats.org/drawingml/2006/main" xmlns:p="http://schemas.openxmlformats.org/presentationml/2006/main" xmlns:r="http://schemas.openxmlformats.org/officeDocument/2006/relationships">
+  <p:cSld>
+    <p:spTree>
+      <p:nvGrpSpPr>
+        <p:cNvPr id="1" name=""/>
+        <p:cNvGrpSpPr/>
+        <p:nvPr/>
+      </p:nvGrpSpPr>
+      <p:grpSpPr/>
+      <p:sp>
+        <p:nvSpPr>
+          <p:cNvPr id="2" name="Rectangle 1"/>
+          <p:cNvSpPr/>
+          <p:nvPr/>
+        </p:nvSpPr>
+        <p:spPr>
+          <a:xfrm>
+            <a:off x="0" y="0"/>
+            <a:ext cx="12192000" cy="6858000"/>
+          </a:xfrm>
+          <a:prstGeom prst="rect">
+            <a:avLst/>
+          </a:prstGeom>
+          <a:solidFill>
+            <a:srgbClr val="FFFFFF"/>
+          </a:solidFill>
+          <a:ln>
+            <a:noFill/>
+          </a:ln>
+          <a:effectLst/>
+        </p:spPr>
+        <p:style>
+          <a:lnRef idx="1">
+            <a:schemeClr val="accent1"/>
+          </a:lnRef>
+          <a:fillRef idx="3">
+            <a:schemeClr val="accent1"/>
+          </a:fillRef>
+          <a:effectRef idx="2">
+            <a:schemeClr val="accent1"/>
+          </a:effectRef>
+          <a:fontRef idx="minor">
+            <a:schemeClr val="lt1"/>
+          </a:fontRef>
+        </p:style>
+        <p:txBody>
+          <a:bodyPr rtlCol="0" anchor="ctr"/>
+          <a:lstStyle/>
+          <a:p>
+            <a:pPr algn="ctr"/>
+          </a:p>
+        </p:txBody>
+      </p:sp>
+      <p:sp>
+        <p:nvSpPr>
+          <p:cNvPr id="3" name="TextBox 2"/>
+          <p:cNvSpPr txBox="1"/>
+          <p:nvPr/>
+        </p:nvSpPr>
+        <p:spPr>
+          <a:xfrm>
+            <a:off x="822960" y="502920"/>
+            <a:ext cx="10515600" cy="822960"/>
+          </a:xfrm>
+          <a:prstGeom prst="rect">
+            <a:avLst/>
+          </a:prstGeom>
+          <a:noFill/>
+        </p:spPr>
+        <p:txBody>
+          <a:bodyPr wrap="square">
+            <a:spAutoFit/>
+          </a:bodyPr>
+          <a:lstStyle/>
+          <a:p>
+            <a:r>
+              <a:rPr sz="2800" b="1">
+                <a:solidFill>
+                  <a:srgbClr val="2C5F2D"/>
+                </a:solidFill>
+                <a:latin typeface="Cambria"/>
+              </a:rPr>
+              <a:t>Where We Are — the Four Connects</a:t>
+            </a:r>
+          </a:p>
+        </p:txBody>
+      </p:sp>
+      <p:sp>
+        <p:nvSpPr>
+          <p:cNvPr id="5" name="TextBox 4"/>
+          <p:cNvSpPr txBox="1"/>
+          <p:nvPr/>
+        </p:nvSpPr>
+        <p:spPr>
+          <a:xfrm>
+            <a:off x="822960" y="5623560"/>
+            <a:ext cx="10515600" cy="914400"/>
+          </a:xfrm>
+          <a:prstGeom prst="rect">
+            <a:avLst/>
+          </a:prstGeom>
+          <a:noFill/>
+        </p:spPr>
+        <p:txBody>
+          <a:bodyPr wrap="square">
+            <a:spAutoFit/>
+          </a:bodyPr>
+          <a:lstStyle/>
+          <a:p>
+            <a:r>
+              <a:rPr sz="1800" b="0">
+                <a:solidFill>
+                  <a:srgbClr val="222B22"/>
+                </a:solidFill>
+                <a:latin typeface="Calibri"/>
+              </a:rPr>
+              <a:t>Session 16 stands in the second box — </a:t>
+            </a:r>
+            <a:r>
+              <a:rPr sz="1800" b="1">
+                <a:solidFill>
+                  <a:srgbClr val="2C5F2D"/>
+                </a:solidFill>
+                <a:latin typeface="Calibri"/>
+              </a:rPr>
+              <a:t>Connect with Others</a:t>
+            </a:r>
+            <a:r>
+              <a:rPr sz="1800" b="0">
+                <a:solidFill>
+                  <a:srgbClr val="222B22"/>
+                </a:solidFill>
+                <a:latin typeface="Calibri"/>
+              </a:rPr>
+              <a:t>, as family. Each connection makes the next one real (Matt. 22:37–40).</a:t>
+            </a:r>
+          </a:p>
+        </p:txBody>
+      </p:sp>
+      <p:sp>
+        <p:nvSpPr>
+          <p:cNvPr id="90" name="SlideNum"/>
+          <p:cNvSpPr txBox="1"/>
+          <p:nvPr/>
+        </p:nvSpPr>
+        <p:spPr>
+          <a:xfrm>
+            <a:off x="11384280" y="6446520"/>
+            <a:ext cx="640080" cy="292608"/>
+          </a:xfrm>
+          <a:prstGeom prst="rect">
+            <a:avLst/>
+          </a:prstGeom>
+          <a:noFill/>
+        </p:spPr>
+        <p:txBody>
+          <a:bodyPr wrap="none" lIns="0" tIns="0" rIns="45720" bIns="0" anchor="ctr"/>
+          <a:lstStyle/>
+          <a:p>
+            <a:pPr algn="r"/>
+            <a:r>
+              <a:t>198a</a:t>
+            </a:r>
+            <a:endParaRPr sz="1000" b="1">
+              <a:solidFill>
+                <a:srgbClr val="7A8A6E"/>
+              </a:solidFill>
+              <a:latin typeface="Calibri"/>
+            </a:endParaRPr>
+          </a:p>
+        </p:txBody>
+      </p:sp>
+      <p:pic>
+        <p:nvPicPr>
+          <p:cNvPr id="91" name="Picture 90" descr="four-connects.png"/>
+          <p:cNvPicPr>
+            <a:picLocks noChangeAspect="1"/>
+          </p:cNvPicPr>
+          <p:nvPr/>
+        </p:nvPicPr>
+        <p:blipFill>
+          <a:blip r:embed="rId4"/>
+          <a:stretch>
+            <a:fillRect/>
+          </a:stretch>
+        </p:blipFill>
+        <p:spPr>
+          <a:xfrm>
+            <a:off x="932688" y="1645920"/>
+            <a:ext cx="10332720" cy="3708663"/>
+          </a:xfrm>
+          <a:prstGeom prst="rect">
+            <a:avLst/>
+          </a:prstGeom>
+        </p:spPr>
+      </p:pic>
+    </p:spTree>
+  </p:cSld>
+  <p:clrMapOvr>
+    <a:masterClrMapping/>
+  </p:clrMapOvr>
+</p:sld>
+</file>
+
+<file path=ppt/slides/slide4.xml><?xml version="1.0" encoding="utf-8"?>
 <p:sld xmlns:a="http://schemas.openxmlformats.org/drawingml/2006/main" xmlns:r="http://schemas.openxmlformats.org/officeDocument/2006/relationships" xmlns:p="http://schemas.openxmlformats.org/presentationml/2006/main">
   <p:cSld>
     <p:spTree>
@@ -6719,353 +7016,6 @@
 </p:sld>
 </file>
 
-<file path=ppt/slides/slide4.xml><?xml version="1.0" encoding="utf-8"?>
-<p:sld xmlns:a="http://schemas.openxmlformats.org/drawingml/2006/main" xmlns:r="http://schemas.openxmlformats.org/officeDocument/2006/relationships" xmlns:p="http://schemas.openxmlformats.org/presentationml/2006/main">
-  <p:cSld>
-    <p:spTree>
-      <p:nvGrpSpPr>
-        <p:cNvPr id="1" name=""/>
-        <p:cNvGrpSpPr/>
-        <p:nvPr/>
-      </p:nvGrpSpPr>
-      <p:grpSpPr>
-        <a:xfrm>
-          <a:off x="0" y="0"/>
-          <a:ext cx="0" cy="0"/>
-          <a:chOff x="0" y="0"/>
-          <a:chExt cx="0" cy="0"/>
-        </a:xfrm>
-      </p:grpSpPr>
-      <p:sp>
-        <p:nvSpPr>
-          <p:cNvPr id="2" name="Rectangle 1"/>
-          <p:cNvSpPr/>
-          <p:nvPr/>
-        </p:nvSpPr>
-        <p:spPr>
-          <a:xfrm>
-            <a:off x="0" y="0"/>
-            <a:ext cx="12191695" cy="6858000"/>
-          </a:xfrm>
-          <a:prstGeom prst="rect">
-            <a:avLst/>
-          </a:prstGeom>
-          <a:solidFill>
-            <a:srgbClr val="FFFFFF"/>
-          </a:solidFill>
-          <a:ln>
-            <a:noFill/>
-          </a:ln>
-        </p:spPr>
-        <p:txBody>
-          <a:bodyPr/>
-          <a:lstStyle/>
-          <a:p>
-            <a:endParaRPr/>
-          </a:p>
-        </p:txBody>
-      </p:sp>
-      <p:sp>
-        <p:nvSpPr>
-          <p:cNvPr id="3" name="TextBox 2"/>
-          <p:cNvSpPr txBox="1"/>
-          <p:nvPr/>
-        </p:nvSpPr>
-        <p:spPr>
-          <a:xfrm>
-            <a:off x="822960" y="502920"/>
-            <a:ext cx="10515600" cy="822960"/>
-          </a:xfrm>
-          <a:prstGeom prst="rect">
-            <a:avLst/>
-          </a:prstGeom>
-          <a:noFill/>
-        </p:spPr>
-        <p:txBody>
-          <a:bodyPr wrap="square">
-            <a:spAutoFit/>
-          </a:bodyPr>
-          <a:lstStyle/>
-          <a:p>
-            <a:pPr algn="l">
-              <a:spcAft>
-                <a:spcPts val="600"/>
-              </a:spcAft>
-            </a:pPr>
-            <a:r>
-              <a:rPr sz="2800" b="1" i="0">
-                <a:solidFill>
-                  <a:srgbClr val="2C5F2D"/>
-                </a:solidFill>
-                <a:latin typeface="Cambria"/>
-              </a:rPr>
-              <a:t>Opening Container — the Eight Steps</a:t>
-            </a:r>
-          </a:p>
-        </p:txBody>
-      </p:sp>
-      <p:sp>
-        <p:nvSpPr>
-          <p:cNvPr id="4" name="TextBox 4"/>
-          <p:cNvSpPr txBox="1"/>
-          <p:nvPr/>
-        </p:nvSpPr>
-        <p:spPr>
-          <a:xfrm>
-            <a:off x="822960" y="1554480"/>
-            <a:ext cx="10515600" cy="4892040"/>
-          </a:xfrm>
-          <a:prstGeom prst="rect">
-            <a:avLst/>
-          </a:prstGeom>
-          <a:noFill/>
-        </p:spPr>
-        <p:txBody>
-          <a:bodyPr wrap="square" lIns="91440" tIns="91440" rIns="91440" bIns="91440"/>
-          <a:lstStyle/>
-          <a:p>
-            <a:pPr marL="342900" indent="-342900">
-              <a:spcAft>
-                <a:spcPts val="650"/>
-              </a:spcAft>
-            </a:pPr>
-            <a:r>
-              <a:rPr sz="2400" b="1" i="0">
-                <a:solidFill>
-                  <a:srgbClr val="97BC62"/>
-                </a:solidFill>
-                <a:latin typeface="Calibri"/>
-              </a:rPr>
-              <a:t>1   </a:t>
-            </a:r>
-            <a:r>
-              <a:rPr sz="2400" b="0" i="0">
-                <a:solidFill>
-                  <a:srgbClr val="222B22"/>
-                </a:solidFill>
-                <a:latin typeface="Calibri"/>
-              </a:rPr>
-              <a:t>Welcome — five minutes to open the container</a:t>
-            </a:r>
-          </a:p>
-          <a:p>
-            <a:pPr marL="342900" indent="-342900">
-              <a:spcAft>
-                <a:spcPts val="650"/>
-              </a:spcAft>
-            </a:pPr>
-            <a:r>
-              <a:rPr sz="2400" b="1" i="0">
-                <a:solidFill>
-                  <a:srgbClr val="97BC62"/>
-                </a:solidFill>
-                <a:latin typeface="Calibri"/>
-              </a:rPr>
-              <a:t>2   </a:t>
-            </a:r>
-            <a:r>
-              <a:rPr sz="2400" b="0" i="0">
-                <a:solidFill>
-                  <a:srgbClr val="222B22"/>
-                </a:solidFill>
-                <a:latin typeface="Calibri"/>
-              </a:rPr>
-              <a:t>Phones silenced and put away</a:t>
-            </a:r>
-          </a:p>
-          <a:p>
-            <a:pPr marL="342900" indent="-342900">
-              <a:spcAft>
-                <a:spcPts val="650"/>
-              </a:spcAft>
-            </a:pPr>
-            <a:r>
-              <a:rPr sz="2400" b="1" i="0">
-                <a:solidFill>
-                  <a:srgbClr val="97BC62"/>
-                </a:solidFill>
-                <a:latin typeface="Calibri"/>
-              </a:rPr>
-              <a:t>3   </a:t>
-            </a:r>
-            <a:r>
-              <a:rPr sz="2400" b="0" i="0">
-                <a:solidFill>
-                  <a:srgbClr val="222B22"/>
-                </a:solidFill>
-                <a:latin typeface="Calibri"/>
-              </a:rPr>
-              <a:t>Stand in a circle</a:t>
-            </a:r>
-          </a:p>
-          <a:p>
-            <a:pPr marL="342900" indent="-342900">
-              <a:spcAft>
-                <a:spcPts val="650"/>
-              </a:spcAft>
-            </a:pPr>
-            <a:r>
-              <a:rPr sz="2400" b="1" i="0">
-                <a:solidFill>
-                  <a:srgbClr val="97BC62"/>
-                </a:solidFill>
-                <a:latin typeface="Calibri"/>
-              </a:rPr>
-              <a:t>4   </a:t>
-            </a:r>
-            <a:r>
-              <a:rPr sz="2400" b="0" i="0">
-                <a:solidFill>
-                  <a:srgbClr val="222B22"/>
-                </a:solidFill>
-                <a:latin typeface="Calibri"/>
-              </a:rPr>
-              <a:t>One-word check-in — how you actually are, right now</a:t>
-            </a:r>
-          </a:p>
-          <a:p>
-            <a:pPr marL="342900" indent="-342900">
-              <a:spcAft>
-                <a:spcPts val="650"/>
-              </a:spcAft>
-            </a:pPr>
-            <a:r>
-              <a:rPr sz="2400" b="1" i="0">
-                <a:solidFill>
-                  <a:srgbClr val="97BC62"/>
-                </a:solidFill>
-                <a:latin typeface="Calibri"/>
-              </a:rPr>
-              <a:t>5   </a:t>
-            </a:r>
-            <a:r>
-              <a:rPr sz="2400" b="0" i="0">
-                <a:solidFill>
-                  <a:srgbClr val="222B22"/>
-                </a:solidFill>
-                <a:latin typeface="Calibri"/>
-              </a:rPr>
-              <a:t>Put out / bring in — set something down; bring a blessing in</a:t>
-            </a:r>
-          </a:p>
-          <a:p>
-            <a:pPr marL="342900" indent="-342900">
-              <a:spcAft>
-                <a:spcPts val="650"/>
-              </a:spcAft>
-            </a:pPr>
-            <a:r>
-              <a:rPr sz="2400" b="1" i="0">
-                <a:solidFill>
-                  <a:srgbClr val="97BC62"/>
-                </a:solidFill>
-                <a:latin typeface="Calibri"/>
-              </a:rPr>
-              <a:t>6   </a:t>
-            </a:r>
-            <a:r>
-              <a:rPr sz="2400" b="0" i="0">
-                <a:solidFill>
-                  <a:srgbClr val="222B22"/>
-                </a:solidFill>
-                <a:latin typeface="Calibri"/>
-              </a:rPr>
-              <a:t>Spoken commitment: “I am here. I am paying attention. I am willing to be moved.”</a:t>
-            </a:r>
-          </a:p>
-          <a:p>
-            <a:pPr marL="342900" indent="-342900">
-              <a:spcAft>
-                <a:spcPts val="650"/>
-              </a:spcAft>
-            </a:pPr>
-            <a:r>
-              <a:rPr sz="2400" b="1" i="0">
-                <a:solidFill>
-                  <a:srgbClr val="97BC62"/>
-                </a:solidFill>
-                <a:latin typeface="Calibri"/>
-              </a:rPr>
-              <a:t>7   </a:t>
-            </a:r>
-            <a:r>
-              <a:rPr sz="2400" b="0" i="0">
-                <a:solidFill>
-                  <a:srgbClr val="222B22"/>
-                </a:solidFill>
-                <a:latin typeface="Calibri"/>
-              </a:rPr>
-              <a:t>Opening prayer — “Holy Spirit, you are welcome here. Speak. We are listening.”</a:t>
-            </a:r>
-          </a:p>
-          <a:p>
-            <a:pPr marL="342900" indent="-342900">
-              <a:spcAft>
-                <a:spcPts val="650"/>
-              </a:spcAft>
-            </a:pPr>
-            <a:r>
-              <a:rPr sz="2400" b="1" i="0">
-                <a:solidFill>
-                  <a:srgbClr val="97BC62"/>
-                </a:solidFill>
-                <a:latin typeface="Calibri"/>
-              </a:rPr>
-              <a:t>8   </a:t>
-            </a:r>
-            <a:r>
-              <a:rPr sz="2400" b="0" i="0">
-                <a:solidFill>
-                  <a:srgbClr val="222B22"/>
-                </a:solidFill>
-                <a:latin typeface="Calibri"/>
-              </a:rPr>
-              <a:t>Sit. Begin.</a:t>
-            </a:r>
-          </a:p>
-        </p:txBody>
-      </p:sp>
-      <p:sp>
-        <p:nvSpPr>
-          <p:cNvPr id="90" name="SlideNum"/>
-          <p:cNvSpPr txBox="1"/>
-          <p:nvPr/>
-        </p:nvSpPr>
-        <p:spPr>
-          <a:xfrm>
-            <a:off x="11384280" y="6446520"/>
-            <a:ext cx="640080" cy="292608"/>
-          </a:xfrm>
-          <a:prstGeom prst="rect">
-            <a:avLst/>
-          </a:prstGeom>
-          <a:noFill/>
-        </p:spPr>
-        <p:txBody>
-          <a:bodyPr wrap="none" lIns="0" tIns="0" rIns="45720" bIns="0" anchor="ctr"/>
-          <a:lstStyle/>
-          <a:p>
-            <a:pPr algn="r"/>
-            <a:r>
-              <a:t>200</a:t>
-            </a:r>
-            <a:endParaRPr sz="1000" b="1">
-              <a:solidFill>
-                <a:srgbClr val="7A8A6E"/>
-              </a:solidFill>
-              <a:latin typeface="Calibri"/>
-            </a:endParaRPr>
-          </a:p>
-        </p:txBody>
-      </p:sp>
-    </p:spTree>
-  </p:cSld>
-  <p:clrMapOvr>
-    <a:masterClrMapping/>
-  </p:clrMapOvr>
-</p:sld>
-</file>
-
 <file path=ppt/slides/slide5.xml><?xml version="1.0" encoding="utf-8"?>
 <p:sld xmlns:a="http://schemas.openxmlformats.org/drawingml/2006/main" xmlns:r="http://schemas.openxmlformats.org/officeDocument/2006/relationships" xmlns:p="http://schemas.openxmlformats.org/presentationml/2006/main">
   <p:cSld>
@@ -7146,7 +7096,7 @@
                 </a:solidFill>
                 <a:latin typeface="Cambria"/>
               </a:rPr>
-              <a:t>Rhythm-Noticing Round</a:t>
+              <a:t>Opening Container — the Eight Steps</a:t>
             </a:r>
           </a:p>
         </p:txBody>
@@ -7171,128 +7121,203 @@
           <a:bodyPr wrap="square" lIns="91440" tIns="91440" rIns="91440" bIns="91440"/>
           <a:lstStyle/>
           <a:p>
-            <a:pPr marL="274320" indent="-274320">
+            <a:pPr marL="342900" indent="-342900">
               <a:spcAft>
-                <a:spcPts val="900"/>
+                <a:spcPts val="650"/>
               </a:spcAft>
             </a:pPr>
             <a:r>
-              <a:rPr sz="2800" b="1" i="0">
+              <a:rPr sz="2400" b="1" i="0">
                 <a:solidFill>
                   <a:srgbClr val="97BC62"/>
                 </a:solidFill>
                 <a:latin typeface="Calibri"/>
               </a:rPr>
-              <a:t>•  </a:t>
-            </a:r>
-            <a:r>
-              <a:rPr sz="2800" b="0" i="0">
+              <a:t>1   </a:t>
+            </a:r>
+            <a:r>
+              <a:rPr sz="2400" b="0" i="0">
                 <a:solidFill>
                   <a:srgbClr val="222B22"/>
                 </a:solidFill>
                 <a:latin typeface="Calibri"/>
               </a:rPr>
-              <a:t>One round before we eat — one sentence each</a:t>
-            </a:r>
-          </a:p>
-          <a:p>
-            <a:pPr marL="274320" indent="-274320">
+              <a:t>Welcome — five minutes to open the container</a:t>
+            </a:r>
+          </a:p>
+          <a:p>
+            <a:pPr marL="342900" indent="-342900">
               <a:spcAft>
-                <a:spcPts val="900"/>
+                <a:spcPts val="650"/>
               </a:spcAft>
             </a:pPr>
             <a:r>
-              <a:rPr sz="2800" b="1" i="0">
+              <a:rPr sz="2400" b="1" i="0">
                 <a:solidFill>
                   <a:srgbClr val="97BC62"/>
                 </a:solidFill>
                 <a:latin typeface="Calibri"/>
               </a:rPr>
-              <a:t>•  </a:t>
-            </a:r>
-            <a:r>
-              <a:rPr sz="2800" b="0" i="0">
+              <a:t>2   </a:t>
+            </a:r>
+            <a:r>
+              <a:rPr sz="2400" b="0" i="0">
                 <a:solidFill>
                   <a:srgbClr val="222B22"/>
                 </a:solidFill>
                 <a:latin typeface="Calibri"/>
               </a:rPr>
-              <a:t>“Where has your card held, or where has it slipped?”</a:t>
-            </a:r>
-          </a:p>
-          <a:p>
-            <a:pPr marL="274320" indent="-274320">
+              <a:t>Phones silenced and put away</a:t>
+            </a:r>
+          </a:p>
+          <a:p>
+            <a:pPr marL="342900" indent="-342900">
               <a:spcAft>
-                <a:spcPts val="900"/>
+                <a:spcPts val="650"/>
               </a:spcAft>
             </a:pPr>
             <a:r>
-              <a:rPr sz="2800" b="1" i="0">
+              <a:rPr sz="2400" b="1" i="0">
                 <a:solidFill>
                   <a:srgbClr val="97BC62"/>
                 </a:solidFill>
                 <a:latin typeface="Calibri"/>
               </a:rPr>
-              <a:t>•  </a:t>
-            </a:r>
-            <a:r>
-              <a:rPr sz="2800" b="0" i="0">
+              <a:t>3   </a:t>
+            </a:r>
+            <a:r>
+              <a:rPr sz="2400" b="0" i="0">
                 <a:solidFill>
                   <a:srgbClr val="222B22"/>
                 </a:solidFill>
                 <a:latin typeface="Calibri"/>
               </a:rPr>
-              <a:t>Both answers are welcome — a slip you noticed is the practice working, because noticing is the skill</a:t>
-            </a:r>
-          </a:p>
-          <a:p>
-            <a:pPr marL="274320" indent="-274320">
+              <a:t>Stand in a circle</a:t>
+            </a:r>
+          </a:p>
+          <a:p>
+            <a:pPr marL="342900" indent="-342900">
               <a:spcAft>
-                <a:spcPts val="900"/>
+                <a:spcPts val="650"/>
               </a:spcAft>
             </a:pPr>
             <a:r>
-              <a:rPr sz="2800" b="1" i="0">
+              <a:rPr sz="2400" b="1" i="0">
                 <a:solidFill>
                   <a:srgbClr val="97BC62"/>
                 </a:solidFill>
                 <a:latin typeface="Calibri"/>
               </a:rPr>
-              <a:t>•  </a:t>
-            </a:r>
-            <a:r>
-              <a:rPr sz="2800" b="0" i="0">
+              <a:t>4   </a:t>
+            </a:r>
+            <a:r>
+              <a:rPr sz="2400" b="0" i="0">
                 <a:solidFill>
                   <a:srgbClr val="222B22"/>
                 </a:solidFill>
                 <a:latin typeface="Calibri"/>
               </a:rPr>
-              <a:t>No fixing, no advice — a parent starts; pass-anytime holds</a:t>
-            </a:r>
-          </a:p>
-          <a:p>
-            <a:pPr marL="685800" indent="-274320">
+              <a:t>One-word check-in — how you actually are, right now</a:t>
+            </a:r>
+          </a:p>
+          <a:p>
+            <a:pPr marL="342900" indent="-342900">
               <a:spcAft>
-                <a:spcPts val="700"/>
+                <a:spcPts val="650"/>
               </a:spcAft>
             </a:pPr>
             <a:r>
-              <a:rPr sz="2000" b="1" i="0">
+              <a:rPr sz="2400" b="1" i="0">
                 <a:solidFill>
                   <a:srgbClr val="97BC62"/>
                 </a:solidFill>
                 <a:latin typeface="Calibri"/>
               </a:rPr>
-              <a:t>–  </a:t>
-            </a:r>
-            <a:r>
-              <a:rPr sz="2000" b="0" i="1">
+              <a:t>5   </a:t>
+            </a:r>
+            <a:r>
+              <a:rPr sz="2400" b="0" i="0">
                 <a:solidFill>
                   <a:srgbClr val="222B22"/>
                 </a:solidFill>
                 <a:latin typeface="Calibri"/>
               </a:rPr>
-              <a:t>“The card is a long walk; sixteen days in, everyone in this circle is still on it.”</a:t>
+              <a:t>Put out / bring in — set something down; bring a blessing in</a:t>
+            </a:r>
+          </a:p>
+          <a:p>
+            <a:pPr marL="342900" indent="-342900">
+              <a:spcAft>
+                <a:spcPts val="650"/>
+              </a:spcAft>
+            </a:pPr>
+            <a:r>
+              <a:rPr sz="2400" b="1" i="0">
+                <a:solidFill>
+                  <a:srgbClr val="97BC62"/>
+                </a:solidFill>
+                <a:latin typeface="Calibri"/>
+              </a:rPr>
+              <a:t>6   </a:t>
+            </a:r>
+            <a:r>
+              <a:rPr sz="2400" b="0" i="0">
+                <a:solidFill>
+                  <a:srgbClr val="222B22"/>
+                </a:solidFill>
+                <a:latin typeface="Calibri"/>
+              </a:rPr>
+              <a:t>Spoken commitment: “I am here. I am paying attention. I am willing to be moved.”</a:t>
+            </a:r>
+          </a:p>
+          <a:p>
+            <a:pPr marL="342900" indent="-342900">
+              <a:spcAft>
+                <a:spcPts val="650"/>
+              </a:spcAft>
+            </a:pPr>
+            <a:r>
+              <a:rPr sz="2400" b="1" i="0">
+                <a:solidFill>
+                  <a:srgbClr val="97BC62"/>
+                </a:solidFill>
+                <a:latin typeface="Calibri"/>
+              </a:rPr>
+              <a:t>7   </a:t>
+            </a:r>
+            <a:r>
+              <a:rPr sz="2400" b="0" i="0">
+                <a:solidFill>
+                  <a:srgbClr val="222B22"/>
+                </a:solidFill>
+                <a:latin typeface="Calibri"/>
+              </a:rPr>
+              <a:t>Opening prayer — “Holy Spirit, you are welcome here. Speak. We are listening.”</a:t>
+            </a:r>
+          </a:p>
+          <a:p>
+            <a:pPr marL="342900" indent="-342900">
+              <a:spcAft>
+                <a:spcPts val="650"/>
+              </a:spcAft>
+            </a:pPr>
+            <a:r>
+              <a:rPr sz="2400" b="1" i="0">
+                <a:solidFill>
+                  <a:srgbClr val="97BC62"/>
+                </a:solidFill>
+                <a:latin typeface="Calibri"/>
+              </a:rPr>
+              <a:t>8   </a:t>
+            </a:r>
+            <a:r>
+              <a:rPr sz="2400" b="0" i="0">
+                <a:solidFill>
+                  <a:srgbClr val="222B22"/>
+                </a:solidFill>
+                <a:latin typeface="Calibri"/>
+              </a:rPr>
+              <a:t>Sit. Begin.</a:t>
             </a:r>
           </a:p>
         </p:txBody>
@@ -7319,7 +7344,7 @@
           <a:p>
             <a:pPr algn="r"/>
             <a:r>
-              <a:t>201</a:t>
+              <a:t>200</a:t>
             </a:r>
             <a:endParaRPr sz="1000" b="1">
               <a:solidFill>
@@ -7418,7 +7443,7 @@
                 </a:solidFill>
                 <a:latin typeface="Cambria"/>
               </a:rPr>
-              <a:t>Acts 2:46 and the Table Grace</a:t>
+              <a:t>Rhythm-Noticing Round</a:t>
             </a:r>
           </a:p>
         </p:txBody>
@@ -7431,8 +7456,8 @@
         </p:nvSpPr>
         <p:spPr>
           <a:xfrm>
-            <a:off x="822960" y="1600200"/>
-            <a:ext cx="5669280" cy="4572000"/>
+            <a:off x="822960" y="1554480"/>
+            <a:ext cx="10515600" cy="4892040"/>
           </a:xfrm>
           <a:prstGeom prst="rect">
             <a:avLst/>
@@ -7445,11 +7470,11 @@
           <a:p>
             <a:pPr marL="274320" indent="-274320">
               <a:spcAft>
-                <a:spcPts val="800"/>
+                <a:spcPts val="900"/>
               </a:spcAft>
             </a:pPr>
             <a:r>
-              <a:rPr sz="2200" b="1" i="0">
+              <a:rPr sz="2800" b="1" i="0">
                 <a:solidFill>
                   <a:srgbClr val="97BC62"/>
                 </a:solidFill>
@@ -7458,168 +7483,113 @@
               <a:t>•  </a:t>
             </a:r>
             <a:r>
-              <a:rPr sz="2200" b="0" i="0">
+              <a:rPr sz="2800" b="0" i="0">
                 <a:solidFill>
                   <a:srgbClr val="222B22"/>
                 </a:solidFill>
                 <a:latin typeface="Calibri"/>
               </a:rPr>
-              <a:t>Luke is describing the very first church — the most spiritually alive room in the history of the world</a:t>
+              <a:t>One round before we eat — one sentence each</a:t>
             </a:r>
           </a:p>
           <a:p>
             <a:pPr marL="274320" indent="-274320">
-              <a:spcAft>
-                <a:spcPts val="800"/>
-              </a:spcAft>
-            </a:pPr>
-            <a:r>
-              <a:rPr sz="2200" b="1" i="0">
-                <a:solidFill>
-                  <a:srgbClr val="97BC62"/>
-                </a:solidFill>
-                <a:latin typeface="Calibri"/>
-              </a:rPr>
-              <a:t>•  </a:t>
-            </a:r>
-            <a:r>
-              <a:rPr sz="2200" b="0" i="0">
-                <a:solidFill>
-                  <a:srgbClr val="222B22"/>
-                </a:solidFill>
-                <a:latin typeface="Calibri"/>
-              </a:rPr>
-              <a:t>The first church ran on three rails: the teaching, the table, and the prayers</a:t>
-            </a:r>
-          </a:p>
-          <a:p>
-            <a:pPr marL="274320" indent="-274320">
-              <a:spcAft>
-                <a:spcPts val="800"/>
-              </a:spcAft>
-            </a:pPr>
-            <a:r>
-              <a:rPr sz="2200" b="1" i="0">
-                <a:solidFill>
-                  <a:srgbClr val="97BC62"/>
-                </a:solidFill>
-                <a:latin typeface="Calibri"/>
-              </a:rPr>
-              <a:t>•  </a:t>
-            </a:r>
-            <a:r>
-              <a:rPr sz="2200" b="0" i="0">
-                <a:solidFill>
-                  <a:srgbClr val="222B22"/>
-                </a:solidFill>
-                <a:latin typeface="Calibri"/>
-              </a:rPr>
-              <a:t>Our Wednesdays have lived on the teaching and the prayers — tonight is the table</a:t>
-            </a:r>
-          </a:p>
-          <a:p>
-            <a:pPr marL="274320" indent="-274320">
-              <a:spcAft>
-                <a:spcPts val="800"/>
-              </a:spcAft>
-            </a:pPr>
-            <a:r>
-              <a:rPr sz="2200" b="1" i="0">
-                <a:solidFill>
-                  <a:srgbClr val="97BC62"/>
-                </a:solidFill>
-                <a:latin typeface="Calibri"/>
-              </a:rPr>
-              <a:t>•  </a:t>
-            </a:r>
-            <a:r>
-              <a:rPr sz="2200" b="0" i="0">
-                <a:solidFill>
-                  <a:srgbClr val="222B22"/>
-                </a:solidFill>
-                <a:latin typeface="Calibri"/>
-              </a:rPr>
-              <a:t>“Breaking bread with glad and generous hearts is not the break between the formation — it is the formation.”</a:t>
-            </a:r>
-          </a:p>
-          <a:p>
-            <a:pPr marL="274320" indent="-274320">
-              <a:spcAft>
-                <a:spcPts val="800"/>
-              </a:spcAft>
-            </a:pPr>
-            <a:r>
-              <a:rPr sz="2200" b="1" i="0">
-                <a:solidFill>
-                  <a:srgbClr val="97BC62"/>
-                </a:solidFill>
-                <a:latin typeface="Calibri"/>
-              </a:rPr>
-              <a:t>•  </a:t>
-            </a:r>
-            <a:r>
-              <a:rPr sz="2200" b="0" i="0">
-                <a:solidFill>
-                  <a:srgbClr val="222B22"/>
-                </a:solidFill>
-                <a:latin typeface="Calibri"/>
-              </a:rPr>
-              <a:t>The grace — then: eat</a:t>
-            </a:r>
-          </a:p>
-        </p:txBody>
-      </p:sp>
-      <p:sp>
-        <p:nvSpPr>
-          <p:cNvPr id="6" name="TextBox 6"/>
-          <p:cNvSpPr txBox="1"/>
-          <p:nvPr/>
-        </p:nvSpPr>
-        <p:spPr>
-          <a:xfrm>
-            <a:off x="6766560" y="1737360"/>
-            <a:ext cx="4663440" cy="2194560"/>
-          </a:xfrm>
-          <a:prstGeom prst="rect">
-            <a:avLst/>
-          </a:prstGeom>
-          <a:solidFill>
-            <a:srgbClr val="F1F6EC"/>
-          </a:solidFill>
-        </p:spPr>
-        <p:txBody>
-          <a:bodyPr wrap="square" lIns="91440" tIns="91440" rIns="91440" bIns="91440" anchor="ctr"/>
-          <a:lstStyle/>
-          <a:p>
-            <a:pPr>
               <a:spcAft>
                 <a:spcPts val="900"/>
               </a:spcAft>
             </a:pPr>
             <a:r>
-              <a:rPr sz="1200" b="1" i="0">
+              <a:rPr sz="2800" b="1" i="0">
                 <a:solidFill>
                   <a:srgbClr val="97BC62"/>
                 </a:solidFill>
                 <a:latin typeface="Calibri"/>
               </a:rPr>
-              <a:t>ACTS 2:46 (ESV)</a:t>
-            </a:r>
-          </a:p>
-          <a:p>
-            <a:pPr>
+              <a:t>•  </a:t>
+            </a:r>
+            <a:r>
+              <a:rPr sz="2800" b="0" i="0">
+                <a:solidFill>
+                  <a:srgbClr val="222B22"/>
+                </a:solidFill>
+                <a:latin typeface="Calibri"/>
+              </a:rPr>
+              <a:t>“Where has your card held, or where has it slipped?”</a:t>
+            </a:r>
+          </a:p>
+          <a:p>
+            <a:pPr marL="274320" indent="-274320">
               <a:spcAft>
-                <a:spcPts val="600"/>
+                <a:spcPts val="900"/>
               </a:spcAft>
             </a:pPr>
             <a:r>
-              <a:rPr sz="2400" b="0" i="1">
+              <a:rPr sz="2800" b="1" i="0">
+                <a:solidFill>
+                  <a:srgbClr val="97BC62"/>
+                </a:solidFill>
+                <a:latin typeface="Calibri"/>
+              </a:rPr>
+              <a:t>•  </a:t>
+            </a:r>
+            <a:r>
+              <a:rPr sz="2800" b="0" i="0">
                 <a:solidFill>
                   <a:srgbClr val="222B22"/>
                 </a:solidFill>
-                <a:latin typeface="Cambria"/>
-              </a:rPr>
-              <a:t>“And day by day, attending the temple together and breaking bread in their homes, they received their food with glad and generous hearts.”</a:t>
+                <a:latin typeface="Calibri"/>
+              </a:rPr>
+              <a:t>Both answers are welcome — a slip you noticed is the practice working, because noticing is the skill</a:t>
+            </a:r>
+          </a:p>
+          <a:p>
+            <a:pPr marL="274320" indent="-274320">
+              <a:spcAft>
+                <a:spcPts val="900"/>
+              </a:spcAft>
+            </a:pPr>
+            <a:r>
+              <a:rPr sz="2800" b="1" i="0">
+                <a:solidFill>
+                  <a:srgbClr val="97BC62"/>
+                </a:solidFill>
+                <a:latin typeface="Calibri"/>
+              </a:rPr>
+              <a:t>•  </a:t>
+            </a:r>
+            <a:r>
+              <a:rPr sz="2800" b="0" i="0">
+                <a:solidFill>
+                  <a:srgbClr val="222B22"/>
+                </a:solidFill>
+                <a:latin typeface="Calibri"/>
+              </a:rPr>
+              <a:t>No fixing, no advice — a parent starts; pass-anytime holds</a:t>
+            </a:r>
+          </a:p>
+          <a:p>
+            <a:pPr marL="685800" indent="-274320">
+              <a:spcAft>
+                <a:spcPts val="700"/>
+              </a:spcAft>
+            </a:pPr>
+            <a:r>
+              <a:rPr sz="2000" b="1" i="0">
+                <a:solidFill>
+                  <a:srgbClr val="97BC62"/>
+                </a:solidFill>
+                <a:latin typeface="Calibri"/>
+              </a:rPr>
+              <a:t>–  </a:t>
+            </a:r>
+            <a:r>
+              <a:rPr sz="2000" b="0" i="1">
+                <a:solidFill>
+                  <a:srgbClr val="222B22"/>
+                </a:solidFill>
+                <a:latin typeface="Calibri"/>
+              </a:rPr>
+              <a:t>“The card is a long walk; sixteen days in, everyone in this circle is still on it.”</a:t>
             </a:r>
           </a:p>
         </p:txBody>
@@ -7646,7 +7616,7 @@
           <a:p>
             <a:pPr algn="r"/>
             <a:r>
-              <a:t>202</a:t>
+              <a:t>201</a:t>
             </a:r>
             <a:endParaRPr sz="1000" b="1">
               <a:solidFill>
@@ -7745,7 +7715,7 @@
                 </a:solidFill>
                 <a:latin typeface="Cambria"/>
               </a:rPr>
-              <a:t>The Meal</a:t>
+              <a:t>Acts 2:46 and the Table Grace</a:t>
             </a:r>
           </a:p>
         </p:txBody>
@@ -7758,8 +7728,8 @@
         </p:nvSpPr>
         <p:spPr>
           <a:xfrm>
-            <a:off x="822960" y="1554480"/>
-            <a:ext cx="10515600" cy="4892040"/>
+            <a:off x="822960" y="1600200"/>
+            <a:ext cx="5669280" cy="4572000"/>
           </a:xfrm>
           <a:prstGeom prst="rect">
             <a:avLst/>
@@ -7772,11 +7742,11 @@
           <a:p>
             <a:pPr marL="274320" indent="-274320">
               <a:spcAft>
-                <a:spcPts val="900"/>
+                <a:spcPts val="800"/>
               </a:spcAft>
             </a:pPr>
             <a:r>
-              <a:rPr sz="2800" b="1" i="0">
+              <a:rPr sz="2200" b="1" i="0">
                 <a:solidFill>
                   <a:srgbClr val="97BC62"/>
                 </a:solidFill>
@@ -7785,88 +7755,168 @@
               <a:t>•  </a:t>
             </a:r>
             <a:r>
-              <a:rPr sz="2800" b="0" i="0">
+              <a:rPr sz="2200" b="0" i="0">
                 <a:solidFill>
                   <a:srgbClr val="222B22"/>
                 </a:solidFill>
                 <a:latin typeface="Calibri"/>
               </a:rPr>
-              <a:t>Real food, no agenda — no devotional between courses, no teaching moment</a:t>
+              <a:t>Luke is describing the very first church — the most spiritually alive room in the history of the world</a:t>
             </a:r>
           </a:p>
           <a:p>
             <a:pPr marL="274320" indent="-274320">
+              <a:spcAft>
+                <a:spcPts val="800"/>
+              </a:spcAft>
+            </a:pPr>
+            <a:r>
+              <a:rPr sz="2200" b="1" i="0">
+                <a:solidFill>
+                  <a:srgbClr val="97BC62"/>
+                </a:solidFill>
+                <a:latin typeface="Calibri"/>
+              </a:rPr>
+              <a:t>•  </a:t>
+            </a:r>
+            <a:r>
+              <a:rPr sz="2200" b="0" i="0">
+                <a:solidFill>
+                  <a:srgbClr val="222B22"/>
+                </a:solidFill>
+                <a:latin typeface="Calibri"/>
+              </a:rPr>
+              <a:t>The first church ran on three rails: the teaching, the table, and the prayers</a:t>
+            </a:r>
+          </a:p>
+          <a:p>
+            <a:pPr marL="274320" indent="-274320">
+              <a:spcAft>
+                <a:spcPts val="800"/>
+              </a:spcAft>
+            </a:pPr>
+            <a:r>
+              <a:rPr sz="2200" b="1" i="0">
+                <a:solidFill>
+                  <a:srgbClr val="97BC62"/>
+                </a:solidFill>
+                <a:latin typeface="Calibri"/>
+              </a:rPr>
+              <a:t>•  </a:t>
+            </a:r>
+            <a:r>
+              <a:rPr sz="2200" b="0" i="0">
+                <a:solidFill>
+                  <a:srgbClr val="222B22"/>
+                </a:solidFill>
+                <a:latin typeface="Calibri"/>
+              </a:rPr>
+              <a:t>Our Wednesdays have lived on the teaching and the prayers — tonight is the table</a:t>
+            </a:r>
+          </a:p>
+          <a:p>
+            <a:pPr marL="274320" indent="-274320">
+              <a:spcAft>
+                <a:spcPts val="800"/>
+              </a:spcAft>
+            </a:pPr>
+            <a:r>
+              <a:rPr sz="2200" b="1" i="0">
+                <a:solidFill>
+                  <a:srgbClr val="97BC62"/>
+                </a:solidFill>
+                <a:latin typeface="Calibri"/>
+              </a:rPr>
+              <a:t>•  </a:t>
+            </a:r>
+            <a:r>
+              <a:rPr sz="2200" b="0" i="0">
+                <a:solidFill>
+                  <a:srgbClr val="222B22"/>
+                </a:solidFill>
+                <a:latin typeface="Calibri"/>
+              </a:rPr>
+              <a:t>“Breaking bread with glad and generous hearts is not the break between the formation — it is the formation.”</a:t>
+            </a:r>
+          </a:p>
+          <a:p>
+            <a:pPr marL="274320" indent="-274320">
+              <a:spcAft>
+                <a:spcPts val="800"/>
+              </a:spcAft>
+            </a:pPr>
+            <a:r>
+              <a:rPr sz="2200" b="1" i="0">
+                <a:solidFill>
+                  <a:srgbClr val="97BC62"/>
+                </a:solidFill>
+                <a:latin typeface="Calibri"/>
+              </a:rPr>
+              <a:t>•  </a:t>
+            </a:r>
+            <a:r>
+              <a:rPr sz="2200" b="0" i="0">
+                <a:solidFill>
+                  <a:srgbClr val="222B22"/>
+                </a:solidFill>
+                <a:latin typeface="Calibri"/>
+              </a:rPr>
+              <a:t>The grace — then: eat</a:t>
+            </a:r>
+          </a:p>
+        </p:txBody>
+      </p:sp>
+      <p:sp>
+        <p:nvSpPr>
+          <p:cNvPr id="6" name="TextBox 6"/>
+          <p:cNvSpPr txBox="1"/>
+          <p:nvPr/>
+        </p:nvSpPr>
+        <p:spPr>
+          <a:xfrm>
+            <a:off x="6766560" y="1737360"/>
+            <a:ext cx="4663440" cy="2194560"/>
+          </a:xfrm>
+          <a:prstGeom prst="rect">
+            <a:avLst/>
+          </a:prstGeom>
+          <a:solidFill>
+            <a:srgbClr val="F1F6EC"/>
+          </a:solidFill>
+        </p:spPr>
+        <p:txBody>
+          <a:bodyPr wrap="square" lIns="91440" tIns="91440" rIns="91440" bIns="91440" anchor="ctr"/>
+          <a:lstStyle/>
+          <a:p>
+            <a:pPr>
               <a:spcAft>
                 <a:spcPts val="900"/>
               </a:spcAft>
             </a:pPr>
             <a:r>
-              <a:rPr sz="2800" b="1" i="0">
+              <a:rPr sz="1200" b="1" i="0">
                 <a:solidFill>
                   <a:srgbClr val="97BC62"/>
                 </a:solidFill>
                 <a:latin typeface="Calibri"/>
               </a:rPr>
-              <a:t>•  </a:t>
-            </a:r>
-            <a:r>
-              <a:rPr sz="2800" b="0" i="0">
-                <a:solidFill>
-                  <a:srgbClr val="222B22"/>
-                </a:solidFill>
-                <a:latin typeface="Calibri"/>
-              </a:rPr>
-              <a:t>“We are going to eat together. That's it. That's the session.”</a:t>
-            </a:r>
-          </a:p>
-          <a:p>
-            <a:pPr marL="274320" indent="-274320">
+              <a:t>ACTS 2:46 (ESV)</a:t>
+            </a:r>
+          </a:p>
+          <a:p>
+            <a:pPr>
               <a:spcAft>
-                <a:spcPts val="900"/>
+                <a:spcPts val="600"/>
               </a:spcAft>
             </a:pPr>
             <a:r>
-              <a:rPr sz="2800" b="1" i="0">
-                <a:solidFill>
-                  <a:srgbClr val="97BC62"/>
-                </a:solidFill>
-                <a:latin typeface="Calibri"/>
-              </a:rPr>
-              <a:t>•  </a:t>
-            </a:r>
-            <a:r>
-              <a:rPr sz="2800" b="0" i="0">
+              <a:rPr sz="2400" b="0" i="1">
                 <a:solidFill>
                   <a:srgbClr val="222B22"/>
                 </a:solidFill>
-                <a:latin typeface="Calibri"/>
-              </a:rPr>
-              <a:t>Phones silenced and put away — the people at your table tonight are the evening</a:t>
-            </a:r>
-          </a:p>
-          <a:p>
-            <a:pPr marL="274320" indent="-274320">
-              <a:spcAft>
-                <a:spcPts val="900"/>
-              </a:spcAft>
-            </a:pPr>
-            <a:r>
-              <a:rPr sz="2800" b="1" i="0">
-                <a:solidFill>
-                  <a:srgbClr val="97BC62"/>
-                </a:solidFill>
-                <a:latin typeface="Calibri"/>
-              </a:rPr>
-              <a:t>•  </a:t>
-            </a:r>
-            <a:r>
-              <a:rPr sz="2800" b="0" i="0">
-                <a:solidFill>
-                  <a:srgbClr val="222B22"/>
-                </a:solidFill>
-                <a:latin typeface="Calibri"/>
-              </a:rPr>
-              <a:t>Dessert is held back — dessert arriving is the signal the cards are coming</a:t>
+                <a:latin typeface="Cambria"/>
+              </a:rPr>
+              <a:t>“And day by day, attending the temple together and breaking bread in their homes, they received their food with glad and generous hearts.”</a:t>
             </a:r>
           </a:p>
         </p:txBody>
@@ -7893,7 +7943,7 @@
           <a:p>
             <a:pPr algn="r"/>
             <a:r>
-              <a:t>203</a:t>
+              <a:t>202</a:t>
             </a:r>
             <a:endParaRPr sz="1000" b="1">
               <a:solidFill>
@@ -7992,7 +8042,7 @@
                 </a:solidFill>
                 <a:latin typeface="Cambria"/>
               </a:rPr>
-              <a:t>Cards over Dessert</a:t>
+              <a:t>The Meal</a:t>
             </a:r>
           </a:p>
         </p:txBody>
@@ -8019,11 +8069,11 @@
           <a:p>
             <a:pPr marL="274320" indent="-274320">
               <a:spcAft>
-                <a:spcPts val="750"/>
+                <a:spcPts val="900"/>
               </a:spcAft>
             </a:pPr>
             <a:r>
-              <a:rPr sz="2000" b="1" i="0">
+              <a:rPr sz="2800" b="1" i="0">
                 <a:solidFill>
                   <a:srgbClr val="97BC62"/>
                 </a:solidFill>
@@ -8032,23 +8082,23 @@
               <a:t>•  </a:t>
             </a:r>
             <a:r>
-              <a:rPr sz="2000" b="0" i="0">
+              <a:rPr sz="2800" b="0" i="0">
                 <a:solidFill>
                   <a:srgbClr val="222B22"/>
                 </a:solidFill>
                 <a:latin typeface="Calibri"/>
               </a:rPr>
-              <a:t>A small stack on your table — someone reads the first card aloud; a parent answers first, every table, every card</a:t>
+              <a:t>Real food, no agenda — no devotional between courses, no teaching moment</a:t>
             </a:r>
           </a:p>
           <a:p>
             <a:pPr marL="274320" indent="-274320">
               <a:spcAft>
-                <a:spcPts val="750"/>
+                <a:spcPts val="900"/>
               </a:spcAft>
             </a:pPr>
             <a:r>
-              <a:rPr sz="2000" b="1" i="0">
+              <a:rPr sz="2800" b="1" i="0">
                 <a:solidFill>
                   <a:srgbClr val="97BC62"/>
                 </a:solidFill>
@@ -8057,113 +8107,63 @@
               <a:t>•  </a:t>
             </a:r>
             <a:r>
-              <a:rPr sz="2000" b="0" i="0">
+              <a:rPr sz="2800" b="0" i="0">
                 <a:solidFill>
                   <a:srgbClr val="222B22"/>
                 </a:solidFill>
                 <a:latin typeface="Calibri"/>
               </a:rPr>
-              <a:t>Then anyone who wants to answers, in any order — nobody has to. When the card feels done, read the next one</a:t>
-            </a:r>
-          </a:p>
-          <a:p>
-            <a:pPr marL="342900" indent="-342900">
+              <a:t>“We are going to eat together. That's it. That's the session.”</a:t>
+            </a:r>
+          </a:p>
+          <a:p>
+            <a:pPr marL="274320" indent="-274320">
               <a:spcAft>
-                <a:spcPts val="750"/>
+                <a:spcPts val="900"/>
               </a:spcAft>
             </a:pPr>
             <a:r>
-              <a:rPr sz="2000" b="1" i="0">
+              <a:rPr sz="2800" b="1" i="0">
                 <a:solidFill>
                   <a:srgbClr val="97BC62"/>
                 </a:solidFill>
                 <a:latin typeface="Calibri"/>
               </a:rPr>
-              <a:t>1   </a:t>
-            </a:r>
-            <a:r>
-              <a:rPr sz="2000" b="0" i="0">
+              <a:t>•  </a:t>
+            </a:r>
+            <a:r>
+              <a:rPr sz="2800" b="0" i="0">
                 <a:solidFill>
                   <a:srgbClr val="222B22"/>
                 </a:solidFill>
                 <a:latin typeface="Calibri"/>
               </a:rPr>
-              <a:t>One footprint — “Looking back at this past month — one place you can see God's hand more clearly now than you did at the time.”</a:t>
-            </a:r>
-          </a:p>
-          <a:p>
-            <a:pPr marL="342900" indent="-342900">
+              <a:t>Phones silenced and put away — the people at your table tonight are the evening</a:t>
+            </a:r>
+          </a:p>
+          <a:p>
+            <a:pPr marL="274320" indent="-274320">
               <a:spcAft>
-                <a:spcPts val="750"/>
+                <a:spcPts val="900"/>
               </a:spcAft>
             </a:pPr>
             <a:r>
-              <a:rPr sz="2000" b="1" i="0">
+              <a:rPr sz="2800" b="1" i="0">
                 <a:solidFill>
                   <a:srgbClr val="97BC62"/>
                 </a:solidFill>
                 <a:latin typeface="Calibri"/>
               </a:rPr>
-              <a:t>2   </a:t>
-            </a:r>
-            <a:r>
-              <a:rPr sz="2000" b="0" i="0">
+              <a:t>•  </a:t>
+            </a:r>
+            <a:r>
+              <a:rPr sz="2800" b="0" i="0">
                 <a:solidFill>
                   <a:srgbClr val="222B22"/>
                 </a:solidFill>
                 <a:latin typeface="Calibri"/>
               </a:rPr>
-              <a:t>Where you came alive — “What activity, conversation, or work this season has made you most alive? Why?”</a:t>
-            </a:r>
-          </a:p>
-          <a:p>
-            <a:pPr marL="342900" indent="-342900">
-              <a:spcAft>
-                <a:spcPts val="750"/>
-              </a:spcAft>
-            </a:pPr>
-            <a:r>
-              <a:rPr sz="2000" b="1" i="0">
-                <a:solidFill>
-                  <a:srgbClr val="97BC62"/>
-                </a:solidFill>
-                <a:latin typeface="Calibri"/>
-              </a:rPr>
-              <a:t>3   </a:t>
-            </a:r>
-            <a:r>
-              <a:rPr sz="2000" b="0" i="0">
-                <a:solidFill>
-                  <a:srgbClr val="222B22"/>
-                </a:solidFill>
-                <a:latin typeface="Calibri"/>
-              </a:rPr>
-              <a:t>The ten-year question — “What's one thing you hope is still true between us in ten years?”</a:t>
-            </a:r>
-          </a:p>
-          <a:p>
-            <a:pPr marL="274320" indent="-274320">
-              <a:spcAft>
-                <a:spcPts val="750"/>
-              </a:spcAft>
-            </a:pPr>
-            <a:r>
-              <a:rPr sz="2000" b="1" i="0">
-                <a:solidFill>
-                  <a:srgbClr val="97BC62"/>
-                </a:solidFill>
-                <a:latin typeface="Calibri"/>
-              </a:rPr>
-              <a:t>•  </a:t>
-            </a:r>
-            <a:r>
-              <a:rPr sz="2000" b="0" i="0">
-                <a:solidFill>
-                  <a:srgbClr val="222B22"/>
-                </a:solidFill>
-                <a:latin typeface="Calibri"/>
-              </a:rPr>
-              <a:t>No report-out — what is said at your table stays at your table. Ten minutes of laughing at your dad's answer is not a failure of the exercise — that IS the exercise</a:t>
+              <a:t>Dessert is held back — dessert arriving is the signal the cards are coming</a:t>
             </a:r>
           </a:p>
         </p:txBody>
@@ -8190,7 +8190,7 @@
           <a:p>
             <a:pPr algn="r"/>
             <a:r>
-              <a:t>204</a:t>
+              <a:t>203</a:t>
             </a:r>
             <a:endParaRPr sz="1000" b="1">
               <a:solidFill>
@@ -8289,7 +8289,7 @@
                 </a:solidFill>
                 <a:latin typeface="Cambria"/>
               </a:rPr>
-              <a:t>Pulse 3 Framed and Sent Home</a:t>
+              <a:t>Cards over Dessert</a:t>
             </a:r>
           </a:p>
         </p:txBody>
@@ -8320,7 +8320,7 @@
               </a:spcAft>
             </a:pPr>
             <a:r>
-              <a:rPr sz="2200" b="1" i="0">
+              <a:rPr sz="2000" b="1" i="0">
                 <a:solidFill>
                   <a:srgbClr val="97BC62"/>
                 </a:solidFill>
@@ -8329,13 +8329,38 @@
               <a:t>•  </a:t>
             </a:r>
             <a:r>
-              <a:rPr sz="2200" b="0" i="0">
+              <a:rPr sz="2000" b="0" i="0">
                 <a:solidFill>
                   <a:srgbClr val="222B22"/>
                 </a:solidFill>
                 <a:latin typeface="Calibri"/>
               </a:rPr>
-              <a:t>The Quarterly Pulse, third one this year — one page, three questions, about five minutes, at home</a:t>
+              <a:t>A small stack on your table — someone reads the first card aloud; a parent answers first, every table, every card</a:t>
+            </a:r>
+          </a:p>
+          <a:p>
+            <a:pPr marL="274320" indent="-274320">
+              <a:spcAft>
+                <a:spcPts val="750"/>
+              </a:spcAft>
+            </a:pPr>
+            <a:r>
+              <a:rPr sz="2000" b="1" i="0">
+                <a:solidFill>
+                  <a:srgbClr val="97BC62"/>
+                </a:solidFill>
+                <a:latin typeface="Calibri"/>
+              </a:rPr>
+              <a:t>•  </a:t>
+            </a:r>
+            <a:r>
+              <a:rPr sz="2000" b="0" i="0">
+                <a:solidFill>
+                  <a:srgbClr val="222B22"/>
+                </a:solidFill>
+                <a:latin typeface="Calibri"/>
+              </a:rPr>
+              <a:t>Then anyone who wants to answers, in any order — nobody has to. When the card feels done, read the next one</a:t>
             </a:r>
           </a:p>
           <a:p>
@@ -8345,7 +8370,7 @@
               </a:spcAft>
             </a:pPr>
             <a:r>
-              <a:rPr sz="2200" b="1" i="0">
+              <a:rPr sz="2000" b="1" i="0">
                 <a:solidFill>
                   <a:srgbClr val="97BC62"/>
                 </a:solidFill>
@@ -8354,13 +8379,13 @@
               <a:t>1   </a:t>
             </a:r>
             <a:r>
-              <a:rPr sz="2200" b="0" i="0">
+              <a:rPr sz="2000" b="0" i="0">
                 <a:solidFill>
                   <a:srgbClr val="222B22"/>
                 </a:solidFill>
                 <a:latin typeface="Calibri"/>
               </a:rPr>
-              <a:t>Presence — how present have I actually been in these sessions this quarter? Not attendance, presence (1–10, and one sentence why)</a:t>
+              <a:t>One footprint — “Looking back at this past month — one place you can see God's hand more clearly now than you did at the time.”</a:t>
             </a:r>
           </a:p>
           <a:p>
@@ -8370,7 +8395,7 @@
               </a:spcAft>
             </a:pPr>
             <a:r>
-              <a:rPr sz="2200" b="1" i="0">
+              <a:rPr sz="2000" b="1" i="0">
                 <a:solidFill>
                   <a:srgbClr val="97BC62"/>
                 </a:solidFill>
@@ -8379,13 +8404,13 @@
               <a:t>2   </a:t>
             </a:r>
             <a:r>
-              <a:rPr sz="2200" b="0" i="0">
+              <a:rPr sz="2000" b="0" i="0">
                 <a:solidFill>
                   <a:srgbClr val="222B22"/>
                 </a:solidFill>
                 <a:latin typeface="Calibri"/>
               </a:rPr>
-              <a:t>Surprise — one thing that has surprised me this quarter — about myself, about God, or about someone in this room</a:t>
+              <a:t>Where you came alive — “What activity, conversation, or work this season has made you most alive? Why?”</a:t>
             </a:r>
           </a:p>
           <a:p>
@@ -8395,7 +8420,7 @@
               </a:spcAft>
             </a:pPr>
             <a:r>
-              <a:rPr sz="2200" b="1" i="0">
+              <a:rPr sz="2000" b="1" i="0">
                 <a:solidFill>
                   <a:srgbClr val="97BC62"/>
                 </a:solidFill>
@@ -8404,13 +8429,13 @@
               <a:t>3   </a:t>
             </a:r>
             <a:r>
-              <a:rPr sz="2200" b="0" i="0">
+              <a:rPr sz="2000" b="0" i="0">
                 <a:solidFill>
                   <a:srgbClr val="222B22"/>
                 </a:solidFill>
                 <a:latin typeface="Calibri"/>
               </a:rPr>
-              <a:t>Steering — one specific way I want to engage differently in the final quarter</a:t>
+              <a:t>The ten-year question — “What's one thing you hope is still true between us in ten years?”</a:t>
             </a:r>
           </a:p>
           <a:p>
@@ -8420,7 +8445,7 @@
               </a:spcAft>
             </a:pPr>
             <a:r>
-              <a:rPr sz="2200" b="1" i="0">
+              <a:rPr sz="2000" b="1" i="0">
                 <a:solidFill>
                   <a:srgbClr val="97BC62"/>
                 </a:solidFill>
@@ -8429,38 +8454,13 @@
               <a:t>•  </a:t>
             </a:r>
             <a:r>
-              <a:rPr sz="2200" b="0" i="0">
+              <a:rPr sz="2000" b="0" i="0">
                 <a:solidFill>
                   <a:srgbClr val="222B22"/>
                 </a:solidFill>
                 <a:latin typeface="Calibri"/>
               </a:rPr>
-              <a:t>“This room steers by these pages” — the final quarter, the consolidation weeks and the two commissionings, is shaped by what you write</a:t>
-            </a:r>
-          </a:p>
-          <a:p>
-            <a:pPr marL="274320" indent="-274320">
-              <a:spcAft>
-                <a:spcPts val="750"/>
-              </a:spcAft>
-            </a:pPr>
-            <a:r>
-              <a:rPr sz="2200" b="1" i="0">
-                <a:solidFill>
-                  <a:srgbClr val="97BC62"/>
-                </a:solidFill>
-                <a:latin typeface="Calibri"/>
-              </a:rPr>
-              <a:t>•  </a:t>
-            </a:r>
-            <a:r>
-              <a:rPr sz="2200" b="0" i="0">
-                <a:solidFill>
-                  <a:srgbClr val="222B22"/>
-                </a:solidFill>
-                <a:latin typeface="Calibri"/>
-              </a:rPr>
-              <a:t>Back next Wednesday, in the bin at the door — signed or unsigned, your choice; nobody watches the bin</a:t>
+              <a:t>No report-out — what is said at your table stays at your table. Ten minutes of laughing at your dad's answer is not a failure of the exercise — that IS the exercise</a:t>
             </a:r>
           </a:p>
         </p:txBody>
@@ -8487,7 +8487,7 @@
           <a:p>
             <a:pPr algn="r"/>
             <a:r>
-              <a:t>205</a:t>
+              <a:t>204</a:t>
             </a:r>
             <a:endParaRPr sz="1000" b="1">
               <a:solidFill>

--- a/_implementation-notes/evening-series/FotH Evening Session 16 Slides DRAFT v1.pptx
+++ b/_implementation-notes/evening-series/FotH Evening Session 16 Slides DRAFT v1.pptx
@@ -6592,7 +6592,7 @@
           <p:nvPr/>
         </p:nvPicPr>
         <p:blipFill>
-          <a:blip r:embed="rId4"/>
+          <a:blip r:embed="rId5"/>
           <a:stretch>
             <a:fillRect/>
           </a:stretch>

--- a/_implementation-notes/evening-series/FotH Evening Session 16 Slides DRAFT v1.pptx
+++ b/_implementation-notes/evening-series/FotH Evening Session 16 Slides DRAFT v1.pptx
@@ -5016,7 +5016,7 @@
           <a:p>
             <a:pPr algn="r"/>
             <a:r>
-              <a:t>205</a:t>
+              <a:t>236</a:t>
             </a:r>
             <a:endParaRPr sz="1000" b="1">
               <a:solidFill>
@@ -5208,7 +5208,7 @@
           <a:p>
             <a:pPr algn="r"/>
             <a:r>
-              <a:t>206</a:t>
+              <a:t>237</a:t>
             </a:r>
             <a:endParaRPr sz="1000" b="1">
               <a:solidFill>
@@ -5400,7 +5400,7 @@
           <a:p>
             <a:pPr algn="r"/>
             <a:r>
-              <a:t>206a</a:t>
+              <a:t>238</a:t>
             </a:r>
             <a:endParaRPr sz="1000" b="1">
               <a:solidFill>
@@ -5697,7 +5697,7 @@
           <a:p>
             <a:pPr algn="r"/>
             <a:r>
-              <a:t>207</a:t>
+              <a:t>239</a:t>
             </a:r>
             <a:endParaRPr sz="1000" b="1">
               <a:solidFill>
@@ -6142,7 +6142,7 @@
           <a:p>
             <a:pPr algn="r"/>
             <a:r>
-              <a:t>208</a:t>
+              <a:t>240</a:t>
             </a:r>
             <a:endParaRPr sz="1000" b="1">
               <a:solidFill>
@@ -6355,7 +6355,7 @@
           <a:p>
             <a:pPr algn="r"/>
             <a:r>
-              <a:t>198</a:t>
+              <a:t>228</a:t>
             </a:r>
             <a:endParaRPr sz="1000" b="1">
               <a:solidFill>
@@ -6572,7 +6572,7 @@
           <a:p>
             <a:pPr algn="r"/>
             <a:r>
-              <a:t>198a</a:t>
+              <a:t>229</a:t>
             </a:r>
             <a:endParaRPr sz="1000" b="1">
               <a:solidFill>
@@ -6961,7 +6961,7 @@
           <a:p>
             <a:pPr algn="r"/>
             <a:r>
-              <a:t>199</a:t>
+              <a:t>230</a:t>
             </a:r>
             <a:endParaRPr sz="1000" b="1">
               <a:solidFill>
@@ -7344,7 +7344,7 @@
           <a:p>
             <a:pPr algn="r"/>
             <a:r>
-              <a:t>200</a:t>
+              <a:t>231</a:t>
             </a:r>
             <a:endParaRPr sz="1000" b="1">
               <a:solidFill>
@@ -7616,7 +7616,7 @@
           <a:p>
             <a:pPr algn="r"/>
             <a:r>
-              <a:t>201</a:t>
+              <a:t>232</a:t>
             </a:r>
             <a:endParaRPr sz="1000" b="1">
               <a:solidFill>
@@ -7943,7 +7943,7 @@
           <a:p>
             <a:pPr algn="r"/>
             <a:r>
-              <a:t>202</a:t>
+              <a:t>233</a:t>
             </a:r>
             <a:endParaRPr sz="1000" b="1">
               <a:solidFill>
@@ -8190,7 +8190,7 @@
           <a:p>
             <a:pPr algn="r"/>
             <a:r>
-              <a:t>203</a:t>
+              <a:t>234</a:t>
             </a:r>
             <a:endParaRPr sz="1000" b="1">
               <a:solidFill>
@@ -8487,7 +8487,7 @@
           <a:p>
             <a:pPr algn="r"/>
             <a:r>
-              <a:t>204</a:t>
+              <a:t>235</a:t>
             </a:r>
             <a:endParaRPr sz="1000" b="1">
               <a:solidFill>

--- a/_implementation-notes/evening-series/FotH Evening Session 16 Slides DRAFT v1.pptx
+++ b/_implementation-notes/evening-series/FotH Evening Session 16 Slides DRAFT v1.pptx
@@ -6592,7 +6592,7 @@
           <p:nvPr/>
         </p:nvPicPr>
         <p:blipFill>
-          <a:blip r:embed="rId5"/>
+          <a:blip r:embed="rId6"/>
           <a:stretch>
             <a:fillRect/>
           </a:stretch>

--- a/_implementation-notes/evening-series/FotH Evening Session 16 Slides DRAFT v1.pptx
+++ b/_implementation-notes/evening-series/FotH Evening Session 16 Slides DRAFT v1.pptx
@@ -5016,7 +5016,7 @@
           <a:p>
             <a:pPr algn="r"/>
             <a:r>
-              <a:t>236</a:t>
+              <a:t>237</a:t>
             </a:r>
             <a:endParaRPr sz="1000" b="1">
               <a:solidFill>
@@ -5208,7 +5208,7 @@
           <a:p>
             <a:pPr algn="r"/>
             <a:r>
-              <a:t>237</a:t>
+              <a:t>238</a:t>
             </a:r>
             <a:endParaRPr sz="1000" b="1">
               <a:solidFill>
@@ -5400,7 +5400,7 @@
           <a:p>
             <a:pPr algn="r"/>
             <a:r>
-              <a:t>238</a:t>
+              <a:t>239</a:t>
             </a:r>
             <a:endParaRPr sz="1000" b="1">
               <a:solidFill>
@@ -5697,7 +5697,7 @@
           <a:p>
             <a:pPr algn="r"/>
             <a:r>
-              <a:t>239</a:t>
+              <a:t>240</a:t>
             </a:r>
             <a:endParaRPr sz="1000" b="1">
               <a:solidFill>
@@ -6142,7 +6142,7 @@
           <a:p>
             <a:pPr algn="r"/>
             <a:r>
-              <a:t>240</a:t>
+              <a:t>241</a:t>
             </a:r>
             <a:endParaRPr sz="1000" b="1">
               <a:solidFill>
@@ -6355,7 +6355,7 @@
           <a:p>
             <a:pPr algn="r"/>
             <a:r>
-              <a:t>228</a:t>
+              <a:t>229</a:t>
             </a:r>
             <a:endParaRPr sz="1000" b="1">
               <a:solidFill>
@@ -6572,7 +6572,7 @@
           <a:p>
             <a:pPr algn="r"/>
             <a:r>
-              <a:t>229</a:t>
+              <a:t>230</a:t>
             </a:r>
             <a:endParaRPr sz="1000" b="1">
               <a:solidFill>
@@ -6961,7 +6961,7 @@
           <a:p>
             <a:pPr algn="r"/>
             <a:r>
-              <a:t>230</a:t>
+              <a:t>231</a:t>
             </a:r>
             <a:endParaRPr sz="1000" b="1">
               <a:solidFill>
@@ -7344,7 +7344,7 @@
           <a:p>
             <a:pPr algn="r"/>
             <a:r>
-              <a:t>231</a:t>
+              <a:t>232</a:t>
             </a:r>
             <a:endParaRPr sz="1000" b="1">
               <a:solidFill>
@@ -7616,7 +7616,7 @@
           <a:p>
             <a:pPr algn="r"/>
             <a:r>
-              <a:t>232</a:t>
+              <a:t>233</a:t>
             </a:r>
             <a:endParaRPr sz="1000" b="1">
               <a:solidFill>
@@ -7943,7 +7943,7 @@
           <a:p>
             <a:pPr algn="r"/>
             <a:r>
-              <a:t>233</a:t>
+              <a:t>234</a:t>
             </a:r>
             <a:endParaRPr sz="1000" b="1">
               <a:solidFill>
@@ -8190,7 +8190,7 @@
           <a:p>
             <a:pPr algn="r"/>
             <a:r>
-              <a:t>234</a:t>
+              <a:t>235</a:t>
             </a:r>
             <a:endParaRPr sz="1000" b="1">
               <a:solidFill>
@@ -8487,7 +8487,7 @@
           <a:p>
             <a:pPr algn="r"/>
             <a:r>
-              <a:t>235</a:t>
+              <a:t>236</a:t>
             </a:r>
             <a:endParaRPr sz="1000" b="1">
               <a:solidFill>

--- a/_implementation-notes/evening-series/FotH Evening Session 16 Slides DRAFT v1.pptx
+++ b/_implementation-notes/evening-series/FotH Evening Session 16 Slides DRAFT v1.pptx
@@ -1519,14 +1519,17 @@
           <a:lstStyle/>
           <a:p>
             <a:r>
-              <a:rPr lang="en-US" sz="1200"/>
               <a:t>S16 · 8:28–8:30 · LEAD: CONTAINER HOLDER · STANDING CIRCLE</a:t>
             </a:r>
           </a:p>
           <a:p>
             <a:r>
-              <a:rPr lang="en-US" sz="1200"/>
               <a:t>BEATS: 1. Same circle as the start; one word for what is happening in you as we close. 2. Two thank-yous: every hand that cooked and served, and the cleanup crew by name; everyone clears their own place. 3. The week: five minutes with the Pulse, bin at the door when we gather; keep walking your card, slips and all. 4. Aaronic blessing. Go home glad.</a:t>
+            </a:r>
+          </a:p>
+          <a:p>
+            <a:r>
+              <a:t>BLESSINGS: eyes on the person, not the screen — nothing to read; say what is on your heart for them, specific and short.</a:t>
             </a:r>
           </a:p>
         </p:txBody>
@@ -6003,7 +6006,7 @@
                 </a:solidFill>
                 <a:latin typeface="Calibri"/>
               </a:rPr>
-              <a:t>Blessings — specific, witnessed, short</a:t>
+              <a:t>Blessings — eyes on the person, not the screen: say what is on your heart for them. Specific, witnessed, short</a:t>
             </a:r>
           </a:p>
           <a:p>

--- a/_implementation-notes/evening-series/FotH Evening Session 16 Slides DRAFT v1.pptx
+++ b/_implementation-notes/evening-series/FotH Evening Session 16 Slides DRAFT v1.pptx
@@ -5019,7 +5019,7 @@
           <a:p>
             <a:pPr algn="r"/>
             <a:r>
-              <a:t>237</a:t>
+              <a:t>238</a:t>
             </a:r>
             <a:endParaRPr sz="1000" b="1">
               <a:solidFill>
@@ -5211,7 +5211,7 @@
           <a:p>
             <a:pPr algn="r"/>
             <a:r>
-              <a:t>238</a:t>
+              <a:t>239</a:t>
             </a:r>
             <a:endParaRPr sz="1000" b="1">
               <a:solidFill>
@@ -5403,7 +5403,7 @@
           <a:p>
             <a:pPr algn="r"/>
             <a:r>
-              <a:t>239</a:t>
+              <a:t>240</a:t>
             </a:r>
             <a:endParaRPr sz="1000" b="1">
               <a:solidFill>
@@ -5700,7 +5700,7 @@
           <a:p>
             <a:pPr algn="r"/>
             <a:r>
-              <a:t>240</a:t>
+              <a:t>241</a:t>
             </a:r>
             <a:endParaRPr sz="1000" b="1">
               <a:solidFill>
@@ -6145,7 +6145,7 @@
           <a:p>
             <a:pPr algn="r"/>
             <a:r>
-              <a:t>241</a:t>
+              <a:t>242</a:t>
             </a:r>
             <a:endParaRPr sz="1000" b="1">
               <a:solidFill>
@@ -6358,7 +6358,7 @@
           <a:p>
             <a:pPr algn="r"/>
             <a:r>
-              <a:t>229</a:t>
+              <a:t>230</a:t>
             </a:r>
             <a:endParaRPr sz="1000" b="1">
               <a:solidFill>
@@ -6575,7 +6575,7 @@
           <a:p>
             <a:pPr algn="r"/>
             <a:r>
-              <a:t>230</a:t>
+              <a:t>231</a:t>
             </a:r>
             <a:endParaRPr sz="1000" b="1">
               <a:solidFill>
@@ -6964,7 +6964,7 @@
           <a:p>
             <a:pPr algn="r"/>
             <a:r>
-              <a:t>231</a:t>
+              <a:t>232</a:t>
             </a:r>
             <a:endParaRPr sz="1000" b="1">
               <a:solidFill>
@@ -7347,7 +7347,7 @@
           <a:p>
             <a:pPr algn="r"/>
             <a:r>
-              <a:t>232</a:t>
+              <a:t>233</a:t>
             </a:r>
             <a:endParaRPr sz="1000" b="1">
               <a:solidFill>
@@ -7619,7 +7619,7 @@
           <a:p>
             <a:pPr algn="r"/>
             <a:r>
-              <a:t>233</a:t>
+              <a:t>234</a:t>
             </a:r>
             <a:endParaRPr sz="1000" b="1">
               <a:solidFill>
@@ -7946,7 +7946,7 @@
           <a:p>
             <a:pPr algn="r"/>
             <a:r>
-              <a:t>234</a:t>
+              <a:t>235</a:t>
             </a:r>
             <a:endParaRPr sz="1000" b="1">
               <a:solidFill>
@@ -8193,7 +8193,7 @@
           <a:p>
             <a:pPr algn="r"/>
             <a:r>
-              <a:t>235</a:t>
+              <a:t>236</a:t>
             </a:r>
             <a:endParaRPr sz="1000" b="1">
               <a:solidFill>
@@ -8490,7 +8490,7 @@
           <a:p>
             <a:pPr algn="r"/>
             <a:r>
-              <a:t>236</a:t>
+              <a:t>237</a:t>
             </a:r>
             <a:endParaRPr sz="1000" b="1">
               <a:solidFill>

--- a/_implementation-notes/evening-series/FotH Evening Session 16 Slides DRAFT v1.pptx
+++ b/_implementation-notes/evening-series/FotH Evening Session 16 Slides DRAFT v1.pptx
@@ -784,7 +784,7 @@
           <a:lstStyle/>
           <a:p>
             <a:r>
-              <a:t>S16 · WELCOME · LEAD: CONTAINER HOLDER · GROUNDING — every session opens on this map</a:t>
+              <a:t>E12 · WELCOME · LEAD: CONTAINER HOLDER · GROUNDING — every session opens on this map</a:t>
             </a:r>
           </a:p>
           <a:p>
@@ -794,7 +794,7 @@
           </a:p>
           <a:p>
             <a:r>
-              <a:t>1. Locate tonight on the map, plainly: Session 16 stands in the second box — Connect with Others, as family. Each connection makes the next one real (Matt. 22:37–40).</a:t>
+              <a:t>1. Locate tonight on the map, plainly: Evening 12 stands in the second box — Connect with Others, as family. Each connection makes the next one real (Matt. 22:37–40).</a:t>
             </a:r>
           </a:p>
           <a:p>
@@ -855,7 +855,7 @@
           <a:lstStyle/>
           <a:p>
             <a:r>
-              <a:t>S16 · COMMISSIONING · LEAD: CONTENT PRESENTER</a:t>
+              <a:t>E12 · COMMISSIONING · LEAD: CONTENT PRESENTER</a:t>
             </a:r>
           </a:p>
           <a:p>
@@ -926,7 +926,7 @@
           <a:lstStyle/>
           <a:p>
             <a:r>
-              <a:t>S16 · COMMISSIONING · LEAD: CONTENT PRESENTER</a:t>
+              <a:t>E12 · COMMISSIONING · LEAD: CONTENT PRESENTER</a:t>
             </a:r>
           </a:p>
           <a:p>
@@ -992,13 +992,11 @@
           <a:lstStyle/>
           <a:p>
             <a:r>
-              <a:rPr lang="en-US" sz="1200"/>
-              <a:t>S16 · pre-session · DIVIDER</a:t>
-            </a:r>
-          </a:p>
-          <a:p>
-            <a:r>
-              <a:rPr lang="en-US" sz="1200"/>
+              <a:t>E12 · pre-session · DIVIDER</a:t>
+            </a:r>
+          </a:p>
+          <a:p>
+            <a:r>
               <a:t>On screen through dinner and as the circle forms. Greet at the door — the slide holds the room.</a:t>
             </a:r>
           </a:p>
@@ -1045,19 +1043,16 @@
           <a:lstStyle/>
           <a:p>
             <a:r>
-              <a:rPr lang="en-US" sz="1200"/>
-              <a:t>S16 · 7:00–7:08 · LEAD: CONTAINER HOLDER · STANDING CIRCLE</a:t>
-            </a:r>
-          </a:p>
-          <a:p>
-            <a:r>
-              <a:rPr lang="en-US" sz="1200"/>
+              <a:t>E12 · 7:00–7:08 · LEAD: CONTAINER HOLDER · STANDING CIRCLE</a:t>
+            </a:r>
+          </a:p>
+          <a:p>
+            <a:r>
               <a:t>BEATS: 1. Tell them the whole plan up front so nobody waits for the catch: we are going to eat together — that IS the session. A short round before food, a few good questions at dessert, one page at the end. 2. Tables today, not the circle — the one night of the year. 3. Nothing new is taught; the meal is the point.</a:t>
             </a:r>
           </a:p>
           <a:p>
             <a:r>
-              <a:rPr lang="en-US" sz="1200"/>
               <a:t>GUARD: Do not program the meal — no devotional between courses, no teaching moment. Withholding content is today's team discipline.</a:t>
             </a:r>
           </a:p>
@@ -1104,7 +1099,7 @@
           <a:lstStyle/>
           <a:p>
             <a:r>
-              <a:t>S16 · 7:00–7:08 · LEAD: CONTAINER HOLDER · STANDING CIRCLE</a:t>
+              <a:t>E12 · 7:00–7:08 · LEAD: CONTAINER HOLDER · STANDING CIRCLE</a:t>
             </a:r>
           </a:p>
           <a:p>
@@ -1165,25 +1160,21 @@
           <a:lstStyle/>
           <a:p>
             <a:r>
-              <a:rPr lang="en-US" sz="1200"/>
-              <a:t>S16 · 7:25–7:29 · LEAD: CONTENT PRESENTER · STANDING CIRCLE</a:t>
-            </a:r>
-          </a:p>
-          <a:p>
-            <a:r>
-              <a:rPr lang="en-US" sz="1200"/>
+              <a:t>E12 · 7:25–7:29 · LEAD: CONTENT PRESENTER · STANDING CIRCLE</a:t>
+            </a:r>
+          </a:p>
+          <a:p>
+            <a:r>
               <a:t>BEATS: 1. One sentence each: where the Rhythm Card held, or where it slipped — both welcome; a noticed slip is the practice working. 2. No fixing, no advice, from anyone; if troubleshooting starts: good noticing — hold the fixing. 3. Close it: sixteen days in, everyone in this circle is still on the long walk.</a:t>
             </a:r>
           </a:p>
           <a:p>
             <a:r>
-              <a:rPr lang="en-US" sz="1200"/>
               <a:t>CUES: The arranged parent opens (Run Card) — never a cold call on a teen; pass anytime.</a:t>
             </a:r>
           </a:p>
           <a:p>
             <a:r>
-              <a:rPr lang="en-US" sz="1200"/>
               <a:t>GUARD: Watch quietly — whoever reports a slip with shame gets a warm follow-up this week; note it for the debrief, not the circle.</a:t>
             </a:r>
           </a:p>
@@ -1230,13 +1221,11 @@
           <a:lstStyle/>
           <a:p>
             <a:r>
-              <a:rPr lang="en-US" sz="1200"/>
-              <a:t>S16 · 7:29–7:31 · LEAD: CONTENT PRESENTER · STANDING CIRCLE</a:t>
-            </a:r>
-          </a:p>
-          <a:p>
-            <a:r>
-              <a:rPr lang="en-US" sz="1200"/>
+              <a:t>E12 · 7:29–7:31 · LEAD: CONTENT PRESENTER · STANDING CIRCLE</a:t>
+            </a:r>
+          </a:p>
+          <a:p>
+            <a:r>
               <a:t>BEATS: 1. Read Acts 2:46 — the first church, glad and generous hearts. 2. Thirty seconds of frame: the first church ran on three rails — the teaching, the table, the prayers; today is the table, and it IS the formation, not the break from it. 3. Pray the grace. 4. Send them to eat.</a:t>
             </a:r>
           </a:p>
@@ -1283,19 +1272,16 @@
           <a:lstStyle/>
           <a:p>
             <a:r>
-              <a:rPr lang="en-US" sz="1200"/>
-              <a:t>S16 · 7:31–7:59 · LEAD: CONTENT PRESENTER · TABLES</a:t>
-            </a:r>
-          </a:p>
-          <a:p>
-            <a:r>
-              <a:rPr lang="en-US" sz="1200"/>
-              <a:t>BEATS: 1. No agenda — Companions sit and eat as members of their tables; the cohort needs to see its Companions laugh at dinner. 2. Watch faces gently, especially the Week 15 watch-list: a family sitting close and quiet, a parent with full eyes, a teen who won't look up — nobody names it today; offline contact within 48 hours. 3. Keep the food moving; note who is missing for the Sought Stray line.</a:t>
-            </a:r>
-          </a:p>
-          <a:p>
-            <a:r>
-              <a:rPr lang="en-US" sz="1200"/>
+              <a:t>E12 · 7:31–7:59 · LEAD: CONTENT PRESENTER · TABLES</a:t>
+            </a:r>
+          </a:p>
+          <a:p>
+            <a:r>
+              <a:t>BEATS: 1. No agenda — Companions sit and eat as members of their tables; the cohort needs to see its Companions laugh at dinner. 2. Watch faces gently, especially the Evening 11 watch-list: a family sitting close and quiet, a parent with full eyes, a teen who won't look up — nobody names it today; offline contact within 48 hours. 3. Keep the food moving; note who is missing for the Sought Stray line.</a:t>
+            </a:r>
+          </a:p>
+          <a:p>
+            <a:r>
               <a:t>GUARD: The allergy list is law — posted, current, every dish labeled with its allergens; the food-safety lead owns the serving table. Never ask, at a table or from the front, whether the Four Questions happened — invisible by default.</a:t>
             </a:r>
           </a:p>
@@ -1342,19 +1328,16 @@
           <a:lstStyle/>
           <a:p>
             <a:r>
-              <a:rPr lang="en-US" sz="1200"/>
-              <a:t>S16 · 7:59–8:17 · LEAD: CONTENT PRESENTER · TABLES</a:t>
-            </a:r>
-          </a:p>
-          <a:p>
-            <a:r>
-              <a:rPr lang="en-US" sz="1200"/>
+              <a:t>E12 · 7:59–8:17 · LEAD: CONTENT PRESENTER · TABLES</a:t>
+            </a:r>
+          </a:p>
+          <a:p>
+            <a:r>
               <a:t>BEATS: 1. Dessert lands and the card stack comes out — frame it from your seat; standing up breaks the spell. 2. How it works: read the card aloud; a parent answers first, every table, every card; anyone who wants answers; nobody has to; next card when it feels done. 3. Two rules said aloud: no report-out — what is said at your table stays there; and there is no wrong way for this to go.</a:t>
             </a:r>
           </a:p>
           <a:p>
             <a:r>
-              <a:rPr lang="en-US" sz="1200"/>
               <a:t>GUARD: Laughter is a fully valid outcome — ten minutes laughing at dad's answer IS the exercise. Two cards done well beats three done fast. A card that finds a tender place: warmth, no working it at the table; a Companion follows up offline.</a:t>
             </a:r>
           </a:p>
@@ -1401,19 +1384,16 @@
           <a:lstStyle/>
           <a:p>
             <a:r>
-              <a:rPr lang="en-US" sz="1200"/>
-              <a:t>S16 · 8:17–8:20 · LEAD: CONTENT PRESENTER · WHOLE ROOM (seated)</a:t>
-            </a:r>
-          </a:p>
-          <a:p>
-            <a:r>
-              <a:rPr lang="en-US" sz="1200"/>
+              <a:t>E12 · 8:17–8:20 · LEAD: CONTENT PRESENTER · WHOLE ROOM (seated)</a:t>
+            </a:r>
+          </a:p>
+          <a:p>
+            <a:r>
               <a:t>BEATS: 1. One unhurried minute, no apology: this is the Quarterly Pulse, third of the year — one page, three questions, about five minutes at home. 2. Say the deal plainly: this room steers by these pages; the final quarter is built from what you write. 3. Back in the bin at when we gather's door — nobody watches the bin; signed or unsigned, your choice.</a:t>
             </a:r>
           </a:p>
           <a:p>
             <a:r>
-              <a:rPr lang="en-US" sz="1200"/>
               <a:t>GUARD: 'Sorry to end a fun night with paperwork' undoes the instrument — frame it as steering, never homework.</a:t>
             </a:r>
           </a:p>
@@ -1460,19 +1440,16 @@
           <a:lstStyle/>
           <a:p>
             <a:r>
-              <a:rPr lang="en-US" sz="1200"/>
-              <a:t>S16 · 8:24–8:28 · LEAD: BOTH LEADERS · WHOLE ROOM</a:t>
-            </a:r>
-          </a:p>
-          <a:p>
-            <a:r>
-              <a:rPr lang="en-US" sz="1200"/>
+              <a:t>E12 · 8:24–8:28 · LEAD: BOTH LEADERS · WHOLE ROOM</a:t>
+            </a:r>
+          </a:p>
+          <a:p>
+            <a:r>
               <a:t>BEATS: 1. Same round, even on a dinner night — especially today; the round on an easy evening is what keeps it ordinary. 2. The leader's three, then the room's two questions — two or three voices each. 3. Receive without defending — 'thank you' is the whole response.</a:t>
             </a:r>
           </a:p>
           <a:p>
             <a:r>
-              <a:rPr lang="en-US" sz="1200"/>
               <a:t>CUES: Expect food commentary; take it seriously — next year's family night is built from today's answers.</a:t>
             </a:r>
           </a:p>
@@ -1519,7 +1496,7 @@
           <a:lstStyle/>
           <a:p>
             <a:r>
-              <a:t>S16 · 8:28–8:30 · LEAD: CONTAINER HOLDER · STANDING CIRCLE</a:t>
+              <a:t>E12 · 8:28–8:30 · LEAD: CONTAINER HOLDER · STANDING CIRCLE</a:t>
             </a:r>
           </a:p>
           <a:p>
@@ -6260,7 +6237,7 @@
                 </a:solidFill>
                 <a:latin typeface="Calibri"/>
               </a:rPr>
-              <a:t>SESSION 16</a:t>
+              <a:t>EVENING 12</a:t>
             </a:r>
           </a:p>
           <a:p>
@@ -6530,7 +6507,7 @@
                 </a:solidFill>
                 <a:latin typeface="Calibri"/>
               </a:rPr>
-              <a:t>Session 16 stands in the second box — </a:t>
+              <a:t>Evening 12 stands in the second box — </a:t>
             </a:r>
             <a:r>
               <a:rPr sz="1800" b="1">
@@ -6714,7 +6691,7 @@
                 </a:solidFill>
                 <a:latin typeface="Cambria"/>
               </a:rPr>
-              <a:t>Session 16 — Tonight’s Road</a:t>
+              <a:t>Evening 12 — Tonight’s Road</a:t>
             </a:r>
           </a:p>
         </p:txBody>

--- a/_implementation-notes/evening-series/FotH Evening Session 16 Slides DRAFT v1.pptx
+++ b/_implementation-notes/evening-series/FotH Evening Session 16 Slides DRAFT v1.pptx
@@ -4969,7 +4969,7 @@
                 </a:solidFill>
                 <a:latin typeface="Calibri"/>
               </a:rPr>
-              <a:t>Back next Wednesday, in the bin at the door — signed or unsigned, your choice; nobody watches the bin</a:t>
+              <a:t>Back next evening, in the bin at the door — signed or unsigned, your choice; nobody watches the bin</a:t>
             </a:r>
           </a:p>
         </p:txBody>
@@ -7791,7 +7791,7 @@
                 </a:solidFill>
                 <a:latin typeface="Calibri"/>
               </a:rPr>
-              <a:t>Our Wednesdays have lived on the teaching and the prayers — tonight is the table</a:t>
+              <a:t>Our evenings have lived on the teaching and the prayers — tonight is the table</a:t>
             </a:r>
           </a:p>
           <a:p>
